--- a/LeetCode_Starter_Guide.pptx
+++ b/LeetCode_Starter_Guide.pptx
@@ -34,6 +34,10 @@
     <p:sldId id="282" r:id="rId34"/>
     <p:sldId id="283" r:id="rId35"/>
     <p:sldId id="284" r:id="rId36"/>
+    <p:sldId id="285" r:id="rId37"/>
+    <p:sldId id="286" r:id="rId38"/>
+    <p:sldId id="287" r:id="rId39"/>
+    <p:sldId id="288" r:id="rId40"/>
   </p:sldIdLst>
   <p:sldSz cx="12191695" cy="6858000" type="screen4x3"/>
   <p:notesSz cx="6858000" cy="9144000"/>
@@ -1930,7 +1934,7 @@
           <a:lstStyle/>
           <a:p>
             <a:r>
-              <a:t>ارائه را با انرژی مثبت تمام کنید و حضار را تشویق کنید که همین امروز اولین مسئله را حل کنند.</a:t>
+              <a:t>بیان مسئله همگام‌سازی State در CardStack از پروژه سپینو با Jetpack Compose.</a:t>
             </a:r>
           </a:p>
         </p:txBody>
@@ -2000,7 +2004,7 @@
           <a:lstStyle/>
           <a:p>
             <a:r>
-              <a:t>پاسخ به سوالات متداول: بهترین زبان (کاتلین / پایتون)، تعداد مسئله کافی (۷۵ تا ۱۰۰ مسئله عمیق).</a:t>
+              <a:t>کد غیربهینه اولیه که در نگاه اول شیک است اما در پس‌زمینه جستجوی خطی تودرتو انجام می‌دهد.</a:t>
             </a:r>
           </a:p>
         </p:txBody>
@@ -2071,6 +2075,286 @@
           <a:p>
             <a:r>
               <a:t>استرس حضار را از بین ببرید. تشبیه به ورزش و موسیقی بزنید: هیچ‌کس در روز اول ماراتن ندویده و پیانو ننواخته است.</a:t>
+            </a:r>
+          </a:p>
+        </p:txBody>
+      </p:sp>
+      <p:sp>
+        <p:nvSpPr>
+          <p:cNvPr id="4" name="Slide Number Placeholder 3"/>
+          <p:cNvSpPr>
+            <a:spLocks noGrp="1"/>
+          </p:cNvSpPr>
+          <p:nvPr>
+            <p:ph type="sldNum" idx="5" sz="quarter"/>
+          </p:nvPr>
+        </p:nvSpPr>
+        <p:spPr/>
+      </p:sp>
+    </p:spTree>
+  </p:cSld>
+  <p:clrMapOvr>
+    <a:masterClrMapping/>
+  </p:clrMapOvr>
+</p:notes>
+</file>
+
+<file path=ppt/notesSlides/notesSlide30.xml><?xml version="1.0" encoding="utf-8"?>
+<p:notes xmlns:a="http://schemas.openxmlformats.org/drawingml/2006/main" xmlns:p="http://schemas.openxmlformats.org/presentationml/2006/main" xmlns:r="http://schemas.openxmlformats.org/officeDocument/2006/relationships">
+  <p:cSld>
+    <p:spTree>
+      <p:nvGrpSpPr>
+        <p:cNvPr id="1" name=""/>
+        <p:cNvGrpSpPr/>
+        <p:nvPr/>
+      </p:nvGrpSpPr>
+      <p:grpSpPr>
+        <a:xfrm>
+          <a:off x="0" y="0"/>
+          <a:ext cx="0" cy="0"/>
+          <a:chOff x="0" y="0"/>
+          <a:chExt cx="0" cy="0"/>
+        </a:xfrm>
+      </p:grpSpPr>
+      <p:sp>
+        <p:nvSpPr>
+          <p:cNvPr id="2" name="Slide Image Placeholder 1"/>
+          <p:cNvSpPr>
+            <a:spLocks noGrp="1"/>
+          </p:cNvSpPr>
+          <p:nvPr>
+            <p:ph type="sldImg" idx="2"/>
+          </p:nvPr>
+        </p:nvSpPr>
+        <p:spPr/>
+      </p:sp>
+      <p:sp>
+        <p:nvSpPr>
+          <p:cNvPr id="3" name="Notes Placeholder 2"/>
+          <p:cNvSpPr>
+            <a:spLocks noGrp="1"/>
+          </p:cNvSpPr>
+          <p:nvPr>
+            <p:ph type="body" idx="3" sz="quarter"/>
+          </p:nvPr>
+        </p:nvSpPr>
+        <p:spPr/>
+        <p:txBody>
+          <a:bodyPr/>
+          <a:lstStyle/>
+          <a:p>
+            <a:r>
+              <a:t>بررسی فنی علت افت فریم و نقض بودجه ۱۶ میلی‌ثانیه‌ای در اثر اجرای الگوریتم O(N²).</a:t>
+            </a:r>
+          </a:p>
+        </p:txBody>
+      </p:sp>
+      <p:sp>
+        <p:nvSpPr>
+          <p:cNvPr id="4" name="Slide Number Placeholder 3"/>
+          <p:cNvSpPr>
+            <a:spLocks noGrp="1"/>
+          </p:cNvSpPr>
+          <p:nvPr>
+            <p:ph type="sldNum" idx="5" sz="quarter"/>
+          </p:nvPr>
+        </p:nvSpPr>
+        <p:spPr/>
+      </p:sp>
+    </p:spTree>
+  </p:cSld>
+  <p:clrMapOvr>
+    <a:masterClrMapping/>
+  </p:clrMapOvr>
+</p:notes>
+</file>
+
+<file path=ppt/notesSlides/notesSlide31.xml><?xml version="1.0" encoding="utf-8"?>
+<p:notes xmlns:a="http://schemas.openxmlformats.org/drawingml/2006/main" xmlns:p="http://schemas.openxmlformats.org/presentationml/2006/main" xmlns:r="http://schemas.openxmlformats.org/officeDocument/2006/relationships">
+  <p:cSld>
+    <p:spTree>
+      <p:nvGrpSpPr>
+        <p:cNvPr id="1" name=""/>
+        <p:cNvGrpSpPr/>
+        <p:nvPr/>
+      </p:nvGrpSpPr>
+      <p:grpSpPr>
+        <a:xfrm>
+          <a:off x="0" y="0"/>
+          <a:ext cx="0" cy="0"/>
+          <a:chOff x="0" y="0"/>
+          <a:chExt cx="0" cy="0"/>
+        </a:xfrm>
+      </p:grpSpPr>
+      <p:sp>
+        <p:nvSpPr>
+          <p:cNvPr id="2" name="Slide Image Placeholder 1"/>
+          <p:cNvSpPr>
+            <a:spLocks noGrp="1"/>
+          </p:cNvSpPr>
+          <p:nvPr>
+            <p:ph type="sldImg" idx="2"/>
+          </p:nvPr>
+        </p:nvSpPr>
+        <p:spPr/>
+      </p:sp>
+      <p:sp>
+        <p:nvSpPr>
+          <p:cNvPr id="3" name="Notes Placeholder 2"/>
+          <p:cNvSpPr>
+            <a:spLocks noGrp="1"/>
+          </p:cNvSpPr>
+          <p:nvPr>
+            <p:ph type="body" idx="3" sz="quarter"/>
+          </p:nvPr>
+        </p:nvSpPr>
+        <p:spPr/>
+        <p:txBody>
+          <a:bodyPr/>
+          <a:lstStyle/>
+          <a:p>
+            <a:r>
+              <a:t>پیاده‌سازی بهینه با toSet() و توضیح تفاوت جستجوی O(1) در جدول هش با جستجوی خطی در لیست.</a:t>
+            </a:r>
+          </a:p>
+        </p:txBody>
+      </p:sp>
+      <p:sp>
+        <p:nvSpPr>
+          <p:cNvPr id="4" name="Slide Number Placeholder 3"/>
+          <p:cNvSpPr>
+            <a:spLocks noGrp="1"/>
+          </p:cNvSpPr>
+          <p:nvPr>
+            <p:ph type="sldNum" idx="5" sz="quarter"/>
+          </p:nvPr>
+        </p:nvSpPr>
+        <p:spPr/>
+      </p:sp>
+    </p:spTree>
+  </p:cSld>
+  <p:clrMapOvr>
+    <a:masterClrMapping/>
+  </p:clrMapOvr>
+</p:notes>
+</file>
+
+<file path=ppt/notesSlides/notesSlide32.xml><?xml version="1.0" encoding="utf-8"?>
+<p:notes xmlns:a="http://schemas.openxmlformats.org/drawingml/2006/main" xmlns:p="http://schemas.openxmlformats.org/presentationml/2006/main" xmlns:r="http://schemas.openxmlformats.org/officeDocument/2006/relationships">
+  <p:cSld>
+    <p:spTree>
+      <p:nvGrpSpPr>
+        <p:cNvPr id="1" name=""/>
+        <p:cNvGrpSpPr/>
+        <p:nvPr/>
+      </p:nvGrpSpPr>
+      <p:grpSpPr>
+        <a:xfrm>
+          <a:off x="0" y="0"/>
+          <a:ext cx="0" cy="0"/>
+          <a:chOff x="0" y="0"/>
+          <a:chExt cx="0" cy="0"/>
+        </a:xfrm>
+      </p:grpSpPr>
+      <p:sp>
+        <p:nvSpPr>
+          <p:cNvPr id="2" name="Slide Image Placeholder 1"/>
+          <p:cNvSpPr>
+            <a:spLocks noGrp="1"/>
+          </p:cNvSpPr>
+          <p:nvPr>
+            <p:ph type="sldImg" idx="2"/>
+          </p:nvPr>
+        </p:nvSpPr>
+        <p:spPr/>
+      </p:sp>
+      <p:sp>
+        <p:nvSpPr>
+          <p:cNvPr id="3" name="Notes Placeholder 2"/>
+          <p:cNvSpPr>
+            <a:spLocks noGrp="1"/>
+          </p:cNvSpPr>
+          <p:nvPr>
+            <p:ph type="body" idx="3" sz="quarter"/>
+          </p:nvPr>
+        </p:nvSpPr>
+        <p:spPr/>
+        <p:txBody>
+          <a:bodyPr/>
+          <a:lstStyle/>
+          <a:p>
+            <a:r>
+              <a:t>ارائه را با انرژی مثبت تمام کنید و حضار را تشویق کنید که همین امروز اولین مسئله را حل کنند.</a:t>
+            </a:r>
+          </a:p>
+        </p:txBody>
+      </p:sp>
+      <p:sp>
+        <p:nvSpPr>
+          <p:cNvPr id="4" name="Slide Number Placeholder 3"/>
+          <p:cNvSpPr>
+            <a:spLocks noGrp="1"/>
+          </p:cNvSpPr>
+          <p:nvPr>
+            <p:ph type="sldNum" idx="5" sz="quarter"/>
+          </p:nvPr>
+        </p:nvSpPr>
+        <p:spPr/>
+      </p:sp>
+    </p:spTree>
+  </p:cSld>
+  <p:clrMapOvr>
+    <a:masterClrMapping/>
+  </p:clrMapOvr>
+</p:notes>
+</file>
+
+<file path=ppt/notesSlides/notesSlide33.xml><?xml version="1.0" encoding="utf-8"?>
+<p:notes xmlns:a="http://schemas.openxmlformats.org/drawingml/2006/main" xmlns:p="http://schemas.openxmlformats.org/presentationml/2006/main" xmlns:r="http://schemas.openxmlformats.org/officeDocument/2006/relationships">
+  <p:cSld>
+    <p:spTree>
+      <p:nvGrpSpPr>
+        <p:cNvPr id="1" name=""/>
+        <p:cNvGrpSpPr/>
+        <p:nvPr/>
+      </p:nvGrpSpPr>
+      <p:grpSpPr>
+        <a:xfrm>
+          <a:off x="0" y="0"/>
+          <a:ext cx="0" cy="0"/>
+          <a:chOff x="0" y="0"/>
+          <a:chExt cx="0" cy="0"/>
+        </a:xfrm>
+      </p:grpSpPr>
+      <p:sp>
+        <p:nvSpPr>
+          <p:cNvPr id="2" name="Slide Image Placeholder 1"/>
+          <p:cNvSpPr>
+            <a:spLocks noGrp="1"/>
+          </p:cNvSpPr>
+          <p:nvPr>
+            <p:ph type="sldImg" idx="2"/>
+          </p:nvPr>
+        </p:nvSpPr>
+        <p:spPr/>
+      </p:sp>
+      <p:sp>
+        <p:nvSpPr>
+          <p:cNvPr id="3" name="Notes Placeholder 2"/>
+          <p:cNvSpPr>
+            <a:spLocks noGrp="1"/>
+          </p:cNvSpPr>
+          <p:nvPr>
+            <p:ph type="body" idx="3" sz="quarter"/>
+          </p:nvPr>
+        </p:nvSpPr>
+        <p:spPr/>
+        <p:txBody>
+          <a:bodyPr/>
+          <a:lstStyle/>
+          <a:p>
+            <a:r>
+              <a:t>پاسخ به سوالات متداول: بهترین زبان (کاتلین / پایتون)، تعداد مسئله کافی (۷۵ تا ۱۰۰ مسئله عمیق).</a:t>
             </a:r>
           </a:p>
         </p:txBody>
@@ -14388,7 +14672,7 @@
               </a:defRPr>
             </a:pPr>
             <a:r>
-              <a:t>برنامه اقدام · ACTION PLAN  |  جمع‌بندی و برنامه ۳۰ روزه آینده</a:t>
+              <a:t>تجربه عملی مهندسی · REAL-WORLD CASE STUDY  |  مطالعه موردی در پروداکشن: چالش CardStack در سپینو</a:t>
             </a:r>
           </a:p>
           <a:p>
@@ -14400,7 +14684,7 @@
               </a:defRPr>
             </a:pPr>
             <a:r>
-              <a:t>نقشه راه ۴ هفته‌ای برای رسیدن به آمادگی در جلسات ارزیابی:</a:t>
+              <a:t>الگوریتم‌ها فقط برای مصاحبه نیستند؛ انتخاب درست داده ضامن روانی رابط کاربری است:</a:t>
             </a:r>
           </a:p>
         </p:txBody>
@@ -14414,7 +14698,73 @@
         <p:spPr>
           <a:xfrm>
             <a:off x="731520" y="1463040"/>
-            <a:ext cx="2503170" cy="2011680"/>
+            <a:ext cx="5234940" cy="2011680"/>
+          </a:xfrm>
+          <a:prstGeom prst="roundRect">
+            <a:avLst/>
+          </a:prstGeom>
+          <a:solidFill>
+            <a:srgbClr val="141428"/>
+          </a:solidFill>
+          <a:ln w="19050">
+            <a:solidFill>
+              <a:srgbClr val="7C8FF5"/>
+            </a:solidFill>
+          </a:ln>
+        </p:spPr>
+        <p:style>
+          <a:lnRef idx="1">
+            <a:schemeClr val="accent1"/>
+          </a:lnRef>
+          <a:fillRef idx="3">
+            <a:schemeClr val="accent1"/>
+          </a:fillRef>
+          <a:effectRef idx="2">
+            <a:schemeClr val="accent1"/>
+          </a:effectRef>
+          <a:fontRef idx="minor">
+            <a:schemeClr val="lt1"/>
+          </a:fontRef>
+        </p:style>
+        <p:txBody>
+          <a:bodyPr rtlCol="0" anchor="ctr" wrap="square"/>
+          <a:lstStyle/>
+          <a:p>
+            <a:pPr algn="ctr">
+              <a:defRPr sz="1400" b="1">
+                <a:solidFill>
+                  <a:srgbClr val="7C8FF5"/>
+                </a:solidFill>
+              </a:defRPr>
+            </a:pPr>
+            <a:r>
+              <a:t>۱. داده‌های ورودی</a:t>
+            </a:r>
+          </a:p>
+          <a:p>
+            <a:pPr>
+              <a:defRPr sz="1100">
+                <a:solidFill>
+                  <a:srgbClr val="DDE1F5"/>
+                </a:solidFill>
+              </a:defRPr>
+            </a:pPr>
+            <a:r>
+              <a:t>دو لیست currentItems (در حال نمایش) و newCardsList (تازه از سرور).</a:t>
+            </a:r>
+          </a:p>
+        </p:txBody>
+      </p:sp>
+      <p:sp>
+        <p:nvSpPr>
+          <p:cNvPr id="5" name="Rounded Rectangle 4"/>
+          <p:cNvSpPr/>
+          <p:nvPr/>
+        </p:nvSpPr>
+        <p:spPr>
+          <a:xfrm>
+            <a:off x="6195059" y="1463040"/>
+            <a:ext cx="5234940" cy="2011680"/>
           </a:xfrm>
           <a:prstGeom prst="roundRect">
             <a:avLst/>
@@ -14454,7 +14804,7 @@
               </a:defRPr>
             </a:pPr>
             <a:r>
-              <a:t>هفته اول: مبانی آرایه و هش</a:t>
+              <a:t>۲. رفتار مورد انتظار</a:t>
             </a:r>
           </a:p>
           <a:p>
@@ -14466,139 +14816,54 @@
               </a:defRPr>
             </a:pPr>
             <a:r>
-              <a:t>حل ۵ مسئله Easy اول Blind 75 مانند Two Sum و Contains Duplicate.</a:t>
-            </a:r>
-          </a:p>
-        </p:txBody>
-      </p:sp>
-      <p:sp>
-        <p:nvSpPr>
-          <p:cNvPr id="5" name="Rounded Rectangle 4"/>
-          <p:cNvSpPr/>
-          <p:nvPr/>
-        </p:nvSpPr>
-        <p:spPr>
-          <a:xfrm>
-            <a:off x="3463289" y="1463040"/>
-            <a:ext cx="2503170" cy="2011680"/>
-          </a:xfrm>
-          <a:prstGeom prst="roundRect">
-            <a:avLst/>
-          </a:prstGeom>
-          <a:solidFill>
-            <a:srgbClr val="141428"/>
-          </a:solidFill>
-          <a:ln w="19050">
-            <a:solidFill>
-              <a:srgbClr val="7C8FF5"/>
-            </a:solidFill>
-          </a:ln>
-        </p:spPr>
-        <p:style>
-          <a:lnRef idx="1">
-            <a:schemeClr val="accent1"/>
-          </a:lnRef>
-          <a:fillRef idx="3">
-            <a:schemeClr val="accent1"/>
-          </a:fillRef>
-          <a:effectRef idx="2">
-            <a:schemeClr val="accent1"/>
-          </a:effectRef>
-          <a:fontRef idx="minor">
-            <a:schemeClr val="lt1"/>
-          </a:fontRef>
-        </p:style>
-        <p:txBody>
-          <a:bodyPr rtlCol="0" anchor="ctr" wrap="square"/>
-          <a:lstStyle/>
-          <a:p>
-            <a:pPr algn="ctr">
-              <a:defRPr sz="1400" b="1">
-                <a:solidFill>
-                  <a:srgbClr val="7C8FF5"/>
-                </a:solidFill>
-              </a:defRPr>
-            </a:pPr>
-            <a:r>
-              <a:t>هفته دوم: نشانگرها و پنجره</a:t>
-            </a:r>
-          </a:p>
-          <a:p>
-            <a:pPr>
-              <a:defRPr sz="1100">
+              <a:t>حفظ کارت‌های مشترک بدون فلیکر، حذف قدیمی‌ها، و اضافه کردن جدیدها به انتها.</a:t>
+            </a:r>
+          </a:p>
+        </p:txBody>
+      </p:sp>
+      <p:sp>
+        <p:nvSpPr>
+          <p:cNvPr id="6" name="TextBox 5"/>
+          <p:cNvSpPr txBox="1"/>
+          <p:nvPr/>
+        </p:nvSpPr>
+        <p:spPr>
+          <a:xfrm>
+            <a:off x="731520" y="3703320"/>
+            <a:ext cx="10698480" cy="1463040"/>
+          </a:xfrm>
+          <a:prstGeom prst="rect">
+            <a:avLst/>
+          </a:prstGeom>
+          <a:noFill/>
+        </p:spPr>
+        <p:txBody>
+          <a:bodyPr wrap="square">
+            <a:spAutoFit/>
+          </a:bodyPr>
+          <a:lstStyle/>
+          <a:p>
+            <a:pPr>
+              <a:defRPr sz="1300">
                 <a:solidFill>
                   <a:srgbClr val="DDE1F5"/>
                 </a:solidFill>
               </a:defRPr>
             </a:pPr>
             <a:r>
-              <a:t>الگوهای Two Pointers و Sliding Window با مرور منظم مسائل هفته اول.</a:t>
-            </a:r>
-          </a:p>
-        </p:txBody>
-      </p:sp>
-      <p:sp>
-        <p:nvSpPr>
-          <p:cNvPr id="6" name="Rounded Rectangle 5"/>
-          <p:cNvSpPr/>
-          <p:nvPr/>
-        </p:nvSpPr>
-        <p:spPr>
-          <a:xfrm>
-            <a:off x="6195059" y="1463040"/>
-            <a:ext cx="2503170" cy="2011680"/>
-          </a:xfrm>
-          <a:prstGeom prst="roundRect">
-            <a:avLst/>
-          </a:prstGeom>
-          <a:solidFill>
-            <a:srgbClr val="141428"/>
-          </a:solidFill>
-          <a:ln w="19050">
-            <a:solidFill>
-              <a:srgbClr val="E9A84C"/>
-            </a:solidFill>
-          </a:ln>
-        </p:spPr>
-        <p:style>
-          <a:lnRef idx="1">
-            <a:schemeClr val="accent1"/>
-          </a:lnRef>
-          <a:fillRef idx="3">
-            <a:schemeClr val="accent1"/>
-          </a:fillRef>
-          <a:effectRef idx="2">
-            <a:schemeClr val="accent1"/>
-          </a:effectRef>
-          <a:fontRef idx="minor">
-            <a:schemeClr val="lt1"/>
-          </a:fontRef>
-        </p:style>
-        <p:txBody>
-          <a:bodyPr rtlCol="0" anchor="ctr" wrap="square"/>
-          <a:lstStyle/>
-          <a:p>
-            <a:pPr algn="ctr">
-              <a:defRPr sz="1400" b="1">
-                <a:solidFill>
-                  <a:srgbClr val="E9A84C"/>
-                </a:solidFill>
-              </a:defRPr>
-            </a:pPr>
-            <a:r>
-              <a:t>هفته سوم: ساختارها و پشته</a:t>
-            </a:r>
-          </a:p>
-          <a:p>
-            <a:pPr>
-              <a:defRPr sz="1100">
+              <a:t>• چالش در کامپوز: پاک‌کردن و ساخت مجدد لیست باعث Recomposition سنگین و نابودی انیمیشن کارت‌ها (Jank) می‌شود.</a:t>
+            </a:r>
+          </a:p>
+          <a:p>
+            <a:pPr>
+              <a:defRPr sz="1300">
                 <a:solidFill>
                   <a:srgbClr val="DDE1F5"/>
                 </a:solidFill>
               </a:defRPr>
             </a:pPr>
             <a:r>
-              <a:t>درخت‌ها، پشته (Stack) و پیمایش‌های DFS و BFS پایه با رسم روی کاغذ.</a:t>
+              <a:t>• نیاز به تابع خالص: پیاده‌سازی syncCardStackState برای هماهنگ‌سازی بهینه پشته کارت‌ها.</a:t>
             </a:r>
           </a:p>
         </p:txBody>
@@ -14606,72 +14871,6 @@
       <p:sp>
         <p:nvSpPr>
           <p:cNvPr id="7" name="Rounded Rectangle 6"/>
-          <p:cNvSpPr/>
-          <p:nvPr/>
-        </p:nvSpPr>
-        <p:spPr>
-          <a:xfrm>
-            <a:off x="8926830" y="1463040"/>
-            <a:ext cx="2503170" cy="2011680"/>
-          </a:xfrm>
-          <a:prstGeom prst="roundRect">
-            <a:avLst/>
-          </a:prstGeom>
-          <a:solidFill>
-            <a:srgbClr val="141428"/>
-          </a:solidFill>
-          <a:ln w="19050">
-            <a:solidFill>
-              <a:srgbClr val="4ECCA3"/>
-            </a:solidFill>
-          </a:ln>
-        </p:spPr>
-        <p:style>
-          <a:lnRef idx="1">
-            <a:schemeClr val="accent1"/>
-          </a:lnRef>
-          <a:fillRef idx="3">
-            <a:schemeClr val="accent1"/>
-          </a:fillRef>
-          <a:effectRef idx="2">
-            <a:schemeClr val="accent1"/>
-          </a:effectRef>
-          <a:fontRef idx="minor">
-            <a:schemeClr val="lt1"/>
-          </a:fontRef>
-        </p:style>
-        <p:txBody>
-          <a:bodyPr rtlCol="0" anchor="ctr" wrap="square"/>
-          <a:lstStyle/>
-          <a:p>
-            <a:pPr algn="ctr">
-              <a:defRPr sz="1400" b="1">
-                <a:solidFill>
-                  <a:srgbClr val="4ECCA3"/>
-                </a:solidFill>
-              </a:defRPr>
-            </a:pPr>
-            <a:r>
-              <a:t>هفته چهارم: تست‌های Medium</a:t>
-            </a:r>
-          </a:p>
-          <a:p>
-            <a:pPr>
-              <a:defRPr sz="1100">
-                <a:solidFill>
-                  <a:srgbClr val="DDE1F5"/>
-                </a:solidFill>
-              </a:defRPr>
-            </a:pPr>
-            <a:r>
-              <a:t>ورود به مسائل سطح Medium و تمرین با تایمر ۳۰ دقیقه‌ای ارزیابی.</a:t>
-            </a:r>
-          </a:p>
-        </p:txBody>
-      </p:sp>
-      <p:sp>
-        <p:nvSpPr>
-          <p:cNvPr id="8" name="Rounded Rectangle 7"/>
           <p:cNvSpPr/>
           <p:nvPr/>
         </p:nvSpPr>
@@ -14718,7 +14917,7 @@
               </a:defRPr>
             </a:pPr>
             <a:r>
-              <a:t>«پیوستگی روزانه ۴۵ دقیقه تمرین عمیق، معجزه‌ای خلق می‌کند که تمرین‌های ۱۰ ساعته‌ی بی‌هدف هرگز نخواهد کرد.»</a:t>
+              <a:t>«تفاوت مهندس ارشد با کدنویس معمولی در توانایی شناسایی پیچیدگی الگوریتمی کدهای به ظاهر ساده کاتلین است.»</a:t>
             </a:r>
           </a:p>
         </p:txBody>
@@ -14792,8 +14991,8 @@
         </p:nvSpPr>
         <p:spPr>
           <a:xfrm>
-            <a:off x="1371600" y="1645920"/>
-            <a:ext cx="9418320" cy="3657600"/>
+            <a:off x="731520" y="365760"/>
+            <a:ext cx="10698480" cy="914400"/>
           </a:xfrm>
           <a:prstGeom prst="rect">
             <a:avLst/>
@@ -14806,52 +15005,384 @@
           </a:bodyPr>
           <a:lstStyle/>
           <a:p>
+            <a:pPr>
+              <a:defRPr sz="2400" b="1">
+                <a:solidFill>
+                  <a:srgbClr val="4ECCA3"/>
+                </a:solidFill>
+              </a:defRPr>
+            </a:pPr>
+            <a:r>
+              <a:t>کد غیربهینه · BRUTE FORCE O(N²)  |  راه‌حل اول (غیربهینه): فیلتر مستقیم روی List</a:t>
+            </a:r>
+          </a:p>
+          <a:p>
+            <a:pPr>
+              <a:defRPr sz="1400">
+                <a:solidFill>
+                  <a:srgbClr val="969EB4"/>
+                </a:solidFill>
+              </a:defRPr>
+            </a:pPr>
+            <a:r>
+              <a:t>استفاده فریبنده از ابزارهای اعلانی کاتلین بدون توجه به پیچیدگی زیر کاپوت:</a:t>
+            </a:r>
+          </a:p>
+        </p:txBody>
+      </p:sp>
+      <p:sp>
+        <p:nvSpPr>
+          <p:cNvPr id="4" name="Rounded Rectangle 3"/>
+          <p:cNvSpPr/>
+          <p:nvPr/>
+        </p:nvSpPr>
+        <p:spPr>
+          <a:xfrm>
+            <a:off x="731520" y="1463040"/>
+            <a:ext cx="3413759" cy="2011680"/>
+          </a:xfrm>
+          <a:prstGeom prst="roundRect">
+            <a:avLst/>
+          </a:prstGeom>
+          <a:solidFill>
+            <a:srgbClr val="141428"/>
+          </a:solidFill>
+          <a:ln w="19050">
+            <a:solidFill>
+              <a:srgbClr val="E9A84C"/>
+            </a:solidFill>
+          </a:ln>
+        </p:spPr>
+        <p:style>
+          <a:lnRef idx="1">
+            <a:schemeClr val="accent1"/>
+          </a:lnRef>
+          <a:fillRef idx="3">
+            <a:schemeClr val="accent1"/>
+          </a:fillRef>
+          <a:effectRef idx="2">
+            <a:schemeClr val="accent1"/>
+          </a:effectRef>
+          <a:fontRef idx="minor">
+            <a:schemeClr val="lt1"/>
+          </a:fontRef>
+        </p:style>
+        <p:txBody>
+          <a:bodyPr rtlCol="0" anchor="ctr" wrap="square"/>
+          <a:lstStyle/>
+          <a:p>
             <a:pPr algn="ctr">
-              <a:defRPr sz="4600" b="1">
+              <a:defRPr sz="1400" b="1">
+                <a:solidFill>
+                  <a:srgbClr val="E9A84C"/>
+                </a:solidFill>
+              </a:defRPr>
+            </a:pPr>
+            <a:r>
+              <a:t>ظاهر فریبنده کاتلین</a:t>
+            </a:r>
+          </a:p>
+          <a:p>
+            <a:pPr>
+              <a:defRPr sz="1100">
+                <a:solidFill>
+                  <a:srgbClr val="DDE1F5"/>
+                </a:solidFill>
+              </a:defRPr>
+            </a:pPr>
+            <a:r>
+              <a:t>کد فقط ۲ خط و بسیار خواناست و تست‌های کوچک را به راحتی پاس می‌کند.</a:t>
+            </a:r>
+          </a:p>
+        </p:txBody>
+      </p:sp>
+      <p:sp>
+        <p:nvSpPr>
+          <p:cNvPr id="5" name="Rounded Rectangle 4"/>
+          <p:cNvSpPr/>
+          <p:nvPr/>
+        </p:nvSpPr>
+        <p:spPr>
+          <a:xfrm>
+            <a:off x="4373880" y="1463040"/>
+            <a:ext cx="3413759" cy="2011680"/>
+          </a:xfrm>
+          <a:prstGeom prst="roundRect">
+            <a:avLst/>
+          </a:prstGeom>
+          <a:solidFill>
+            <a:srgbClr val="141428"/>
+          </a:solidFill>
+          <a:ln w="19050">
+            <a:solidFill>
+              <a:srgbClr val="E96C6C"/>
+            </a:solidFill>
+          </a:ln>
+        </p:spPr>
+        <p:style>
+          <a:lnRef idx="1">
+            <a:schemeClr val="accent1"/>
+          </a:lnRef>
+          <a:fillRef idx="3">
+            <a:schemeClr val="accent1"/>
+          </a:fillRef>
+          <a:effectRef idx="2">
+            <a:schemeClr val="accent1"/>
+          </a:effectRef>
+          <a:fontRef idx="minor">
+            <a:schemeClr val="lt1"/>
+          </a:fontRef>
+        </p:style>
+        <p:txBody>
+          <a:bodyPr rtlCol="0" anchor="ctr" wrap="square"/>
+          <a:lstStyle/>
+          <a:p>
+            <a:pPr algn="ctr">
+              <a:defRPr sz="1400" b="1">
+                <a:solidFill>
+                  <a:srgbClr val="E96C6C"/>
+                </a:solidFill>
+              </a:defRPr>
+            </a:pPr>
+            <a:r>
+              <a:t>زیر کاپوت عملگر in</a:t>
+            </a:r>
+          </a:p>
+          <a:p>
+            <a:pPr>
+              <a:defRPr sz="1100">
+                <a:solidFill>
+                  <a:srgbClr val="DDE1F5"/>
+                </a:solidFill>
+              </a:defRPr>
+            </a:pPr>
+            <a:r>
+              <a:t>در List، عملگر in معادل contains() با پیمایش خطی O(M) است.</a:t>
+            </a:r>
+          </a:p>
+        </p:txBody>
+      </p:sp>
+      <p:sp>
+        <p:nvSpPr>
+          <p:cNvPr id="6" name="Rounded Rectangle 5"/>
+          <p:cNvSpPr/>
+          <p:nvPr/>
+        </p:nvSpPr>
+        <p:spPr>
+          <a:xfrm>
+            <a:off x="8016239" y="1463040"/>
+            <a:ext cx="3413759" cy="2011680"/>
+          </a:xfrm>
+          <a:prstGeom prst="roundRect">
+            <a:avLst/>
+          </a:prstGeom>
+          <a:solidFill>
+            <a:srgbClr val="141428"/>
+          </a:solidFill>
+          <a:ln w="19050">
+            <a:solidFill>
+              <a:srgbClr val="E96C6C"/>
+            </a:solidFill>
+          </a:ln>
+        </p:spPr>
+        <p:style>
+          <a:lnRef idx="1">
+            <a:schemeClr val="accent1"/>
+          </a:lnRef>
+          <a:fillRef idx="3">
+            <a:schemeClr val="accent1"/>
+          </a:fillRef>
+          <a:effectRef idx="2">
+            <a:schemeClr val="accent1"/>
+          </a:effectRef>
+          <a:fontRef idx="minor">
+            <a:schemeClr val="lt1"/>
+          </a:fontRef>
+        </p:style>
+        <p:txBody>
+          <a:bodyPr rtlCol="0" anchor="ctr" wrap="square"/>
+          <a:lstStyle/>
+          <a:p>
+            <a:pPr algn="ctr">
+              <a:defRPr sz="1400" b="1">
+                <a:solidFill>
+                  <a:srgbClr val="E96C6C"/>
+                </a:solidFill>
+              </a:defRPr>
+            </a:pPr>
+            <a:r>
+              <a:t>پیچیدگی نمایی</a:t>
+            </a:r>
+          </a:p>
+          <a:p>
+            <a:pPr>
+              <a:defRPr sz="1100">
+                <a:solidFill>
+                  <a:srgbClr val="DDE1F5"/>
+                </a:solidFill>
+              </a:defRPr>
+            </a:pPr>
+            <a:r>
+              <a:t>برای دو لیست با اندازه N و M، کل مقایسه‌ها O(N × M) یعنی O(N²) است!</a:t>
+            </a:r>
+          </a:p>
+        </p:txBody>
+      </p:sp>
+      <p:sp>
+        <p:nvSpPr>
+          <p:cNvPr id="7" name="Rounded Rectangle 6"/>
+          <p:cNvSpPr/>
+          <p:nvPr/>
+        </p:nvSpPr>
+        <p:spPr>
+          <a:xfrm>
+            <a:off x="731520" y="3703320"/>
+            <a:ext cx="10698480" cy="2212848"/>
+          </a:xfrm>
+          <a:prstGeom prst="roundRect">
+            <a:avLst/>
+          </a:prstGeom>
+          <a:solidFill>
+            <a:srgbClr val="08080F"/>
+          </a:solidFill>
+          <a:ln w="12700">
+            <a:solidFill>
+              <a:srgbClr val="7C8FF5"/>
+            </a:solidFill>
+          </a:ln>
+        </p:spPr>
+        <p:style>
+          <a:lnRef idx="1">
+            <a:schemeClr val="accent1"/>
+          </a:lnRef>
+          <a:fillRef idx="3">
+            <a:schemeClr val="accent1"/>
+          </a:fillRef>
+          <a:effectRef idx="2">
+            <a:schemeClr val="accent1"/>
+          </a:effectRef>
+          <a:fontRef idx="minor">
+            <a:schemeClr val="lt1"/>
+          </a:fontRef>
+        </p:style>
+        <p:txBody>
+          <a:bodyPr rtlCol="0" anchor="ctr" wrap="none"/>
+          <a:lstStyle/>
+          <a:p>
+            <a:pPr algn="l">
+              <a:defRPr sz="1100">
                 <a:solidFill>
                   <a:srgbClr val="4ECCA3"/>
                 </a:solidFill>
-              </a:defRPr>
-            </a:pPr>
-            <a:r>
-              <a:t>متشکرم از همراهی شما</a:t>
-            </a:r>
-          </a:p>
-          <a:p>
-            <a:pPr algn="ctr">
-              <a:defRPr sz="2800">
-                <a:solidFill>
-                  <a:srgbClr val="7C8FF5"/>
-                </a:solidFill>
-              </a:defRPr>
-            </a:pPr>
-            <a:r>
-              <a:t>پرسش و پاسخ (Q&amp;A)</a:t>
-            </a:r>
-          </a:p>
-          <a:p>
-            <a:br/>
-            <a:pPr algn="ctr">
-              <a:defRPr sz="2000">
-                <a:solidFill>
-                  <a:srgbClr val="DDE1F5"/>
-                </a:solidFill>
-              </a:defRPr>
-            </a:pPr>
-            <a:r>
-              <a:t>Milad Faridnia</a:t>
-            </a:r>
-          </a:p>
-          <a:p>
-            <a:pPr algn="ctr">
-              <a:defRPr sz="1400">
-                <a:solidFill>
-                  <a:srgbClr val="E9A84C"/>
-                </a:solidFill>
-              </a:defRPr>
-            </a:pPr>
-            <a:r>
-              <a:t>LeetCode.com · NeetCode.io · Blind 75</a:t>
+                <a:latin typeface="Consolas"/>
+              </a:defRPr>
+            </a:pPr>
+            <a:r>
+              <a:t>// ❌ رویکرد کُند: جستجوی مستقیم در List با O(N²)</a:t>
+            </a:r>
+          </a:p>
+          <a:p>
+            <a:pPr algn="l">
+              <a:defRPr sz="1100">
+                <a:solidFill>
+                  <a:srgbClr val="4ECCA3"/>
+                </a:solidFill>
+                <a:latin typeface="Consolas"/>
+              </a:defRPr>
+            </a:pPr>
+            <a:r>
+              <a:t>internal fun &lt;T&gt; syncCardStackState(</a:t>
+            </a:r>
+          </a:p>
+          <a:p>
+            <a:pPr algn="l">
+              <a:defRPr sz="1100">
+                <a:solidFill>
+                  <a:srgbClr val="4ECCA3"/>
+                </a:solidFill>
+                <a:latin typeface="Consolas"/>
+              </a:defRPr>
+            </a:pPr>
+            <a:r>
+              <a:t>    currentItems: List&lt;T&gt;,</a:t>
+            </a:r>
+          </a:p>
+          <a:p>
+            <a:pPr algn="l">
+              <a:defRPr sz="1100">
+                <a:solidFill>
+                  <a:srgbClr val="4ECCA3"/>
+                </a:solidFill>
+                <a:latin typeface="Consolas"/>
+              </a:defRPr>
+            </a:pPr>
+            <a:r>
+              <a:t>    newCardsList: List&lt;T&gt;,</a:t>
+            </a:r>
+          </a:p>
+          <a:p>
+            <a:pPr algn="l">
+              <a:defRPr sz="1100">
+                <a:solidFill>
+                  <a:srgbClr val="4ECCA3"/>
+                </a:solidFill>
+                <a:latin typeface="Consolas"/>
+              </a:defRPr>
+            </a:pPr>
+            <a:r>
+              <a:t>): List&lt;T&gt; {</a:t>
+            </a:r>
+          </a:p>
+          <a:p>
+            <a:pPr algn="l">
+              <a:defRPr sz="1100">
+                <a:solidFill>
+                  <a:srgbClr val="4ECCA3"/>
+                </a:solidFill>
+                <a:latin typeface="Consolas"/>
+              </a:defRPr>
+            </a:pPr>
+            <a:r>
+              <a:t>    val remainingOldItems = currentItems.filter { it in newCardsList }</a:t>
+            </a:r>
+          </a:p>
+          <a:p>
+            <a:pPr algn="l">
+              <a:defRPr sz="1100">
+                <a:solidFill>
+                  <a:srgbClr val="4ECCA3"/>
+                </a:solidFill>
+                <a:latin typeface="Consolas"/>
+              </a:defRPr>
+            </a:pPr>
+            <a:r>
+              <a:t>    val newItems = newCardsList.filter { it !in currentItems }</a:t>
+            </a:r>
+          </a:p>
+          <a:p>
+            <a:pPr algn="l">
+              <a:defRPr sz="1100">
+                <a:solidFill>
+                  <a:srgbClr val="4ECCA3"/>
+                </a:solidFill>
+                <a:latin typeface="Consolas"/>
+              </a:defRPr>
+            </a:pPr>
+            <a:r>
+              <a:t>    return remainingOldItems + newItems</a:t>
+            </a:r>
+          </a:p>
+          <a:p>
+            <a:pPr algn="l">
+              <a:defRPr sz="1100">
+                <a:solidFill>
+                  <a:srgbClr val="4ECCA3"/>
+                </a:solidFill>
+                <a:latin typeface="Consolas"/>
+              </a:defRPr>
+            </a:pPr>
+            <a:r>
+              <a:t>}</a:t>
             </a:r>
           </a:p>
         </p:txBody>
@@ -15151,6 +15682,1385 @@
             </a:pPr>
             <a:r>
               <a:t>• فاز ۳ (شهود و تسلط): نگاه به صورت مسئله بلافاصله ساختار داده مناسب را در ذهن ترسیم می‌کند.</a:t>
+            </a:r>
+          </a:p>
+        </p:txBody>
+      </p:sp>
+    </p:spTree>
+  </p:cSld>
+  <p:clrMapOvr>
+    <a:masterClrMapping/>
+  </p:clrMapOvr>
+</p:sld>
+</file>
+
+<file path=ppt/slides/slide30.xml><?xml version="1.0" encoding="utf-8"?>
+<p:sld xmlns:a="http://schemas.openxmlformats.org/drawingml/2006/main" xmlns:p="http://schemas.openxmlformats.org/presentationml/2006/main" xmlns:r="http://schemas.openxmlformats.org/officeDocument/2006/relationships">
+  <p:cSld>
+    <p:spTree>
+      <p:nvGrpSpPr>
+        <p:cNvPr id="1" name=""/>
+        <p:cNvGrpSpPr/>
+        <p:nvPr/>
+      </p:nvGrpSpPr>
+      <p:grpSpPr/>
+      <p:sp>
+        <p:nvSpPr>
+          <p:cNvPr id="2" name="Rectangle 1"/>
+          <p:cNvSpPr/>
+          <p:nvPr/>
+        </p:nvSpPr>
+        <p:spPr>
+          <a:xfrm>
+            <a:off x="0" y="0"/>
+            <a:ext cx="12191695" cy="6858000"/>
+          </a:xfrm>
+          <a:prstGeom prst="rect">
+            <a:avLst/>
+          </a:prstGeom>
+          <a:solidFill>
+            <a:srgbClr val="0D0D1A"/>
+          </a:solidFill>
+          <a:ln>
+            <a:noFill/>
+          </a:ln>
+        </p:spPr>
+        <p:style>
+          <a:lnRef idx="1">
+            <a:schemeClr val="accent1"/>
+          </a:lnRef>
+          <a:fillRef idx="3">
+            <a:schemeClr val="accent1"/>
+          </a:fillRef>
+          <a:effectRef idx="2">
+            <a:schemeClr val="accent1"/>
+          </a:effectRef>
+          <a:fontRef idx="minor">
+            <a:schemeClr val="lt1"/>
+          </a:fontRef>
+        </p:style>
+        <p:txBody>
+          <a:bodyPr rtlCol="0" anchor="ctr"/>
+          <a:lstStyle/>
+          <a:p>
+            <a:pPr algn="ctr"/>
+          </a:p>
+        </p:txBody>
+      </p:sp>
+      <p:sp>
+        <p:nvSpPr>
+          <p:cNvPr id="3" name="TextBox 2"/>
+          <p:cNvSpPr txBox="1"/>
+          <p:nvPr/>
+        </p:nvSpPr>
+        <p:spPr>
+          <a:xfrm>
+            <a:off x="731520" y="365760"/>
+            <a:ext cx="10698480" cy="914400"/>
+          </a:xfrm>
+          <a:prstGeom prst="rect">
+            <a:avLst/>
+          </a:prstGeom>
+          <a:noFill/>
+        </p:spPr>
+        <p:txBody>
+          <a:bodyPr wrap="square">
+            <a:spAutoFit/>
+          </a:bodyPr>
+          <a:lstStyle/>
+          <a:p>
+            <a:pPr>
+              <a:defRPr sz="2400" b="1">
+                <a:solidFill>
+                  <a:srgbClr val="4ECCA3"/>
+                </a:solidFill>
+              </a:defRPr>
+            </a:pPr>
+            <a:r>
+              <a:t>تحلیل گلوگاه · BOTTLENECK ANALYSIS  |  کالبدشکافی ایراد: هزینه پنهان و افت فریم در UI</a:t>
+            </a:r>
+          </a:p>
+          <a:p>
+            <a:pPr>
+              <a:defRPr sz="1400">
+                <a:solidFill>
+                  <a:srgbClr val="969EB4"/>
+                </a:solidFill>
+              </a:defRPr>
+            </a:pPr>
+            <a:r>
+              <a:t>چرا این کد در محیط پروداکشن باعث لگ و مصرف غیرعادی باتری می‌شود؟</a:t>
+            </a:r>
+          </a:p>
+        </p:txBody>
+      </p:sp>
+      <p:sp>
+        <p:nvSpPr>
+          <p:cNvPr id="4" name="Rounded Rectangle 3"/>
+          <p:cNvSpPr/>
+          <p:nvPr/>
+        </p:nvSpPr>
+        <p:spPr>
+          <a:xfrm>
+            <a:off x="731520" y="1463040"/>
+            <a:ext cx="5234940" cy="2011680"/>
+          </a:xfrm>
+          <a:prstGeom prst="roundRect">
+            <a:avLst/>
+          </a:prstGeom>
+          <a:solidFill>
+            <a:srgbClr val="141428"/>
+          </a:solidFill>
+          <a:ln w="19050">
+            <a:solidFill>
+              <a:srgbClr val="E96C6C"/>
+            </a:solidFill>
+          </a:ln>
+        </p:spPr>
+        <p:style>
+          <a:lnRef idx="1">
+            <a:schemeClr val="accent1"/>
+          </a:lnRef>
+          <a:fillRef idx="3">
+            <a:schemeClr val="accent1"/>
+          </a:fillRef>
+          <a:effectRef idx="2">
+            <a:schemeClr val="accent1"/>
+          </a:effectRef>
+          <a:fontRef idx="minor">
+            <a:schemeClr val="lt1"/>
+          </a:fontRef>
+        </p:style>
+        <p:txBody>
+          <a:bodyPr rtlCol="0" anchor="ctr" wrap="square"/>
+          <a:lstStyle/>
+          <a:p>
+            <a:pPr algn="ctr">
+              <a:defRPr sz="1400" b="1">
+                <a:solidFill>
+                  <a:srgbClr val="E96C6C"/>
+                </a:solidFill>
+              </a:defRPr>
+            </a:pPr>
+            <a:r>
+              <a:t>❌ پیمایش خطی مداوم (Linear Scan)</a:t>
+            </a:r>
+          </a:p>
+          <a:p>
+            <a:pPr>
+              <a:defRPr sz="1100">
+                <a:solidFill>
+                  <a:srgbClr val="DDE1F5"/>
+                </a:solidFill>
+              </a:defRPr>
+            </a:pPr>
+            <a:r>
+              <a:t>ساختار List ترتیبی است؛ ترکیب آن با filter یک حلقه تو در تو (Nested Loop) پنهان است.</a:t>
+            </a:r>
+          </a:p>
+        </p:txBody>
+      </p:sp>
+      <p:sp>
+        <p:nvSpPr>
+          <p:cNvPr id="5" name="Rounded Rectangle 4"/>
+          <p:cNvSpPr/>
+          <p:nvPr/>
+        </p:nvSpPr>
+        <p:spPr>
+          <a:xfrm>
+            <a:off x="6195059" y="1463040"/>
+            <a:ext cx="5234940" cy="2011680"/>
+          </a:xfrm>
+          <a:prstGeom prst="roundRect">
+            <a:avLst/>
+          </a:prstGeom>
+          <a:solidFill>
+            <a:srgbClr val="141428"/>
+          </a:solidFill>
+          <a:ln w="19050">
+            <a:solidFill>
+              <a:srgbClr val="E9A84C"/>
+            </a:solidFill>
+          </a:ln>
+        </p:spPr>
+        <p:style>
+          <a:lnRef idx="1">
+            <a:schemeClr val="accent1"/>
+          </a:lnRef>
+          <a:fillRef idx="3">
+            <a:schemeClr val="accent1"/>
+          </a:fillRef>
+          <a:effectRef idx="2">
+            <a:schemeClr val="accent1"/>
+          </a:effectRef>
+          <a:fontRef idx="minor">
+            <a:schemeClr val="lt1"/>
+          </a:fontRef>
+        </p:style>
+        <p:txBody>
+          <a:bodyPr rtlCol="0" anchor="ctr" wrap="square"/>
+          <a:lstStyle/>
+          <a:p>
+            <a:pPr algn="ctr">
+              <a:defRPr sz="1400" b="1">
+                <a:solidFill>
+                  <a:srgbClr val="E9A84C"/>
+                </a:solidFill>
+              </a:defRPr>
+            </a:pPr>
+            <a:r>
+              <a:t>⚠️ افت فریم و لگ در کامپوز (Jank)</a:t>
+            </a:r>
+          </a:p>
+          <a:p>
+            <a:pPr>
+              <a:defRPr sz="1100">
+                <a:solidFill>
+                  <a:srgbClr val="DDE1F5"/>
+                </a:solidFill>
+              </a:defRPr>
+            </a:pPr>
+            <a:r>
+              <a:t>در Compose محاسبه State روی Main Thread است؛ هزاران مقایسه باعث گذر از بودجه ۱۶ میلی‌ثانیه‌ای فریم می‌شود.</a:t>
+            </a:r>
+          </a:p>
+        </p:txBody>
+      </p:sp>
+      <p:sp>
+        <p:nvSpPr>
+          <p:cNvPr id="6" name="TextBox 5"/>
+          <p:cNvSpPr txBox="1"/>
+          <p:nvPr/>
+        </p:nvSpPr>
+        <p:spPr>
+          <a:xfrm>
+            <a:off x="731520" y="3703320"/>
+            <a:ext cx="10698480" cy="1463040"/>
+          </a:xfrm>
+          <a:prstGeom prst="rect">
+            <a:avLst/>
+          </a:prstGeom>
+          <a:noFill/>
+        </p:spPr>
+        <p:txBody>
+          <a:bodyPr wrap="square">
+            <a:spAutoFit/>
+          </a:bodyPr>
+          <a:lstStyle/>
+          <a:p>
+            <a:pPr>
+              <a:defRPr sz="1300">
+                <a:solidFill>
+                  <a:srgbClr val="DDE1F5"/>
+                </a:solidFill>
+              </a:defRPr>
+            </a:pPr>
+            <a:r>
+              <a:t>• پنهان از چشم لینترها: Detekt و کامپایلر ایراد سینتکسی نمی‌گیرند؛ اما Profiler فریز فریم‌ها را ثبت می‌کند.</a:t>
+            </a:r>
+          </a:p>
+          <a:p>
+            <a:pPr>
+              <a:defRPr sz="1300">
+                <a:solidFill>
+                  <a:srgbClr val="DDE1F5"/>
+                </a:solidFill>
+              </a:defRPr>
+            </a:pPr>
+            <a:r>
+              <a:t>• در مقیاس ۵۰ تا ۱۰۰ کارت: ۲۰,۰۰۰ عملیات مقایسه سنگین شیء رخ می‌دهد.</a:t>
+            </a:r>
+          </a:p>
+        </p:txBody>
+      </p:sp>
+      <p:sp>
+        <p:nvSpPr>
+          <p:cNvPr id="7" name="Rounded Rectangle 6"/>
+          <p:cNvSpPr/>
+          <p:nvPr/>
+        </p:nvSpPr>
+        <p:spPr>
+          <a:xfrm>
+            <a:off x="731520" y="5486400"/>
+            <a:ext cx="10698480" cy="822960"/>
+          </a:xfrm>
+          <a:prstGeom prst="roundRect">
+            <a:avLst/>
+          </a:prstGeom>
+          <a:solidFill>
+            <a:srgbClr val="1C1C38"/>
+          </a:solidFill>
+          <a:ln w="12700">
+            <a:solidFill>
+              <a:srgbClr val="7C8FF5"/>
+            </a:solidFill>
+          </a:ln>
+        </p:spPr>
+        <p:style>
+          <a:lnRef idx="1">
+            <a:schemeClr val="accent1"/>
+          </a:lnRef>
+          <a:fillRef idx="3">
+            <a:schemeClr val="accent1"/>
+          </a:fillRef>
+          <a:effectRef idx="2">
+            <a:schemeClr val="accent1"/>
+          </a:effectRef>
+          <a:fontRef idx="minor">
+            <a:schemeClr val="lt1"/>
+          </a:fontRef>
+        </p:style>
+        <p:txBody>
+          <a:bodyPr rtlCol="0" anchor="ctr" wrap="square"/>
+          <a:lstStyle/>
+          <a:p>
+            <a:pPr algn="ctr">
+              <a:defRPr sz="1200" i="1">
+                <a:solidFill>
+                  <a:srgbClr val="7C8FF5"/>
+                </a:solidFill>
+              </a:defRPr>
+            </a:pPr>
+            <a:r>
+              <a:t>«در ۶۰ فریم بر ثانیه، هر فریم فقط ۱۶ میلی‌ثانیه زمان دارد؛ حلقه‌های O(N²) اولین قاتل روانی UI هستند.»</a:t>
+            </a:r>
+          </a:p>
+        </p:txBody>
+      </p:sp>
+    </p:spTree>
+  </p:cSld>
+  <p:clrMapOvr>
+    <a:masterClrMapping/>
+  </p:clrMapOvr>
+</p:sld>
+</file>
+
+<file path=ppt/slides/slide31.xml><?xml version="1.0" encoding="utf-8"?>
+<p:sld xmlns:a="http://schemas.openxmlformats.org/drawingml/2006/main" xmlns:p="http://schemas.openxmlformats.org/presentationml/2006/main" xmlns:r="http://schemas.openxmlformats.org/officeDocument/2006/relationships">
+  <p:cSld>
+    <p:spTree>
+      <p:nvGrpSpPr>
+        <p:cNvPr id="1" name=""/>
+        <p:cNvGrpSpPr/>
+        <p:nvPr/>
+      </p:nvGrpSpPr>
+      <p:grpSpPr/>
+      <p:sp>
+        <p:nvSpPr>
+          <p:cNvPr id="2" name="Rectangle 1"/>
+          <p:cNvSpPr/>
+          <p:nvPr/>
+        </p:nvSpPr>
+        <p:spPr>
+          <a:xfrm>
+            <a:off x="0" y="0"/>
+            <a:ext cx="12191695" cy="6858000"/>
+          </a:xfrm>
+          <a:prstGeom prst="rect">
+            <a:avLst/>
+          </a:prstGeom>
+          <a:solidFill>
+            <a:srgbClr val="0D0D1A"/>
+          </a:solidFill>
+          <a:ln>
+            <a:noFill/>
+          </a:ln>
+        </p:spPr>
+        <p:style>
+          <a:lnRef idx="1">
+            <a:schemeClr val="accent1"/>
+          </a:lnRef>
+          <a:fillRef idx="3">
+            <a:schemeClr val="accent1"/>
+          </a:fillRef>
+          <a:effectRef idx="2">
+            <a:schemeClr val="accent1"/>
+          </a:effectRef>
+          <a:fontRef idx="minor">
+            <a:schemeClr val="lt1"/>
+          </a:fontRef>
+        </p:style>
+        <p:txBody>
+          <a:bodyPr rtlCol="0" anchor="ctr"/>
+          <a:lstStyle/>
+          <a:p>
+            <a:pPr algn="ctr"/>
+          </a:p>
+        </p:txBody>
+      </p:sp>
+      <p:sp>
+        <p:nvSpPr>
+          <p:cNvPr id="3" name="TextBox 2"/>
+          <p:cNvSpPr txBox="1"/>
+          <p:nvPr/>
+        </p:nvSpPr>
+        <p:spPr>
+          <a:xfrm>
+            <a:off x="731520" y="365760"/>
+            <a:ext cx="10698480" cy="914400"/>
+          </a:xfrm>
+          <a:prstGeom prst="rect">
+            <a:avLst/>
+          </a:prstGeom>
+          <a:noFill/>
+        </p:spPr>
+        <p:txBody>
+          <a:bodyPr wrap="square">
+            <a:spAutoFit/>
+          </a:bodyPr>
+          <a:lstStyle/>
+          <a:p>
+            <a:pPr>
+              <a:defRPr sz="2400" b="1">
+                <a:solidFill>
+                  <a:srgbClr val="4ECCA3"/>
+                </a:solidFill>
+              </a:defRPr>
+            </a:pPr>
+            <a:r>
+              <a:t>کدنویسی تمیز · OPTIMAL O(N)  |  راه‌حل بهینه: جهش به O(N) با HashSet و تحلیل چرایی</a:t>
+            </a:r>
+          </a:p>
+          <a:p>
+            <a:pPr>
+              <a:defRPr sz="1400">
+                <a:solidFill>
+                  <a:srgbClr val="969EB4"/>
+                </a:solidFill>
+              </a:defRPr>
+            </a:pPr>
+            <a:r>
+              <a:t>به‌کارگیری جدول هش برای جستجوی آنی O(1) و کاهش زمان کل به خطی O(N + M):</a:t>
+            </a:r>
+          </a:p>
+        </p:txBody>
+      </p:sp>
+      <p:sp>
+        <p:nvSpPr>
+          <p:cNvPr id="4" name="Rounded Rectangle 3"/>
+          <p:cNvSpPr/>
+          <p:nvPr/>
+        </p:nvSpPr>
+        <p:spPr>
+          <a:xfrm>
+            <a:off x="731520" y="1463040"/>
+            <a:ext cx="5234940" cy="2011680"/>
+          </a:xfrm>
+          <a:prstGeom prst="roundRect">
+            <a:avLst/>
+          </a:prstGeom>
+          <a:solidFill>
+            <a:srgbClr val="141428"/>
+          </a:solidFill>
+          <a:ln w="19050">
+            <a:solidFill>
+              <a:srgbClr val="4ECCA3"/>
+            </a:solidFill>
+          </a:ln>
+        </p:spPr>
+        <p:style>
+          <a:lnRef idx="1">
+            <a:schemeClr val="accent1"/>
+          </a:lnRef>
+          <a:fillRef idx="3">
+            <a:schemeClr val="accent1"/>
+          </a:fillRef>
+          <a:effectRef idx="2">
+            <a:schemeClr val="accent1"/>
+          </a:effectRef>
+          <a:fontRef idx="minor">
+            <a:schemeClr val="lt1"/>
+          </a:fontRef>
+        </p:style>
+        <p:txBody>
+          <a:bodyPr rtlCol="0" anchor="ctr" wrap="square"/>
+          <a:lstStyle/>
+          <a:p>
+            <a:pPr algn="ctr">
+              <a:defRPr sz="1400" b="1">
+                <a:solidFill>
+                  <a:srgbClr val="4ECCA3"/>
+                </a:solidFill>
+              </a:defRPr>
+            </a:pPr>
+            <a:r>
+              <a:t>⚡ جستجوی آنی O(1)</a:t>
+            </a:r>
+          </a:p>
+          <a:p>
+            <a:pPr>
+              <a:defRPr sz="1100">
+                <a:solidFill>
+                  <a:srgbClr val="DDE1F5"/>
+                </a:solidFill>
+              </a:defRPr>
+            </a:pPr>
+            <a:r>
+              <a:t>با toSet() جدول هش ساخته می‌شود و جستجو با تابع هش در زمان ثابت انجام می‌گیرد.</a:t>
+            </a:r>
+          </a:p>
+        </p:txBody>
+      </p:sp>
+      <p:sp>
+        <p:nvSpPr>
+          <p:cNvPr id="5" name="Rounded Rectangle 4"/>
+          <p:cNvSpPr/>
+          <p:nvPr/>
+        </p:nvSpPr>
+        <p:spPr>
+          <a:xfrm>
+            <a:off x="6195059" y="1463040"/>
+            <a:ext cx="5234940" cy="2011680"/>
+          </a:xfrm>
+          <a:prstGeom prst="roundRect">
+            <a:avLst/>
+          </a:prstGeom>
+          <a:solidFill>
+            <a:srgbClr val="141428"/>
+          </a:solidFill>
+          <a:ln w="19050">
+            <a:solidFill>
+              <a:srgbClr val="4ECCA3"/>
+            </a:solidFill>
+          </a:ln>
+        </p:spPr>
+        <p:style>
+          <a:lnRef idx="1">
+            <a:schemeClr val="accent1"/>
+          </a:lnRef>
+          <a:fillRef idx="3">
+            <a:schemeClr val="accent1"/>
+          </a:fillRef>
+          <a:effectRef idx="2">
+            <a:schemeClr val="accent1"/>
+          </a:effectRef>
+          <a:fontRef idx="minor">
+            <a:schemeClr val="lt1"/>
+          </a:fontRef>
+        </p:style>
+        <p:txBody>
+          <a:bodyPr rtlCol="0" anchor="ctr" wrap="square"/>
+          <a:lstStyle/>
+          <a:p>
+            <a:pPr algn="ctr">
+              <a:defRPr sz="1400" b="1">
+                <a:solidFill>
+                  <a:srgbClr val="4ECCA3"/>
+                </a:solidFill>
+              </a:defRPr>
+            </a:pPr>
+            <a:r>
+              <a:t>🚀 کاهش به خطی O(N + M)</a:t>
+            </a:r>
+          </a:p>
+          <a:p>
+            <a:pPr>
+              <a:defRPr sz="1100">
+                <a:solidFill>
+                  <a:srgbClr val="DDE1F5"/>
+                </a:solidFill>
+              </a:defRPr>
+            </a:pPr>
+            <a:r>
+              <a:t>کل هزینه به O(N + M) تبدیل شده و حتی برای ۱۰,۰۰۰ کارت در کسری از میلی‌ثانیه اجرا می‌شود.</a:t>
+            </a:r>
+          </a:p>
+        </p:txBody>
+      </p:sp>
+      <p:sp>
+        <p:nvSpPr>
+          <p:cNvPr id="6" name="Rounded Rectangle 5"/>
+          <p:cNvSpPr/>
+          <p:nvPr/>
+        </p:nvSpPr>
+        <p:spPr>
+          <a:xfrm>
+            <a:off x="731520" y="3703320"/>
+            <a:ext cx="10698480" cy="2633472"/>
+          </a:xfrm>
+          <a:prstGeom prst="roundRect">
+            <a:avLst/>
+          </a:prstGeom>
+          <a:solidFill>
+            <a:srgbClr val="08080F"/>
+          </a:solidFill>
+          <a:ln w="12700">
+            <a:solidFill>
+              <a:srgbClr val="7C8FF5"/>
+            </a:solidFill>
+          </a:ln>
+        </p:spPr>
+        <p:style>
+          <a:lnRef idx="1">
+            <a:schemeClr val="accent1"/>
+          </a:lnRef>
+          <a:fillRef idx="3">
+            <a:schemeClr val="accent1"/>
+          </a:fillRef>
+          <a:effectRef idx="2">
+            <a:schemeClr val="accent1"/>
+          </a:effectRef>
+          <a:fontRef idx="minor">
+            <a:schemeClr val="lt1"/>
+          </a:fontRef>
+        </p:style>
+        <p:txBody>
+          <a:bodyPr rtlCol="0" anchor="ctr" wrap="none"/>
+          <a:lstStyle/>
+          <a:p>
+            <a:pPr algn="l">
+              <a:defRPr sz="1100">
+                <a:solidFill>
+                  <a:srgbClr val="4ECCA3"/>
+                </a:solidFill>
+                <a:latin typeface="Consolas"/>
+              </a:defRPr>
+            </a:pPr>
+            <a:r>
+              <a:t>// ✅ رویکرد بهینه: تبدیل به Set و جستجوی آنی O(1)</a:t>
+            </a:r>
+          </a:p>
+          <a:p>
+            <a:pPr algn="l">
+              <a:defRPr sz="1100">
+                <a:solidFill>
+                  <a:srgbClr val="4ECCA3"/>
+                </a:solidFill>
+                <a:latin typeface="Consolas"/>
+              </a:defRPr>
+            </a:pPr>
+            <a:r>
+              <a:t>internal fun &lt;T&gt; syncCardStackState(</a:t>
+            </a:r>
+          </a:p>
+          <a:p>
+            <a:pPr algn="l">
+              <a:defRPr sz="1100">
+                <a:solidFill>
+                  <a:srgbClr val="4ECCA3"/>
+                </a:solidFill>
+                <a:latin typeface="Consolas"/>
+              </a:defRPr>
+            </a:pPr>
+            <a:r>
+              <a:t>    currentItems: List&lt;T&gt;,</a:t>
+            </a:r>
+          </a:p>
+          <a:p>
+            <a:pPr algn="l">
+              <a:defRPr sz="1100">
+                <a:solidFill>
+                  <a:srgbClr val="4ECCA3"/>
+                </a:solidFill>
+                <a:latin typeface="Consolas"/>
+              </a:defRPr>
+            </a:pPr>
+            <a:r>
+              <a:t>    newCardsList: List&lt;T&gt;,</a:t>
+            </a:r>
+          </a:p>
+          <a:p>
+            <a:pPr algn="l">
+              <a:defRPr sz="1100">
+                <a:solidFill>
+                  <a:srgbClr val="4ECCA3"/>
+                </a:solidFill>
+                <a:latin typeface="Consolas"/>
+              </a:defRPr>
+            </a:pPr>
+            <a:r>
+              <a:t>): List&lt;T&gt; {</a:t>
+            </a:r>
+          </a:p>
+          <a:p>
+            <a:pPr algn="l">
+              <a:defRPr sz="1100">
+                <a:solidFill>
+                  <a:srgbClr val="4ECCA3"/>
+                </a:solidFill>
+                <a:latin typeface="Consolas"/>
+              </a:defRPr>
+            </a:pPr>
+            <a:r>
+              <a:t>    val newCardsSet = newCardsList.toSet()</a:t>
+            </a:r>
+          </a:p>
+          <a:p>
+            <a:pPr algn="l">
+              <a:defRPr sz="1100">
+                <a:solidFill>
+                  <a:srgbClr val="4ECCA3"/>
+                </a:solidFill>
+                <a:latin typeface="Consolas"/>
+              </a:defRPr>
+            </a:pPr>
+            <a:r>
+              <a:t>    val currentItemsSet = currentItems.toSet()</a:t>
+            </a:r>
+          </a:p>
+          <a:p>
+            <a:pPr algn="l">
+              <a:defRPr sz="1100">
+                <a:solidFill>
+                  <a:srgbClr val="4ECCA3"/>
+                </a:solidFill>
+                <a:latin typeface="Consolas"/>
+              </a:defRPr>
+            </a:pPr>
+            <a:r>
+              <a:t>    val remainingOldItems = currentItems.filter { it in newCardsSet }</a:t>
+            </a:r>
+          </a:p>
+          <a:p>
+            <a:pPr algn="l">
+              <a:defRPr sz="1100">
+                <a:solidFill>
+                  <a:srgbClr val="4ECCA3"/>
+                </a:solidFill>
+                <a:latin typeface="Consolas"/>
+              </a:defRPr>
+            </a:pPr>
+            <a:r>
+              <a:t>    val newItems = newCardsList.filter { it !in currentItemsSet }</a:t>
+            </a:r>
+          </a:p>
+          <a:p>
+            <a:pPr algn="l">
+              <a:defRPr sz="1100">
+                <a:solidFill>
+                  <a:srgbClr val="4ECCA3"/>
+                </a:solidFill>
+                <a:latin typeface="Consolas"/>
+              </a:defRPr>
+            </a:pPr>
+            <a:r>
+              <a:t>    return remainingOldItems + newItems</a:t>
+            </a:r>
+          </a:p>
+          <a:p>
+            <a:pPr algn="l">
+              <a:defRPr sz="1100">
+                <a:solidFill>
+                  <a:srgbClr val="4ECCA3"/>
+                </a:solidFill>
+                <a:latin typeface="Consolas"/>
+              </a:defRPr>
+            </a:pPr>
+            <a:r>
+              <a:t>}</a:t>
+            </a:r>
+          </a:p>
+        </p:txBody>
+      </p:sp>
+      <p:sp>
+        <p:nvSpPr>
+          <p:cNvPr id="7" name="Rounded Rectangle 6"/>
+          <p:cNvSpPr/>
+          <p:nvPr/>
+        </p:nvSpPr>
+        <p:spPr>
+          <a:xfrm>
+            <a:off x="731520" y="5486400"/>
+            <a:ext cx="10698480" cy="822960"/>
+          </a:xfrm>
+          <a:prstGeom prst="roundRect">
+            <a:avLst/>
+          </a:prstGeom>
+          <a:solidFill>
+            <a:srgbClr val="1C1C38"/>
+          </a:solidFill>
+          <a:ln w="12700">
+            <a:solidFill>
+              <a:srgbClr val="7C8FF5"/>
+            </a:solidFill>
+          </a:ln>
+        </p:spPr>
+        <p:style>
+          <a:lnRef idx="1">
+            <a:schemeClr val="accent1"/>
+          </a:lnRef>
+          <a:fillRef idx="3">
+            <a:schemeClr val="accent1"/>
+          </a:fillRef>
+          <a:effectRef idx="2">
+            <a:schemeClr val="accent1"/>
+          </a:effectRef>
+          <a:fontRef idx="minor">
+            <a:schemeClr val="lt1"/>
+          </a:fontRef>
+        </p:style>
+        <p:txBody>
+          <a:bodyPr rtlCol="0" anchor="ctr" wrap="square"/>
+          <a:lstStyle/>
+          <a:p>
+            <a:pPr algn="ctr">
+              <a:defRPr sz="1200" i="1">
+                <a:solidFill>
+                  <a:srgbClr val="7C8FF5"/>
+                </a:solidFill>
+              </a:defRPr>
+            </a:pPr>
+            <a:r>
+              <a:t>«قاعده طلایی: همیشه پیش از فیلتر یا مقایسه اشتراک دو لیست در کاتلین، لیست مرجع را به Set تبدیل کنید.»</a:t>
+            </a:r>
+          </a:p>
+        </p:txBody>
+      </p:sp>
+    </p:spTree>
+  </p:cSld>
+  <p:clrMapOvr>
+    <a:masterClrMapping/>
+  </p:clrMapOvr>
+</p:sld>
+</file>
+
+<file path=ppt/slides/slide32.xml><?xml version="1.0" encoding="utf-8"?>
+<p:sld xmlns:a="http://schemas.openxmlformats.org/drawingml/2006/main" xmlns:p="http://schemas.openxmlformats.org/presentationml/2006/main" xmlns:r="http://schemas.openxmlformats.org/officeDocument/2006/relationships">
+  <p:cSld>
+    <p:spTree>
+      <p:nvGrpSpPr>
+        <p:cNvPr id="1" name=""/>
+        <p:cNvGrpSpPr/>
+        <p:nvPr/>
+      </p:nvGrpSpPr>
+      <p:grpSpPr/>
+      <p:sp>
+        <p:nvSpPr>
+          <p:cNvPr id="2" name="Rectangle 1"/>
+          <p:cNvSpPr/>
+          <p:nvPr/>
+        </p:nvSpPr>
+        <p:spPr>
+          <a:xfrm>
+            <a:off x="0" y="0"/>
+            <a:ext cx="12191695" cy="6858000"/>
+          </a:xfrm>
+          <a:prstGeom prst="rect">
+            <a:avLst/>
+          </a:prstGeom>
+          <a:solidFill>
+            <a:srgbClr val="0D0D1A"/>
+          </a:solidFill>
+          <a:ln>
+            <a:noFill/>
+          </a:ln>
+        </p:spPr>
+        <p:style>
+          <a:lnRef idx="1">
+            <a:schemeClr val="accent1"/>
+          </a:lnRef>
+          <a:fillRef idx="3">
+            <a:schemeClr val="accent1"/>
+          </a:fillRef>
+          <a:effectRef idx="2">
+            <a:schemeClr val="accent1"/>
+          </a:effectRef>
+          <a:fontRef idx="minor">
+            <a:schemeClr val="lt1"/>
+          </a:fontRef>
+        </p:style>
+        <p:txBody>
+          <a:bodyPr rtlCol="0" anchor="ctr"/>
+          <a:lstStyle/>
+          <a:p>
+            <a:pPr algn="ctr"/>
+          </a:p>
+        </p:txBody>
+      </p:sp>
+      <p:sp>
+        <p:nvSpPr>
+          <p:cNvPr id="3" name="TextBox 2"/>
+          <p:cNvSpPr txBox="1"/>
+          <p:nvPr/>
+        </p:nvSpPr>
+        <p:spPr>
+          <a:xfrm>
+            <a:off x="731520" y="365760"/>
+            <a:ext cx="10698480" cy="914400"/>
+          </a:xfrm>
+          <a:prstGeom prst="rect">
+            <a:avLst/>
+          </a:prstGeom>
+          <a:noFill/>
+        </p:spPr>
+        <p:txBody>
+          <a:bodyPr wrap="square">
+            <a:spAutoFit/>
+          </a:bodyPr>
+          <a:lstStyle/>
+          <a:p>
+            <a:pPr>
+              <a:defRPr sz="2400" b="1">
+                <a:solidFill>
+                  <a:srgbClr val="4ECCA3"/>
+                </a:solidFill>
+              </a:defRPr>
+            </a:pPr>
+            <a:r>
+              <a:t>برنامه اقدام · ACTION PLAN  |  جمع‌بندی و برنامه ۳۰ روزه آینده</a:t>
+            </a:r>
+          </a:p>
+          <a:p>
+            <a:pPr>
+              <a:defRPr sz="1400">
+                <a:solidFill>
+                  <a:srgbClr val="969EB4"/>
+                </a:solidFill>
+              </a:defRPr>
+            </a:pPr>
+            <a:r>
+              <a:t>نقشه راه ۴ هفته‌ای برای رسیدن به آمادگی در جلسات ارزیابی:</a:t>
+            </a:r>
+          </a:p>
+        </p:txBody>
+      </p:sp>
+      <p:sp>
+        <p:nvSpPr>
+          <p:cNvPr id="4" name="Rounded Rectangle 3"/>
+          <p:cNvSpPr/>
+          <p:nvPr/>
+        </p:nvSpPr>
+        <p:spPr>
+          <a:xfrm>
+            <a:off x="731520" y="1463040"/>
+            <a:ext cx="2503170" cy="2011680"/>
+          </a:xfrm>
+          <a:prstGeom prst="roundRect">
+            <a:avLst/>
+          </a:prstGeom>
+          <a:solidFill>
+            <a:srgbClr val="141428"/>
+          </a:solidFill>
+          <a:ln w="19050">
+            <a:solidFill>
+              <a:srgbClr val="4ECCA3"/>
+            </a:solidFill>
+          </a:ln>
+        </p:spPr>
+        <p:style>
+          <a:lnRef idx="1">
+            <a:schemeClr val="accent1"/>
+          </a:lnRef>
+          <a:fillRef idx="3">
+            <a:schemeClr val="accent1"/>
+          </a:fillRef>
+          <a:effectRef idx="2">
+            <a:schemeClr val="accent1"/>
+          </a:effectRef>
+          <a:fontRef idx="minor">
+            <a:schemeClr val="lt1"/>
+          </a:fontRef>
+        </p:style>
+        <p:txBody>
+          <a:bodyPr rtlCol="0" anchor="ctr" wrap="square"/>
+          <a:lstStyle/>
+          <a:p>
+            <a:pPr algn="ctr">
+              <a:defRPr sz="1400" b="1">
+                <a:solidFill>
+                  <a:srgbClr val="4ECCA3"/>
+                </a:solidFill>
+              </a:defRPr>
+            </a:pPr>
+            <a:r>
+              <a:t>هفته اول: مبانی آرایه و هش</a:t>
+            </a:r>
+          </a:p>
+          <a:p>
+            <a:pPr>
+              <a:defRPr sz="1100">
+                <a:solidFill>
+                  <a:srgbClr val="DDE1F5"/>
+                </a:solidFill>
+              </a:defRPr>
+            </a:pPr>
+            <a:r>
+              <a:t>حل ۵ مسئله Easy اول Blind 75 مانند Two Sum و Contains Duplicate.</a:t>
+            </a:r>
+          </a:p>
+        </p:txBody>
+      </p:sp>
+      <p:sp>
+        <p:nvSpPr>
+          <p:cNvPr id="5" name="Rounded Rectangle 4"/>
+          <p:cNvSpPr/>
+          <p:nvPr/>
+        </p:nvSpPr>
+        <p:spPr>
+          <a:xfrm>
+            <a:off x="3463289" y="1463040"/>
+            <a:ext cx="2503170" cy="2011680"/>
+          </a:xfrm>
+          <a:prstGeom prst="roundRect">
+            <a:avLst/>
+          </a:prstGeom>
+          <a:solidFill>
+            <a:srgbClr val="141428"/>
+          </a:solidFill>
+          <a:ln w="19050">
+            <a:solidFill>
+              <a:srgbClr val="7C8FF5"/>
+            </a:solidFill>
+          </a:ln>
+        </p:spPr>
+        <p:style>
+          <a:lnRef idx="1">
+            <a:schemeClr val="accent1"/>
+          </a:lnRef>
+          <a:fillRef idx="3">
+            <a:schemeClr val="accent1"/>
+          </a:fillRef>
+          <a:effectRef idx="2">
+            <a:schemeClr val="accent1"/>
+          </a:effectRef>
+          <a:fontRef idx="minor">
+            <a:schemeClr val="lt1"/>
+          </a:fontRef>
+        </p:style>
+        <p:txBody>
+          <a:bodyPr rtlCol="0" anchor="ctr" wrap="square"/>
+          <a:lstStyle/>
+          <a:p>
+            <a:pPr algn="ctr">
+              <a:defRPr sz="1400" b="1">
+                <a:solidFill>
+                  <a:srgbClr val="7C8FF5"/>
+                </a:solidFill>
+              </a:defRPr>
+            </a:pPr>
+            <a:r>
+              <a:t>هفته دوم: نشانگرها و پنجره</a:t>
+            </a:r>
+          </a:p>
+          <a:p>
+            <a:pPr>
+              <a:defRPr sz="1100">
+                <a:solidFill>
+                  <a:srgbClr val="DDE1F5"/>
+                </a:solidFill>
+              </a:defRPr>
+            </a:pPr>
+            <a:r>
+              <a:t>الگوهای Two Pointers و Sliding Window با مرور منظم مسائل هفته اول.</a:t>
+            </a:r>
+          </a:p>
+        </p:txBody>
+      </p:sp>
+      <p:sp>
+        <p:nvSpPr>
+          <p:cNvPr id="6" name="Rounded Rectangle 5"/>
+          <p:cNvSpPr/>
+          <p:nvPr/>
+        </p:nvSpPr>
+        <p:spPr>
+          <a:xfrm>
+            <a:off x="6195059" y="1463040"/>
+            <a:ext cx="2503170" cy="2011680"/>
+          </a:xfrm>
+          <a:prstGeom prst="roundRect">
+            <a:avLst/>
+          </a:prstGeom>
+          <a:solidFill>
+            <a:srgbClr val="141428"/>
+          </a:solidFill>
+          <a:ln w="19050">
+            <a:solidFill>
+              <a:srgbClr val="E9A84C"/>
+            </a:solidFill>
+          </a:ln>
+        </p:spPr>
+        <p:style>
+          <a:lnRef idx="1">
+            <a:schemeClr val="accent1"/>
+          </a:lnRef>
+          <a:fillRef idx="3">
+            <a:schemeClr val="accent1"/>
+          </a:fillRef>
+          <a:effectRef idx="2">
+            <a:schemeClr val="accent1"/>
+          </a:effectRef>
+          <a:fontRef idx="minor">
+            <a:schemeClr val="lt1"/>
+          </a:fontRef>
+        </p:style>
+        <p:txBody>
+          <a:bodyPr rtlCol="0" anchor="ctr" wrap="square"/>
+          <a:lstStyle/>
+          <a:p>
+            <a:pPr algn="ctr">
+              <a:defRPr sz="1400" b="1">
+                <a:solidFill>
+                  <a:srgbClr val="E9A84C"/>
+                </a:solidFill>
+              </a:defRPr>
+            </a:pPr>
+            <a:r>
+              <a:t>هفته سوم: ساختارها و پشته</a:t>
+            </a:r>
+          </a:p>
+          <a:p>
+            <a:pPr>
+              <a:defRPr sz="1100">
+                <a:solidFill>
+                  <a:srgbClr val="DDE1F5"/>
+                </a:solidFill>
+              </a:defRPr>
+            </a:pPr>
+            <a:r>
+              <a:t>درخت‌ها، پشته (Stack) و پیمایش‌های DFS و BFS پایه با رسم روی کاغذ.</a:t>
+            </a:r>
+          </a:p>
+        </p:txBody>
+      </p:sp>
+      <p:sp>
+        <p:nvSpPr>
+          <p:cNvPr id="7" name="Rounded Rectangle 6"/>
+          <p:cNvSpPr/>
+          <p:nvPr/>
+        </p:nvSpPr>
+        <p:spPr>
+          <a:xfrm>
+            <a:off x="8926830" y="1463040"/>
+            <a:ext cx="2503170" cy="2011680"/>
+          </a:xfrm>
+          <a:prstGeom prst="roundRect">
+            <a:avLst/>
+          </a:prstGeom>
+          <a:solidFill>
+            <a:srgbClr val="141428"/>
+          </a:solidFill>
+          <a:ln w="19050">
+            <a:solidFill>
+              <a:srgbClr val="4ECCA3"/>
+            </a:solidFill>
+          </a:ln>
+        </p:spPr>
+        <p:style>
+          <a:lnRef idx="1">
+            <a:schemeClr val="accent1"/>
+          </a:lnRef>
+          <a:fillRef idx="3">
+            <a:schemeClr val="accent1"/>
+          </a:fillRef>
+          <a:effectRef idx="2">
+            <a:schemeClr val="accent1"/>
+          </a:effectRef>
+          <a:fontRef idx="minor">
+            <a:schemeClr val="lt1"/>
+          </a:fontRef>
+        </p:style>
+        <p:txBody>
+          <a:bodyPr rtlCol="0" anchor="ctr" wrap="square"/>
+          <a:lstStyle/>
+          <a:p>
+            <a:pPr algn="ctr">
+              <a:defRPr sz="1400" b="1">
+                <a:solidFill>
+                  <a:srgbClr val="4ECCA3"/>
+                </a:solidFill>
+              </a:defRPr>
+            </a:pPr>
+            <a:r>
+              <a:t>هفته چهارم: تست‌های Medium</a:t>
+            </a:r>
+          </a:p>
+          <a:p>
+            <a:pPr>
+              <a:defRPr sz="1100">
+                <a:solidFill>
+                  <a:srgbClr val="DDE1F5"/>
+                </a:solidFill>
+              </a:defRPr>
+            </a:pPr>
+            <a:r>
+              <a:t>ورود به مسائل سطح Medium و تمرین با تایمر ۳۰ دقیقه‌ای ارزیابی.</a:t>
+            </a:r>
+          </a:p>
+        </p:txBody>
+      </p:sp>
+      <p:sp>
+        <p:nvSpPr>
+          <p:cNvPr id="8" name="Rounded Rectangle 7"/>
+          <p:cNvSpPr/>
+          <p:nvPr/>
+        </p:nvSpPr>
+        <p:spPr>
+          <a:xfrm>
+            <a:off x="731520" y="5486400"/>
+            <a:ext cx="10698480" cy="822960"/>
+          </a:xfrm>
+          <a:prstGeom prst="roundRect">
+            <a:avLst/>
+          </a:prstGeom>
+          <a:solidFill>
+            <a:srgbClr val="1C1C38"/>
+          </a:solidFill>
+          <a:ln w="12700">
+            <a:solidFill>
+              <a:srgbClr val="7C8FF5"/>
+            </a:solidFill>
+          </a:ln>
+        </p:spPr>
+        <p:style>
+          <a:lnRef idx="1">
+            <a:schemeClr val="accent1"/>
+          </a:lnRef>
+          <a:fillRef idx="3">
+            <a:schemeClr val="accent1"/>
+          </a:fillRef>
+          <a:effectRef idx="2">
+            <a:schemeClr val="accent1"/>
+          </a:effectRef>
+          <a:fontRef idx="minor">
+            <a:schemeClr val="lt1"/>
+          </a:fontRef>
+        </p:style>
+        <p:txBody>
+          <a:bodyPr rtlCol="0" anchor="ctr" wrap="square"/>
+          <a:lstStyle/>
+          <a:p>
+            <a:pPr algn="ctr">
+              <a:defRPr sz="1200" i="1">
+                <a:solidFill>
+                  <a:srgbClr val="7C8FF5"/>
+                </a:solidFill>
+              </a:defRPr>
+            </a:pPr>
+            <a:r>
+              <a:t>«پیوستگی روزانه ۴۵ دقیقه تمرین عمیق، معجزه‌ای خلق می‌کند که تمرین‌های ۱۰ ساعته‌ی بی‌هدف هرگز نخواهد کرد.»</a:t>
+            </a:r>
+          </a:p>
+        </p:txBody>
+      </p:sp>
+    </p:spTree>
+  </p:cSld>
+  <p:clrMapOvr>
+    <a:masterClrMapping/>
+  </p:clrMapOvr>
+</p:sld>
+</file>
+
+<file path=ppt/slides/slide33.xml><?xml version="1.0" encoding="utf-8"?>
+<p:sld xmlns:a="http://schemas.openxmlformats.org/drawingml/2006/main" xmlns:p="http://schemas.openxmlformats.org/presentationml/2006/main" xmlns:r="http://schemas.openxmlformats.org/officeDocument/2006/relationships">
+  <p:cSld>
+    <p:spTree>
+      <p:nvGrpSpPr>
+        <p:cNvPr id="1" name=""/>
+        <p:cNvGrpSpPr/>
+        <p:nvPr/>
+      </p:nvGrpSpPr>
+      <p:grpSpPr/>
+      <p:sp>
+        <p:nvSpPr>
+          <p:cNvPr id="2" name="Rectangle 1"/>
+          <p:cNvSpPr/>
+          <p:nvPr/>
+        </p:nvSpPr>
+        <p:spPr>
+          <a:xfrm>
+            <a:off x="0" y="0"/>
+            <a:ext cx="12191695" cy="6858000"/>
+          </a:xfrm>
+          <a:prstGeom prst="rect">
+            <a:avLst/>
+          </a:prstGeom>
+          <a:solidFill>
+            <a:srgbClr val="0D0D1A"/>
+          </a:solidFill>
+          <a:ln>
+            <a:noFill/>
+          </a:ln>
+        </p:spPr>
+        <p:style>
+          <a:lnRef idx="1">
+            <a:schemeClr val="accent1"/>
+          </a:lnRef>
+          <a:fillRef idx="3">
+            <a:schemeClr val="accent1"/>
+          </a:fillRef>
+          <a:effectRef idx="2">
+            <a:schemeClr val="accent1"/>
+          </a:effectRef>
+          <a:fontRef idx="minor">
+            <a:schemeClr val="lt1"/>
+          </a:fontRef>
+        </p:style>
+        <p:txBody>
+          <a:bodyPr rtlCol="0" anchor="ctr"/>
+          <a:lstStyle/>
+          <a:p>
+            <a:pPr algn="ctr"/>
+          </a:p>
+        </p:txBody>
+      </p:sp>
+      <p:sp>
+        <p:nvSpPr>
+          <p:cNvPr id="3" name="TextBox 2"/>
+          <p:cNvSpPr txBox="1"/>
+          <p:nvPr/>
+        </p:nvSpPr>
+        <p:spPr>
+          <a:xfrm>
+            <a:off x="1371600" y="1645920"/>
+            <a:ext cx="9418320" cy="3657600"/>
+          </a:xfrm>
+          <a:prstGeom prst="rect">
+            <a:avLst/>
+          </a:prstGeom>
+          <a:noFill/>
+        </p:spPr>
+        <p:txBody>
+          <a:bodyPr wrap="square">
+            <a:spAutoFit/>
+          </a:bodyPr>
+          <a:lstStyle/>
+          <a:p>
+            <a:pPr algn="ctr">
+              <a:defRPr sz="4600" b="1">
+                <a:solidFill>
+                  <a:srgbClr val="4ECCA3"/>
+                </a:solidFill>
+              </a:defRPr>
+            </a:pPr>
+            <a:r>
+              <a:t>متشکرم از همراهی شما</a:t>
+            </a:r>
+          </a:p>
+          <a:p>
+            <a:pPr algn="ctr">
+              <a:defRPr sz="2800">
+                <a:solidFill>
+                  <a:srgbClr val="7C8FF5"/>
+                </a:solidFill>
+              </a:defRPr>
+            </a:pPr>
+            <a:r>
+              <a:t>پرسش و پاسخ (Q&amp;A)</a:t>
+            </a:r>
+          </a:p>
+          <a:p>
+            <a:br/>
+            <a:pPr algn="ctr">
+              <a:defRPr sz="2000">
+                <a:solidFill>
+                  <a:srgbClr val="DDE1F5"/>
+                </a:solidFill>
+              </a:defRPr>
+            </a:pPr>
+            <a:r>
+              <a:t>Milad Faridnia</a:t>
+            </a:r>
+          </a:p>
+          <a:p>
+            <a:pPr algn="ctr">
+              <a:defRPr sz="1400">
+                <a:solidFill>
+                  <a:srgbClr val="E9A84C"/>
+                </a:solidFill>
+              </a:defRPr>
+            </a:pPr>
+            <a:r>
+              <a:t>LeetCode.com · NeetCode.io · Blind 75</a:t>
             </a:r>
           </a:p>
         </p:txBody>

--- a/LeetCode_Starter_Guide.pptx
+++ b/LeetCode_Starter_Guide.pptx
@@ -39,6 +39,11 @@
     <p:sldId id="287" r:id="rId39"/>
     <p:sldId id="288" r:id="rId40"/>
     <p:sldId id="289" r:id="rId41"/>
+    <p:sldId id="290" r:id="rId42"/>
+    <p:sldId id="291" r:id="rId43"/>
+    <p:sldId id="292" r:id="rId44"/>
+    <p:sldId id="293" r:id="rId45"/>
+    <p:sldId id="294" r:id="rId46"/>
   </p:sldIdLst>
   <p:sldSz cx="12191695" cy="6858000" type="screen4x3"/>
   <p:notesSz cx="6858000" cy="9144000"/>
@@ -2005,7 +2010,7 @@
           <a:lstStyle/>
           <a:p>
             <a:r>
-              <a:t>بیان مسئله همگام‌سازی State در CardStack از پروژه سپینو با Jetpack Compose.</a:t>
+              <a:t>مسئله ۱۱ لیت‌کد از استادی پلن LeetCode 75. توضیح دهید که چرا این مسئله آزمون مهم تفکر حریصانه است.</a:t>
             </a:r>
           </a:p>
         </p:txBody>
@@ -2145,7 +2150,7 @@
           <a:lstStyle/>
           <a:p>
             <a:r>
-              <a:t>کد غیربهینه اولیه که در نگاه اول شیک است اما در پس‌زمینه جستجوی خطی تودرتو انجام می‌دهد.</a:t>
+              <a:t>بیان کنید که چطور مطرح کردن و نقد هوشمندانه Brute Force در کمتر از ۱ دقیقه، تسلط شما بر تحلیل Big-O را به رخ می‌کشد.</a:t>
             </a:r>
           </a:p>
         </p:txBody>
@@ -2215,7 +2220,7 @@
           <a:lstStyle/>
           <a:p>
             <a:r>
-              <a:t>بررسی فنی علت افت فریم و نقض بودجه ۱۶ میلی‌ثانیه‌ای در اثر اجرای الگوریتم O(N²).</a:t>
+              <a:t>اثبات حریصانه را با مثال روی تخته یا اسلاید برای حضار جا بیندازید.</a:t>
             </a:r>
           </a:p>
         </p:txBody>
@@ -2285,7 +2290,7 @@
           <a:lstStyle/>
           <a:p>
             <a:r>
-              <a:t>پیاده‌سازی بهینه با toSet() و توضیح تفاوت جستجوی O(1) در جدول هش با جستجوی خطی در لیست.</a:t>
+              <a:t>کد کاتلین را خط‌به‌خط توضیح دهید و بر سادگی و زیبایی پیاده‌سازی تأکید کنید.</a:t>
             </a:r>
           </a:p>
         </p:txBody>
@@ -2355,7 +2360,7 @@
           <a:lstStyle/>
           <a:p>
             <a:r>
-              <a:t>ارائه را با انرژی مثبت تمام کنید و حضار را تشویق کنید که همین امروز اولین مسئله را حل کنند.</a:t>
+              <a:t>لینک مسئله: https://leetcode.com/problems/container-with-most-water/description/  -- شبیه‌سازی گام‌به‌گام و نمایش بصری ستون‌ها و حجم آب.</a:t>
             </a:r>
           </a:p>
         </p:txBody>
@@ -2381,6 +2386,356 @@
 </file>
 
 <file path=ppt/notesSlides/notesSlide34.xml><?xml version="1.0" encoding="utf-8"?>
+<p:notes xmlns:a="http://schemas.openxmlformats.org/drawingml/2006/main" xmlns:p="http://schemas.openxmlformats.org/presentationml/2006/main" xmlns:r="http://schemas.openxmlformats.org/officeDocument/2006/relationships">
+  <p:cSld>
+    <p:spTree>
+      <p:nvGrpSpPr>
+        <p:cNvPr id="1" name=""/>
+        <p:cNvGrpSpPr/>
+        <p:nvPr/>
+      </p:nvGrpSpPr>
+      <p:grpSpPr>
+        <a:xfrm>
+          <a:off x="0" y="0"/>
+          <a:ext cx="0" cy="0"/>
+          <a:chOff x="0" y="0"/>
+          <a:chExt cx="0" cy="0"/>
+        </a:xfrm>
+      </p:grpSpPr>
+      <p:sp>
+        <p:nvSpPr>
+          <p:cNvPr id="2" name="Slide Image Placeholder 1"/>
+          <p:cNvSpPr>
+            <a:spLocks noGrp="1"/>
+          </p:cNvSpPr>
+          <p:nvPr>
+            <p:ph type="sldImg" idx="2"/>
+          </p:nvPr>
+        </p:nvSpPr>
+        <p:spPr/>
+      </p:sp>
+      <p:sp>
+        <p:nvSpPr>
+          <p:cNvPr id="3" name="Notes Placeholder 2"/>
+          <p:cNvSpPr>
+            <a:spLocks noGrp="1"/>
+          </p:cNvSpPr>
+          <p:nvPr>
+            <p:ph type="body" idx="3" sz="quarter"/>
+          </p:nvPr>
+        </p:nvSpPr>
+        <p:spPr/>
+        <p:txBody>
+          <a:bodyPr/>
+          <a:lstStyle/>
+          <a:p>
+            <a:r>
+              <a:t>تشریح کامل صورت مسئله CardStack در سپینو، چرایی نیاز به تابع خالص همگام‌ساز، و نمایش کل کد ابتدایی پیاده‌سازی شده.</a:t>
+            </a:r>
+          </a:p>
+        </p:txBody>
+      </p:sp>
+      <p:sp>
+        <p:nvSpPr>
+          <p:cNvPr id="4" name="Slide Number Placeholder 3"/>
+          <p:cNvSpPr>
+            <a:spLocks noGrp="1"/>
+          </p:cNvSpPr>
+          <p:nvPr>
+            <p:ph type="sldNum" idx="5" sz="quarter"/>
+          </p:nvPr>
+        </p:nvSpPr>
+        <p:spPr/>
+      </p:sp>
+    </p:spTree>
+  </p:cSld>
+  <p:clrMapOvr>
+    <a:masterClrMapping/>
+  </p:clrMapOvr>
+</p:notes>
+</file>
+
+<file path=ppt/notesSlides/notesSlide35.xml><?xml version="1.0" encoding="utf-8"?>
+<p:notes xmlns:a="http://schemas.openxmlformats.org/drawingml/2006/main" xmlns:p="http://schemas.openxmlformats.org/presentationml/2006/main" xmlns:r="http://schemas.openxmlformats.org/officeDocument/2006/relationships">
+  <p:cSld>
+    <p:spTree>
+      <p:nvGrpSpPr>
+        <p:cNvPr id="1" name=""/>
+        <p:cNvGrpSpPr/>
+        <p:nvPr/>
+      </p:nvGrpSpPr>
+      <p:grpSpPr>
+        <a:xfrm>
+          <a:off x="0" y="0"/>
+          <a:ext cx="0" cy="0"/>
+          <a:chOff x="0" y="0"/>
+          <a:chExt cx="0" cy="0"/>
+        </a:xfrm>
+      </p:grpSpPr>
+      <p:sp>
+        <p:nvSpPr>
+          <p:cNvPr id="2" name="Slide Image Placeholder 1"/>
+          <p:cNvSpPr>
+            <a:spLocks noGrp="1"/>
+          </p:cNvSpPr>
+          <p:nvPr>
+            <p:ph type="sldImg" idx="2"/>
+          </p:nvPr>
+        </p:nvSpPr>
+        <p:spPr/>
+      </p:sp>
+      <p:sp>
+        <p:nvSpPr>
+          <p:cNvPr id="3" name="Notes Placeholder 2"/>
+          <p:cNvSpPr>
+            <a:spLocks noGrp="1"/>
+          </p:cNvSpPr>
+          <p:nvPr>
+            <p:ph type="body" idx="3" sz="quarter"/>
+          </p:nvPr>
+        </p:nvSpPr>
+        <p:spPr/>
+        <p:txBody>
+          <a:bodyPr/>
+          <a:lstStyle/>
+          <a:p>
+            <a:r>
+              <a:t>کالبدشکافی مکانیسم عملگر in روی کالکشن List و تبدیل شدن ناخواسته کد به O(N²).</a:t>
+            </a:r>
+          </a:p>
+        </p:txBody>
+      </p:sp>
+      <p:sp>
+        <p:nvSpPr>
+          <p:cNvPr id="4" name="Slide Number Placeholder 3"/>
+          <p:cNvSpPr>
+            <a:spLocks noGrp="1"/>
+          </p:cNvSpPr>
+          <p:nvPr>
+            <p:ph type="sldNum" idx="5" sz="quarter"/>
+          </p:nvPr>
+        </p:nvSpPr>
+        <p:spPr/>
+      </p:sp>
+    </p:spTree>
+  </p:cSld>
+  <p:clrMapOvr>
+    <a:masterClrMapping/>
+  </p:clrMapOvr>
+</p:notes>
+</file>
+
+<file path=ppt/notesSlides/notesSlide36.xml><?xml version="1.0" encoding="utf-8"?>
+<p:notes xmlns:a="http://schemas.openxmlformats.org/drawingml/2006/main" xmlns:p="http://schemas.openxmlformats.org/presentationml/2006/main" xmlns:r="http://schemas.openxmlformats.org/officeDocument/2006/relationships">
+  <p:cSld>
+    <p:spTree>
+      <p:nvGrpSpPr>
+        <p:cNvPr id="1" name=""/>
+        <p:cNvGrpSpPr/>
+        <p:nvPr/>
+      </p:nvGrpSpPr>
+      <p:grpSpPr>
+        <a:xfrm>
+          <a:off x="0" y="0"/>
+          <a:ext cx="0" cy="0"/>
+          <a:chOff x="0" y="0"/>
+          <a:chExt cx="0" cy="0"/>
+        </a:xfrm>
+      </p:grpSpPr>
+      <p:sp>
+        <p:nvSpPr>
+          <p:cNvPr id="2" name="Slide Image Placeholder 1"/>
+          <p:cNvSpPr>
+            <a:spLocks noGrp="1"/>
+          </p:cNvSpPr>
+          <p:nvPr>
+            <p:ph type="sldImg" idx="2"/>
+          </p:nvPr>
+        </p:nvSpPr>
+        <p:spPr/>
+      </p:sp>
+      <p:sp>
+        <p:nvSpPr>
+          <p:cNvPr id="3" name="Notes Placeholder 2"/>
+          <p:cNvSpPr>
+            <a:spLocks noGrp="1"/>
+          </p:cNvSpPr>
+          <p:nvPr>
+            <p:ph type="body" idx="3" sz="quarter"/>
+          </p:nvPr>
+        </p:nvSpPr>
+        <p:spPr/>
+        <p:txBody>
+          <a:bodyPr/>
+          <a:lstStyle/>
+          <a:p>
+            <a:r>
+              <a:t>بررسی فنی علت افت فریم و نقض بودجه ۱۶ میلی‌ثانیه‌ای در اثر اجرای الگوریتم O(N²).</a:t>
+            </a:r>
+          </a:p>
+        </p:txBody>
+      </p:sp>
+      <p:sp>
+        <p:nvSpPr>
+          <p:cNvPr id="4" name="Slide Number Placeholder 3"/>
+          <p:cNvSpPr>
+            <a:spLocks noGrp="1"/>
+          </p:cNvSpPr>
+          <p:nvPr>
+            <p:ph type="sldNum" idx="5" sz="quarter"/>
+          </p:nvPr>
+        </p:nvSpPr>
+        <p:spPr/>
+      </p:sp>
+    </p:spTree>
+  </p:cSld>
+  <p:clrMapOvr>
+    <a:masterClrMapping/>
+  </p:clrMapOvr>
+</p:notes>
+</file>
+
+<file path=ppt/notesSlides/notesSlide37.xml><?xml version="1.0" encoding="utf-8"?>
+<p:notes xmlns:a="http://schemas.openxmlformats.org/drawingml/2006/main" xmlns:p="http://schemas.openxmlformats.org/presentationml/2006/main" xmlns:r="http://schemas.openxmlformats.org/officeDocument/2006/relationships">
+  <p:cSld>
+    <p:spTree>
+      <p:nvGrpSpPr>
+        <p:cNvPr id="1" name=""/>
+        <p:cNvGrpSpPr/>
+        <p:nvPr/>
+      </p:nvGrpSpPr>
+      <p:grpSpPr>
+        <a:xfrm>
+          <a:off x="0" y="0"/>
+          <a:ext cx="0" cy="0"/>
+          <a:chOff x="0" y="0"/>
+          <a:chExt cx="0" cy="0"/>
+        </a:xfrm>
+      </p:grpSpPr>
+      <p:sp>
+        <p:nvSpPr>
+          <p:cNvPr id="2" name="Slide Image Placeholder 1"/>
+          <p:cNvSpPr>
+            <a:spLocks noGrp="1"/>
+          </p:cNvSpPr>
+          <p:nvPr>
+            <p:ph type="sldImg" idx="2"/>
+          </p:nvPr>
+        </p:nvSpPr>
+        <p:spPr/>
+      </p:sp>
+      <p:sp>
+        <p:nvSpPr>
+          <p:cNvPr id="3" name="Notes Placeholder 2"/>
+          <p:cNvSpPr>
+            <a:spLocks noGrp="1"/>
+          </p:cNvSpPr>
+          <p:nvPr>
+            <p:ph type="body" idx="3" sz="quarter"/>
+          </p:nvPr>
+        </p:nvSpPr>
+        <p:spPr/>
+        <p:txBody>
+          <a:bodyPr/>
+          <a:lstStyle/>
+          <a:p>
+            <a:r>
+              <a:t>پیاده‌سازی بهینه با toSet() و توضیح تفاوت جستجوی O(1) در جدول هش با جستجوی خطی در لیست.</a:t>
+            </a:r>
+          </a:p>
+        </p:txBody>
+      </p:sp>
+      <p:sp>
+        <p:nvSpPr>
+          <p:cNvPr id="4" name="Slide Number Placeholder 3"/>
+          <p:cNvSpPr>
+            <a:spLocks noGrp="1"/>
+          </p:cNvSpPr>
+          <p:nvPr>
+            <p:ph type="sldNum" idx="5" sz="quarter"/>
+          </p:nvPr>
+        </p:nvSpPr>
+        <p:spPr/>
+      </p:sp>
+    </p:spTree>
+  </p:cSld>
+  <p:clrMapOvr>
+    <a:masterClrMapping/>
+  </p:clrMapOvr>
+</p:notes>
+</file>
+
+<file path=ppt/notesSlides/notesSlide38.xml><?xml version="1.0" encoding="utf-8"?>
+<p:notes xmlns:a="http://schemas.openxmlformats.org/drawingml/2006/main" xmlns:p="http://schemas.openxmlformats.org/presentationml/2006/main" xmlns:r="http://schemas.openxmlformats.org/officeDocument/2006/relationships">
+  <p:cSld>
+    <p:spTree>
+      <p:nvGrpSpPr>
+        <p:cNvPr id="1" name=""/>
+        <p:cNvGrpSpPr/>
+        <p:nvPr/>
+      </p:nvGrpSpPr>
+      <p:grpSpPr>
+        <a:xfrm>
+          <a:off x="0" y="0"/>
+          <a:ext cx="0" cy="0"/>
+          <a:chOff x="0" y="0"/>
+          <a:chExt cx="0" cy="0"/>
+        </a:xfrm>
+      </p:grpSpPr>
+      <p:sp>
+        <p:nvSpPr>
+          <p:cNvPr id="2" name="Slide Image Placeholder 1"/>
+          <p:cNvSpPr>
+            <a:spLocks noGrp="1"/>
+          </p:cNvSpPr>
+          <p:nvPr>
+            <p:ph type="sldImg" idx="2"/>
+          </p:nvPr>
+        </p:nvSpPr>
+        <p:spPr/>
+      </p:sp>
+      <p:sp>
+        <p:nvSpPr>
+          <p:cNvPr id="3" name="Notes Placeholder 2"/>
+          <p:cNvSpPr>
+            <a:spLocks noGrp="1"/>
+          </p:cNvSpPr>
+          <p:nvPr>
+            <p:ph type="body" idx="3" sz="quarter"/>
+          </p:nvPr>
+        </p:nvSpPr>
+        <p:spPr/>
+        <p:txBody>
+          <a:bodyPr/>
+          <a:lstStyle/>
+          <a:p>
+            <a:r>
+              <a:t>ارائه را با انرژی مثبت تمام کنید و حضار را تشویق کنید که همین امروز اولین مسئله را حل کنند.</a:t>
+            </a:r>
+          </a:p>
+        </p:txBody>
+      </p:sp>
+      <p:sp>
+        <p:nvSpPr>
+          <p:cNvPr id="4" name="Slide Number Placeholder 3"/>
+          <p:cNvSpPr>
+            <a:spLocks noGrp="1"/>
+          </p:cNvSpPr>
+          <p:nvPr>
+            <p:ph type="sldNum" idx="5" sz="quarter"/>
+          </p:nvPr>
+        </p:nvSpPr>
+        <p:spPr/>
+      </p:sp>
+    </p:spTree>
+  </p:cSld>
+  <p:clrMapOvr>
+    <a:masterClrMapping/>
+  </p:clrMapOvr>
+</p:notes>
+</file>
+
+<file path=ppt/notesSlides/notesSlide39.xml><?xml version="1.0" encoding="utf-8"?>
 <p:notes xmlns:a="http://schemas.openxmlformats.org/drawingml/2006/main" xmlns:p="http://schemas.openxmlformats.org/presentationml/2006/main" xmlns:r="http://schemas.openxmlformats.org/officeDocument/2006/relationships">
   <p:cSld>
     <p:spTree>
@@ -6447,7 +6802,7 @@
         </p:nvSpPr>
         <p:spPr>
           <a:xfrm>
-            <a:off x="731520" y="3703320"/>
+            <a:off x="731520" y="3611880"/>
             <a:ext cx="10698480" cy="1463040"/>
           </a:xfrm>
           <a:prstGeom prst="rect">
@@ -7897,7 +8252,7 @@
         </p:nvSpPr>
         <p:spPr>
           <a:xfrm>
-            <a:off x="731520" y="3703320"/>
+            <a:off x="731520" y="3611880"/>
             <a:ext cx="10698480" cy="1463040"/>
           </a:xfrm>
           <a:prstGeom prst="rect">
@@ -8107,7 +8462,7 @@
         <p:spPr>
           <a:xfrm>
             <a:off x="731520" y="1463040"/>
-            <a:ext cx="10698480" cy="2926080"/>
+            <a:ext cx="10698480" cy="2843784"/>
           </a:xfrm>
           <a:prstGeom prst="roundRect">
             <a:avLst/>
@@ -8161,7 +8516,7 @@
               </a:defRPr>
             </a:pPr>
             <a:r>
-              <a:t>    val size = nums.size</a:t>
+              <a:t>    val size = nums.size // Time: O(1), Space: O(1)</a:t>
             </a:r>
           </a:p>
           <a:p>
@@ -8173,6 +8528,9 @@
                 <a:latin typeface="Consolas"/>
               </a:defRPr>
             </a:pPr>
+            <a:r>
+              <a:t>    for (i in 0 until size) { // O(n) outer iterations</a:t>
+            </a:r>
           </a:p>
           <a:p>
             <a:pPr algn="l">
@@ -8184,7 +8542,7 @@
               </a:defRPr>
             </a:pPr>
             <a:r>
-              <a:t>    // حلقه اول: عدد اول را برمی‌داریم</a:t>
+              <a:t>        val firstNumber = nums[i] // O(1)</a:t>
             </a:r>
           </a:p>
           <a:p>
@@ -8197,7 +8555,7 @@
               </a:defRPr>
             </a:pPr>
             <a:r>
-              <a:t>    for (i in 0 until size) {</a:t>
+              <a:t>        for (j in (i + 1) until size) { // O(n) inner iterations</a:t>
             </a:r>
           </a:p>
           <a:p>
@@ -8210,7 +8568,7 @@
               </a:defRPr>
             </a:pPr>
             <a:r>
-              <a:t>        val firstNumber = nums[i]</a:t>
+              <a:t>            val sum = firstNumber + nums[j] // O(1)</a:t>
             </a:r>
           </a:p>
           <a:p>
@@ -8222,6 +8580,9 @@
                 <a:latin typeface="Consolas"/>
               </a:defRPr>
             </a:pPr>
+            <a:r>
+              <a:t>            if (sum == target) return intArrayOf(i, j) // Time: O(1), Space: O(1)</a:t>
+            </a:r>
           </a:p>
           <a:p>
             <a:pPr algn="l">
@@ -8233,7 +8594,7 @@
               </a:defRPr>
             </a:pPr>
             <a:r>
-              <a:t>        // حلقه دوم: در خانه‌های بعدی به دنبال عدد دوم می‌گردیم</a:t>
+              <a:t>        }</a:t>
             </a:r>
           </a:p>
           <a:p>
@@ -8246,7 +8607,7 @@
               </a:defRPr>
             </a:pPr>
             <a:r>
-              <a:t>        for (j in (i + 1) until size) {</a:t>
+              <a:t>    }</a:t>
             </a:r>
           </a:p>
           <a:p>
@@ -8259,7 +8620,7 @@
               </a:defRPr>
             </a:pPr>
             <a:r>
-              <a:t>            val secondNumber = nums[j]</a:t>
+              <a:t>    return intArrayOf() // Time: O(1), Space: O(1)</a:t>
             </a:r>
           </a:p>
           <a:p>
@@ -8271,6 +8632,9 @@
                 <a:latin typeface="Consolas"/>
               </a:defRPr>
             </a:pPr>
+            <a:r>
+              <a:t>}</a:t>
+            </a:r>
           </a:p>
           <a:p>
             <a:pPr algn="l">
@@ -8282,121 +8646,7 @@
               </a:defRPr>
             </a:pPr>
             <a:r>
-              <a:t>            // آیا جمع این دو عدد برابر هدف است؟</a:t>
-            </a:r>
-          </a:p>
-          <a:p>
-            <a:pPr algn="l">
-              <a:defRPr sz="1100">
-                <a:solidFill>
-                  <a:srgbClr val="4ECCA3"/>
-                </a:solidFill>
-                <a:latin typeface="Consolas"/>
-              </a:defRPr>
-            </a:pPr>
-            <a:r>
-              <a:t>            val sum = firstNumber + secondNumber</a:t>
-            </a:r>
-          </a:p>
-          <a:p>
-            <a:pPr algn="l">
-              <a:defRPr sz="1100">
-                <a:solidFill>
-                  <a:srgbClr val="4ECCA3"/>
-                </a:solidFill>
-                <a:latin typeface="Consolas"/>
-              </a:defRPr>
-            </a:pPr>
-            <a:r>
-              <a:t>            if (sum == target) {</a:t>
-            </a:r>
-          </a:p>
-          <a:p>
-            <a:pPr algn="l">
-              <a:defRPr sz="1100">
-                <a:solidFill>
-                  <a:srgbClr val="4ECCA3"/>
-                </a:solidFill>
-                <a:latin typeface="Consolas"/>
-              </a:defRPr>
-            </a:pPr>
-            <a:r>
-              <a:t>                return intArrayOf(i, j) // پاسخ پیدا شد!</a:t>
-            </a:r>
-          </a:p>
-          <a:p>
-            <a:pPr algn="l">
-              <a:defRPr sz="1100">
-                <a:solidFill>
-                  <a:srgbClr val="4ECCA3"/>
-                </a:solidFill>
-                <a:latin typeface="Consolas"/>
-              </a:defRPr>
-            </a:pPr>
-            <a:r>
-              <a:t>            }</a:t>
-            </a:r>
-          </a:p>
-          <a:p>
-            <a:pPr algn="l">
-              <a:defRPr sz="1100">
-                <a:solidFill>
-                  <a:srgbClr val="4ECCA3"/>
-                </a:solidFill>
-                <a:latin typeface="Consolas"/>
-              </a:defRPr>
-            </a:pPr>
-            <a:r>
-              <a:t>        }</a:t>
-            </a:r>
-          </a:p>
-          <a:p>
-            <a:pPr algn="l">
-              <a:defRPr sz="1100">
-                <a:solidFill>
-                  <a:srgbClr val="4ECCA3"/>
-                </a:solidFill>
-                <a:latin typeface="Consolas"/>
-              </a:defRPr>
-            </a:pPr>
-            <a:r>
-              <a:t>    }</a:t>
-            </a:r>
-          </a:p>
-          <a:p>
-            <a:pPr algn="l">
-              <a:defRPr sz="1100">
-                <a:solidFill>
-                  <a:srgbClr val="4ECCA3"/>
-                </a:solidFill>
-                <a:latin typeface="Consolas"/>
-              </a:defRPr>
-            </a:pPr>
-          </a:p>
-          <a:p>
-            <a:pPr algn="l">
-              <a:defRPr sz="1100">
-                <a:solidFill>
-                  <a:srgbClr val="4ECCA3"/>
-                </a:solidFill>
-                <a:latin typeface="Consolas"/>
-              </a:defRPr>
-            </a:pPr>
-            <a:r>
-              <a:t>    return intArrayOf() // اگر هیچ جفتی پیدا نشد</a:t>
-            </a:r>
-          </a:p>
-          <a:p>
-            <a:pPr algn="l">
-              <a:defRPr sz="1100">
-                <a:solidFill>
-                  <a:srgbClr val="4ECCA3"/>
-                </a:solidFill>
-                <a:latin typeface="Consolas"/>
-              </a:defRPr>
-            </a:pPr>
-            <a:r>
-              <a:t>}</a:t>
+              <a:t>// Overall Time: O(n²) | Auxiliary Space: O(1) | Overall Space: O(1)</a:t>
             </a:r>
           </a:p>
         </p:txBody>
@@ -8409,7 +8659,7 @@
         </p:nvSpPr>
         <p:spPr>
           <a:xfrm>
-            <a:off x="731520" y="4572000"/>
+            <a:off x="731520" y="4443984"/>
             <a:ext cx="10698480" cy="1463040"/>
           </a:xfrm>
           <a:prstGeom prst="rect">
@@ -8577,7 +8827,7 @@
         <p:spPr>
           <a:xfrm>
             <a:off x="731520" y="1463040"/>
-            <a:ext cx="10698480" cy="2926080"/>
+            <a:ext cx="10698480" cy="2843784"/>
           </a:xfrm>
           <a:prstGeom prst="roundRect">
             <a:avLst/>
@@ -8631,7 +8881,7 @@
               </a:defRPr>
             </a:pPr>
             <a:r>
-              <a:t>    // دفترچه یادداشت: کلید = عدد، مقدار = اندیس</a:t>
+              <a:t>    val seen = mutableMapOf&lt;Int, Int&gt;() // Space: O(n) auxiliary in worst case</a:t>
             </a:r>
           </a:p>
           <a:p>
@@ -8644,7 +8894,7 @@
               </a:defRPr>
             </a:pPr>
             <a:r>
-              <a:t>    val seen = mutableMapOf&lt;Int, Int&gt;()</a:t>
+              <a:t>    for (i in 0 until nums.size) { // O(n) iterations</a:t>
             </a:r>
           </a:p>
           <a:p>
@@ -8656,6 +8906,9 @@
                 <a:latin typeface="Consolas"/>
               </a:defRPr>
             </a:pPr>
+            <a:r>
+              <a:t>        val neededNumber = target - nums[i] // O(1)</a:t>
+            </a:r>
           </a:p>
           <a:p>
             <a:pPr algn="l">
@@ -8667,7 +8920,7 @@
               </a:defRPr>
             </a:pPr>
             <a:r>
-              <a:t>    // پیمایش تک‌تک خانه‌های آرایه</a:t>
+              <a:t>        if (seen.containsKey(neededNumber)) { // Time: O(1) avg lookup</a:t>
             </a:r>
           </a:p>
           <a:p>
@@ -8680,7 +8933,7 @@
               </a:defRPr>
             </a:pPr>
             <a:r>
-              <a:t>    for (i in 0 until nums.size) {</a:t>
+              <a:t>            return intArrayOf(seen[neededNumber]!, i) // Time: O(1), Space: O(1) output</a:t>
             </a:r>
           </a:p>
           <a:p>
@@ -8693,7 +8946,7 @@
               </a:defRPr>
             </a:pPr>
             <a:r>
-              <a:t>        val currentNumber = nums[i]</a:t>
+              <a:t>        }</a:t>
             </a:r>
           </a:p>
           <a:p>
@@ -8706,7 +8959,7 @@
               </a:defRPr>
             </a:pPr>
             <a:r>
-              <a:t>        val neededNumber = target - currentNumber</a:t>
+              <a:t>        seen[nums[i]] = i // Time: O(1) avg insertion</a:t>
             </a:r>
           </a:p>
           <a:p>
@@ -8718,6 +8971,9 @@
                 <a:latin typeface="Consolas"/>
               </a:defRPr>
             </a:pPr>
+            <a:r>
+              <a:t>    }</a:t>
+            </a:r>
           </a:p>
           <a:p>
             <a:pPr algn="l">
@@ -8729,7 +8985,7 @@
               </a:defRPr>
             </a:pPr>
             <a:r>
-              <a:t>        // آیا مکمل را قبلاً دیده‌ایم و در حافظه داریم؟</a:t>
+              <a:t>    return intArrayOf() // Time: O(1), Space: O(1)</a:t>
             </a:r>
           </a:p>
           <a:p>
@@ -8742,7 +8998,7 @@
               </a:defRPr>
             </a:pPr>
             <a:r>
-              <a:t>        if (seen.containsKey(neededNumber)) {</a:t>
+              <a:t>}</a:t>
             </a:r>
           </a:p>
           <a:p>
@@ -8755,105 +9011,7 @@
               </a:defRPr>
             </a:pPr>
             <a:r>
-              <a:t>            val complementIndex = seen[neededNumber]!!</a:t>
-            </a:r>
-          </a:p>
-          <a:p>
-            <a:pPr algn="l">
-              <a:defRPr sz="1100">
-                <a:solidFill>
-                  <a:srgbClr val="4ECCA3"/>
-                </a:solidFill>
-                <a:latin typeface="Consolas"/>
-              </a:defRPr>
-            </a:pPr>
-            <a:r>
-              <a:t>            return intArrayOf(complementIndex, i) // جفت هدف پیدا شد!</a:t>
-            </a:r>
-          </a:p>
-          <a:p>
-            <a:pPr algn="l">
-              <a:defRPr sz="1100">
-                <a:solidFill>
-                  <a:srgbClr val="4ECCA3"/>
-                </a:solidFill>
-                <a:latin typeface="Consolas"/>
-              </a:defRPr>
-            </a:pPr>
-            <a:r>
-              <a:t>        }</a:t>
-            </a:r>
-          </a:p>
-          <a:p>
-            <a:pPr algn="l">
-              <a:defRPr sz="1100">
-                <a:solidFill>
-                  <a:srgbClr val="4ECCA3"/>
-                </a:solidFill>
-                <a:latin typeface="Consolas"/>
-              </a:defRPr>
-            </a:pPr>
-          </a:p>
-          <a:p>
-            <a:pPr algn="l">
-              <a:defRPr sz="1100">
-                <a:solidFill>
-                  <a:srgbClr val="4ECCA3"/>
-                </a:solidFill>
-                <a:latin typeface="Consolas"/>
-              </a:defRPr>
-            </a:pPr>
-            <a:r>
-              <a:t>        seen[currentNumber] = i // ذخیره در حافظه</a:t>
-            </a:r>
-          </a:p>
-          <a:p>
-            <a:pPr algn="l">
-              <a:defRPr sz="1100">
-                <a:solidFill>
-                  <a:srgbClr val="4ECCA3"/>
-                </a:solidFill>
-                <a:latin typeface="Consolas"/>
-              </a:defRPr>
-            </a:pPr>
-            <a:r>
-              <a:t>    }</a:t>
-            </a:r>
-          </a:p>
-          <a:p>
-            <a:pPr algn="l">
-              <a:defRPr sz="1100">
-                <a:solidFill>
-                  <a:srgbClr val="4ECCA3"/>
-                </a:solidFill>
-                <a:latin typeface="Consolas"/>
-              </a:defRPr>
-            </a:pPr>
-          </a:p>
-          <a:p>
-            <a:pPr algn="l">
-              <a:defRPr sz="1100">
-                <a:solidFill>
-                  <a:srgbClr val="4ECCA3"/>
-                </a:solidFill>
-                <a:latin typeface="Consolas"/>
-              </a:defRPr>
-            </a:pPr>
-            <a:r>
-              <a:t>    return intArrayOf() // اگر هیچ جفتی پیدا نشد</a:t>
-            </a:r>
-          </a:p>
-          <a:p>
-            <a:pPr algn="l">
-              <a:defRPr sz="1100">
-                <a:solidFill>
-                  <a:srgbClr val="4ECCA3"/>
-                </a:solidFill>
-                <a:latin typeface="Consolas"/>
-              </a:defRPr>
-            </a:pPr>
-            <a:r>
-              <a:t>}</a:t>
+              <a:t>// Overall Time: O(n) | Auxiliary Space: O(n) | Overall Space: O(n)</a:t>
             </a:r>
           </a:p>
         </p:txBody>
@@ -8866,7 +9024,7 @@
         </p:nvSpPr>
         <p:spPr>
           <a:xfrm>
-            <a:off x="731520" y="4572000"/>
+            <a:off x="731520" y="4443984"/>
             <a:ext cx="10698480" cy="1463040"/>
           </a:xfrm>
           <a:prstGeom prst="rect">
@@ -9309,7 +9467,7 @@
         </p:nvSpPr>
         <p:spPr>
           <a:xfrm>
-            <a:off x="731520" y="3703320"/>
+            <a:off x="731520" y="3611880"/>
             <a:ext cx="10698480" cy="1463040"/>
           </a:xfrm>
           <a:prstGeom prst="rect">
@@ -9849,7 +10007,7 @@
         </p:nvSpPr>
         <p:spPr>
           <a:xfrm>
-            <a:off x="731520" y="3703320"/>
+            <a:off x="731520" y="3611880"/>
             <a:ext cx="5212080" cy="1645920"/>
           </a:xfrm>
           <a:prstGeom prst="roundRect">
@@ -9915,7 +10073,7 @@
         </p:nvSpPr>
         <p:spPr>
           <a:xfrm>
-            <a:off x="6217920" y="3703320"/>
+            <a:off x="6217920" y="3611880"/>
             <a:ext cx="5212080" cy="1645920"/>
           </a:xfrm>
           <a:prstGeom prst="roundRect">
@@ -10132,8 +10290,8 @@
         </p:nvSpPr>
         <p:spPr>
           <a:xfrm>
-            <a:off x="731520" y="1417320"/>
-            <a:ext cx="5212080" cy="1234440"/>
+            <a:off x="731520" y="1371600"/>
+            <a:ext cx="5212080" cy="1051560"/>
           </a:xfrm>
           <a:prstGeom prst="roundRect">
             <a:avLst/>
@@ -10210,8 +10368,8 @@
         </p:nvSpPr>
         <p:spPr>
           <a:xfrm>
-            <a:off x="6217920" y="1417320"/>
-            <a:ext cx="5212080" cy="1234440"/>
+            <a:off x="6217920" y="1371600"/>
+            <a:ext cx="5212080" cy="1051560"/>
           </a:xfrm>
           <a:prstGeom prst="roundRect">
             <a:avLst/>
@@ -10288,8 +10446,8 @@
         </p:nvSpPr>
         <p:spPr>
           <a:xfrm>
-            <a:off x="731520" y="2788920"/>
-            <a:ext cx="5212080" cy="1234440"/>
+            <a:off x="731520" y="2532888"/>
+            <a:ext cx="5212080" cy="1051560"/>
           </a:xfrm>
           <a:prstGeom prst="roundRect">
             <a:avLst/>
@@ -10366,8 +10524,8 @@
         </p:nvSpPr>
         <p:spPr>
           <a:xfrm>
-            <a:off x="6217920" y="2788920"/>
-            <a:ext cx="5212080" cy="1234440"/>
+            <a:off x="6217920" y="2532888"/>
+            <a:ext cx="5212080" cy="1051560"/>
           </a:xfrm>
           <a:prstGeom prst="roundRect">
             <a:avLst/>
@@ -10444,8 +10602,8 @@
         </p:nvSpPr>
         <p:spPr>
           <a:xfrm>
-            <a:off x="731520" y="4160520"/>
-            <a:ext cx="5212080" cy="1234440"/>
+            <a:off x="731520" y="3694176"/>
+            <a:ext cx="5212080" cy="1051560"/>
           </a:xfrm>
           <a:prstGeom prst="roundRect">
             <a:avLst/>
@@ -10522,8 +10680,86 @@
         </p:nvSpPr>
         <p:spPr>
           <a:xfrm>
-            <a:off x="6217920" y="4160520"/>
-            <a:ext cx="5212080" cy="1234440"/>
+            <a:off x="6217920" y="3694176"/>
+            <a:ext cx="5212080" cy="1051560"/>
+          </a:xfrm>
+          <a:prstGeom prst="roundRect">
+            <a:avLst/>
+          </a:prstGeom>
+          <a:solidFill>
+            <a:srgbClr val="1C1C38"/>
+          </a:solidFill>
+          <a:ln w="27940">
+            <a:solidFill>
+              <a:srgbClr val="4ECCA3"/>
+            </a:solidFill>
+          </a:ln>
+        </p:spPr>
+        <p:style>
+          <a:lnRef idx="1">
+            <a:schemeClr val="accent1"/>
+          </a:lnRef>
+          <a:fillRef idx="3">
+            <a:schemeClr val="accent1"/>
+          </a:fillRef>
+          <a:effectRef idx="2">
+            <a:schemeClr val="accent1"/>
+          </a:effectRef>
+          <a:fontRef idx="minor">
+            <a:schemeClr val="lt1"/>
+          </a:fontRef>
+        </p:style>
+        <p:txBody>
+          <a:bodyPr rtlCol="0" anchor="ctr" wrap="square"/>
+          <a:lstStyle/>
+          <a:p>
+            <a:pPr algn="ctr">
+              <a:defRPr sz="1300" b="1">
+                <a:solidFill>
+                  <a:srgbClr val="4ECCA3"/>
+                </a:solidFill>
+              </a:defRPr>
+            </a:pPr>
+            <a:r>
+              <a:t>🌊 ۶. مسئله چهارم: ظرف با بیشترین آب</a:t>
+            </a:r>
+          </a:p>
+          <a:p>
+            <a:pPr>
+              <a:defRPr sz="1000">
+                <a:solidFill>
+                  <a:srgbClr val="969EB4"/>
+                </a:solidFill>
+              </a:defRPr>
+            </a:pPr>
+            <a:r>
+              <a:t>اثبات حریصانه Two Pointers · چرا ستون کوتاه حرکت می‌کند؟ O(n) زمان</a:t>
+            </a:r>
+          </a:p>
+          <a:p>
+            <a:pPr>
+              <a:defRPr sz="950" b="1">
+                <a:solidFill>
+                  <a:srgbClr val="4ECCA3"/>
+                </a:solidFill>
+              </a:defRPr>
+            </a:pPr>
+            <a:r>
+              <a:t>اسلایدهای ۲۸ تا ۳۲</a:t>
+            </a:r>
+          </a:p>
+        </p:txBody>
+      </p:sp>
+      <p:sp>
+        <p:nvSpPr>
+          <p:cNvPr id="11" name="Rounded Rectangle 10"/>
+          <p:cNvSpPr/>
+          <p:nvPr/>
+        </p:nvSpPr>
+        <p:spPr>
+          <a:xfrm>
+            <a:off x="731520" y="4855464"/>
+            <a:ext cx="5212080" cy="1051560"/>
           </a:xfrm>
           <a:prstGeom prst="roundRect">
             <a:avLst/>
@@ -10563,7 +10799,7 @@
               </a:defRPr>
             </a:pPr>
             <a:r>
-              <a:t>🚀 ۶. چالش پروداکشن: CardStack سپینو</a:t>
+              <a:t>🚀 ۷. چالش پروداکشن: CardStack سپینو</a:t>
             </a:r>
           </a:p>
           <a:p>
@@ -10587,21 +10823,21 @@
               </a:defRPr>
             </a:pPr>
             <a:r>
-              <a:t>اسلایدهای ۲۸ تا ۳۱</a:t>
-            </a:r>
-          </a:p>
-        </p:txBody>
-      </p:sp>
-      <p:sp>
-        <p:nvSpPr>
-          <p:cNvPr id="11" name="Rounded Rectangle 10"/>
+              <a:t>اسلایدهای ۳۳ تا ۳۶</a:t>
+            </a:r>
+          </a:p>
+        </p:txBody>
+      </p:sp>
+      <p:sp>
+        <p:nvSpPr>
+          <p:cNvPr id="12" name="Rounded Rectangle 11"/>
           <p:cNvSpPr/>
           <p:nvPr/>
         </p:nvSpPr>
         <p:spPr>
           <a:xfrm>
-            <a:off x="731520" y="5623560"/>
-            <a:ext cx="10698480" cy="640080"/>
+            <a:off x="6217920" y="4855464"/>
+            <a:ext cx="5212080" cy="1051560"/>
           </a:xfrm>
           <a:prstGeom prst="roundRect">
             <a:avLst/>
@@ -10609,7 +10845,7 @@
           <a:solidFill>
             <a:srgbClr val="141428"/>
           </a:solidFill>
-          <a:ln w="12700">
+          <a:ln w="15240">
             <a:solidFill>
               <a:srgbClr val="7C8FF5"/>
             </a:solidFill>
@@ -10634,14 +10870,38 @@
           <a:lstStyle/>
           <a:p>
             <a:pPr algn="ctr">
-              <a:defRPr sz="1200" b="1">
+              <a:defRPr sz="1300" b="1">
                 <a:solidFill>
                   <a:srgbClr val="DDE1F5"/>
                 </a:solidFill>
               </a:defRPr>
             </a:pPr>
             <a:r>
-              <a:t>🎯 بخش پایانی: نقشه راه ۳۰ روزه مطالعه هدفمند، منابع طلایی (Blind 75 &amp; NeetCode) و پرسش و پاسخ (اسلایدهای ۳۲ تا ۳۴)</a:t>
+              <a:t>🎯 ۸. نقشه راه ۳۰ روزه و پرسش و پاسخ</a:t>
+            </a:r>
+          </a:p>
+          <a:p>
+            <a:pPr>
+              <a:defRPr sz="1000">
+                <a:solidFill>
+                  <a:srgbClr val="969EB4"/>
+                </a:solidFill>
+              </a:defRPr>
+            </a:pPr>
+            <a:r>
+              <a:t>برنامه تمرین هفتگی · معرفی Blind 75 و NeetCode · جمع‌بندی نهایی</a:t>
+            </a:r>
+          </a:p>
+          <a:p>
+            <a:pPr>
+              <a:defRPr sz="950" b="1">
+                <a:solidFill>
+                  <a:srgbClr val="7C8FF5"/>
+                </a:solidFill>
+              </a:defRPr>
+            </a:pPr>
+            <a:r>
+              <a:t>اسلایدهای ۳۷ تا ۳۹</a:t>
             </a:r>
           </a:p>
         </p:txBody>
@@ -11026,7 +11286,7 @@
         </p:nvSpPr>
         <p:spPr>
           <a:xfrm>
-            <a:off x="731520" y="3703320"/>
+            <a:off x="731520" y="3611880"/>
             <a:ext cx="5212080" cy="1645920"/>
           </a:xfrm>
           <a:prstGeom prst="roundRect">
@@ -11092,7 +11352,7 @@
         </p:nvSpPr>
         <p:spPr>
           <a:xfrm>
-            <a:off x="6217920" y="3703320"/>
+            <a:off x="6217920" y="3611880"/>
             <a:ext cx="5212080" cy="1645920"/>
           </a:xfrm>
           <a:prstGeom prst="roundRect">
@@ -11464,7 +11724,7 @@
         </p:nvSpPr>
         <p:spPr>
           <a:xfrm>
-            <a:off x="731520" y="3703320"/>
+            <a:off x="731520" y="3611880"/>
             <a:ext cx="10698480" cy="1463040"/>
           </a:xfrm>
           <a:prstGeom prst="rect">
@@ -11752,7 +12012,7 @@
               </a:defRPr>
             </a:pPr>
             <a:r>
-              <a:t>    var leftIndex = 0</a:t>
+              <a:t>    var leftIndex = 0; var rightIndex = numbers.lastIndex // Time: O(1), Space: O(1)</a:t>
             </a:r>
           </a:p>
           <a:p>
@@ -11765,7 +12025,7 @@
               </a:defRPr>
             </a:pPr>
             <a:r>
-              <a:t>    var rightIndex = numbers.size - 1</a:t>
+              <a:t>    while (leftIndex &lt; rightIndex) { // O(n) iterations</a:t>
             </a:r>
           </a:p>
           <a:p>
@@ -11777,6 +12037,9 @@
                 <a:latin typeface="Consolas"/>
               </a:defRPr>
             </a:pPr>
+            <a:r>
+              <a:t>        val currentSum = numbers[leftIndex] + numbers[rightIndex] // O(1)</a:t>
+            </a:r>
           </a:p>
           <a:p>
             <a:pPr algn="l">
@@ -11788,7 +12051,7 @@
               </a:defRPr>
             </a:pPr>
             <a:r>
-              <a:t>    while (leftIndex &lt; rightIndex) {</a:t>
+              <a:t>        when {</a:t>
             </a:r>
           </a:p>
           <a:p>
@@ -11801,7 +12064,7 @@
               </a:defRPr>
             </a:pPr>
             <a:r>
-              <a:t>        val currentSum = numbers[leftIndex] + numbers[rightIndex]</a:t>
+              <a:t>            currentSum == target -&gt; return intArrayOf(leftIndex + 1, rightIndex + 1) // O(1)</a:t>
             </a:r>
           </a:p>
           <a:p>
@@ -11813,6 +12076,9 @@
                 <a:latin typeface="Consolas"/>
               </a:defRPr>
             </a:pPr>
+            <a:r>
+              <a:t>            currentSum &lt; target -&gt; leftIndex++ // O(1)</a:t>
+            </a:r>
           </a:p>
           <a:p>
             <a:pPr algn="l">
@@ -11824,7 +12090,7 @@
               </a:defRPr>
             </a:pPr>
             <a:r>
-              <a:t>        when {</a:t>
+              <a:t>            else -&gt; rightIndex-- // O(1)</a:t>
             </a:r>
           </a:p>
           <a:p>
@@ -11837,7 +12103,7 @@
               </a:defRPr>
             </a:pPr>
             <a:r>
-              <a:t>            currentSum == target -&gt; {</a:t>
+              <a:t>        }</a:t>
             </a:r>
           </a:p>
           <a:p>
@@ -11850,7 +12116,7 @@
               </a:defRPr>
             </a:pPr>
             <a:r>
-              <a:t>                // مسئله ۱-محور است؛ ۱ واحد اضافه می‌کنیم</a:t>
+              <a:t>    }</a:t>
             </a:r>
           </a:p>
           <a:p>
@@ -11863,7 +12129,7 @@
               </a:defRPr>
             </a:pPr>
             <a:r>
-              <a:t>                return intArrayOf(leftIndex + 1, rightIndex + 1)</a:t>
+              <a:t>    return intArrayOf() // Time: O(1), Space: O(1)</a:t>
             </a:r>
           </a:p>
           <a:p>
@@ -11876,7 +12142,7 @@
               </a:defRPr>
             </a:pPr>
             <a:r>
-              <a:t>            }</a:t>
+              <a:t>}</a:t>
             </a:r>
           </a:p>
           <a:p>
@@ -11889,160 +12155,7 @@
               </a:defRPr>
             </a:pPr>
             <a:r>
-              <a:t>            currentSum &lt; target -&gt; {</a:t>
-            </a:r>
-          </a:p>
-          <a:p>
-            <a:pPr algn="l">
-              <a:defRPr sz="1100">
-                <a:solidFill>
-                  <a:srgbClr val="4ECCA3"/>
-                </a:solidFill>
-                <a:latin typeface="Consolas"/>
-              </a:defRPr>
-            </a:pPr>
-            <a:r>
-              <a:t>                // جمع کوچک است؛ حرکت به سمت اعداد بزرگ‌تر</a:t>
-            </a:r>
-          </a:p>
-          <a:p>
-            <a:pPr algn="l">
-              <a:defRPr sz="1100">
-                <a:solidFill>
-                  <a:srgbClr val="4ECCA3"/>
-                </a:solidFill>
-                <a:latin typeface="Consolas"/>
-              </a:defRPr>
-            </a:pPr>
-            <a:r>
-              <a:t>                leftIndex++</a:t>
-            </a:r>
-          </a:p>
-          <a:p>
-            <a:pPr algn="l">
-              <a:defRPr sz="1100">
-                <a:solidFill>
-                  <a:srgbClr val="4ECCA3"/>
-                </a:solidFill>
-                <a:latin typeface="Consolas"/>
-              </a:defRPr>
-            </a:pPr>
-            <a:r>
-              <a:t>            }</a:t>
-            </a:r>
-          </a:p>
-          <a:p>
-            <a:pPr algn="l">
-              <a:defRPr sz="1100">
-                <a:solidFill>
-                  <a:srgbClr val="4ECCA3"/>
-                </a:solidFill>
-                <a:latin typeface="Consolas"/>
-              </a:defRPr>
-            </a:pPr>
-            <a:r>
-              <a:t>            else -&gt; {</a:t>
-            </a:r>
-          </a:p>
-          <a:p>
-            <a:pPr algn="l">
-              <a:defRPr sz="1100">
-                <a:solidFill>
-                  <a:srgbClr val="4ECCA3"/>
-                </a:solidFill>
-                <a:latin typeface="Consolas"/>
-              </a:defRPr>
-            </a:pPr>
-            <a:r>
-              <a:t>                // جمع بزرگ است؛ حرکت به سمت اعداد کوچک‌تر</a:t>
-            </a:r>
-          </a:p>
-          <a:p>
-            <a:pPr algn="l">
-              <a:defRPr sz="1100">
-                <a:solidFill>
-                  <a:srgbClr val="4ECCA3"/>
-                </a:solidFill>
-                <a:latin typeface="Consolas"/>
-              </a:defRPr>
-            </a:pPr>
-            <a:r>
-              <a:t>                rightIndex--</a:t>
-            </a:r>
-          </a:p>
-          <a:p>
-            <a:pPr algn="l">
-              <a:defRPr sz="1100">
-                <a:solidFill>
-                  <a:srgbClr val="4ECCA3"/>
-                </a:solidFill>
-                <a:latin typeface="Consolas"/>
-              </a:defRPr>
-            </a:pPr>
-            <a:r>
-              <a:t>            }</a:t>
-            </a:r>
-          </a:p>
-          <a:p>
-            <a:pPr algn="l">
-              <a:defRPr sz="1100">
-                <a:solidFill>
-                  <a:srgbClr val="4ECCA3"/>
-                </a:solidFill>
-                <a:latin typeface="Consolas"/>
-              </a:defRPr>
-            </a:pPr>
-            <a:r>
-              <a:t>        }</a:t>
-            </a:r>
-          </a:p>
-          <a:p>
-            <a:pPr algn="l">
-              <a:defRPr sz="1100">
-                <a:solidFill>
-                  <a:srgbClr val="4ECCA3"/>
-                </a:solidFill>
-                <a:latin typeface="Consolas"/>
-              </a:defRPr>
-            </a:pPr>
-            <a:r>
-              <a:t>    }</a:t>
-            </a:r>
-          </a:p>
-          <a:p>
-            <a:pPr algn="l">
-              <a:defRPr sz="1100">
-                <a:solidFill>
-                  <a:srgbClr val="4ECCA3"/>
-                </a:solidFill>
-                <a:latin typeface="Consolas"/>
-              </a:defRPr>
-            </a:pPr>
-          </a:p>
-          <a:p>
-            <a:pPr algn="l">
-              <a:defRPr sz="1100">
-                <a:solidFill>
-                  <a:srgbClr val="4ECCA3"/>
-                </a:solidFill>
-                <a:latin typeface="Consolas"/>
-              </a:defRPr>
-            </a:pPr>
-            <a:r>
-              <a:t>    return intArrayOf()</a:t>
-            </a:r>
-          </a:p>
-          <a:p>
-            <a:pPr algn="l">
-              <a:defRPr sz="1100">
-                <a:solidFill>
-                  <a:srgbClr val="4ECCA3"/>
-                </a:solidFill>
-                <a:latin typeface="Consolas"/>
-              </a:defRPr>
-            </a:pPr>
-            <a:r>
-              <a:t>}</a:t>
+              <a:t>// Overall Time: O(n) | Auxiliary Space: O(1) | Overall Space: O(1)</a:t>
             </a:r>
           </a:p>
         </p:txBody>
@@ -12055,7 +12168,7 @@
         </p:nvSpPr>
         <p:spPr>
           <a:xfrm>
-            <a:off x="731520" y="4572000"/>
+            <a:off x="731520" y="4526280"/>
             <a:ext cx="10698480" cy="1463040"/>
           </a:xfrm>
           <a:prstGeom prst="rect">
@@ -12498,7 +12611,7 @@
         </p:nvSpPr>
         <p:spPr>
           <a:xfrm>
-            <a:off x="731520" y="3703320"/>
+            <a:off x="731520" y="3611880"/>
             <a:ext cx="10698480" cy="1463040"/>
           </a:xfrm>
           <a:prstGeom prst="rect">
@@ -13038,7 +13151,7 @@
         </p:nvSpPr>
         <p:spPr>
           <a:xfrm>
-            <a:off x="731520" y="3703320"/>
+            <a:off x="731520" y="3611880"/>
             <a:ext cx="5212080" cy="1645920"/>
           </a:xfrm>
           <a:prstGeom prst="roundRect">
@@ -13104,7 +13217,7 @@
         </p:nvSpPr>
         <p:spPr>
           <a:xfrm>
-            <a:off x="6217920" y="3703320"/>
+            <a:off x="6217920" y="3611880"/>
             <a:ext cx="5212080" cy="1645920"/>
           </a:xfrm>
           <a:prstGeom prst="roundRect">
@@ -13542,7 +13655,7 @@
         </p:nvSpPr>
         <p:spPr>
           <a:xfrm>
-            <a:off x="731520" y="3703320"/>
+            <a:off x="731520" y="3611880"/>
             <a:ext cx="5212080" cy="1645920"/>
           </a:xfrm>
           <a:prstGeom prst="roundRect">
@@ -13608,7 +13721,7 @@
         </p:nvSpPr>
         <p:spPr>
           <a:xfrm>
-            <a:off x="6217920" y="3703320"/>
+            <a:off x="6217920" y="3611880"/>
             <a:ext cx="5212080" cy="1645920"/>
           </a:xfrm>
           <a:prstGeom prst="roundRect">
@@ -14046,7 +14159,7 @@
         </p:nvSpPr>
         <p:spPr>
           <a:xfrm>
-            <a:off x="731520" y="3703320"/>
+            <a:off x="731520" y="3611880"/>
             <a:ext cx="10698480" cy="1463040"/>
           </a:xfrm>
           <a:prstGeom prst="rect">
@@ -14334,7 +14447,7 @@
               </a:defRPr>
             </a:pPr>
             <a:r>
-              <a:t>    val result = mutableListOf&lt;List&lt;Int&gt;&gt;()</a:t>
+              <a:t>    nums.sort() // Time: O(n log n), Space: O(1) auxiliary*</a:t>
             </a:r>
           </a:p>
           <a:p>
@@ -14347,7 +14460,7 @@
               </a:defRPr>
             </a:pPr>
             <a:r>
-              <a:t>    nums.sort() // مرتب‌سازی O(n log n)</a:t>
+              <a:t>    val triplets = mutableListOf&lt;List&lt;Int&gt;&gt;() // Space: O(k) output</a:t>
             </a:r>
           </a:p>
           <a:p>
@@ -14359,6 +14472,9 @@
                 <a:latin typeface="Consolas"/>
               </a:defRPr>
             </a:pPr>
+            <a:r>
+              <a:t>    for (firstIndex in 0 until nums.size - 2) { // O(n) iterations</a:t>
+            </a:r>
           </a:p>
           <a:p>
             <a:pPr algn="l">
@@ -14370,7 +14486,7 @@
               </a:defRPr>
             </a:pPr>
             <a:r>
-              <a:t>    for (i in 0 until nums.size - 2) {</a:t>
+              <a:t>        if (nums[firstIndex] &gt; 0) break // Early exit: sum &gt; 0</a:t>
             </a:r>
           </a:p>
           <a:p>
@@ -14383,7 +14499,7 @@
               </a:defRPr>
             </a:pPr>
             <a:r>
-              <a:t>        val firstNum = nums[i]</a:t>
+              <a:t>        if (firstIndex &gt; 0 &amp;&amp; nums[firstIndex] == nums[firstIndex - 1]) continue // O(1)</a:t>
             </a:r>
           </a:p>
           <a:p>
@@ -14396,7 +14512,7 @@
               </a:defRPr>
             </a:pPr>
             <a:r>
-              <a:t>        if (firstNum &gt; 0) break // توقف زودهنگام</a:t>
+              <a:t>        val targetSum = -nums[firstIndex] // O(1)</a:t>
             </a:r>
           </a:p>
           <a:p>
@@ -14409,7 +14525,7 @@
               </a:defRPr>
             </a:pPr>
             <a:r>
-              <a:t>        if (i &gt; 0 &amp;&amp; firstNum == nums[i - 1]) continue // پرش تکراری بیرونی</a:t>
+              <a:t>        var left = firstIndex + 1; var right = nums.size - 1</a:t>
             </a:r>
           </a:p>
           <a:p>
@@ -14421,6 +14537,9 @@
                 <a:latin typeface="Consolas"/>
               </a:defRPr>
             </a:pPr>
+            <a:r>
+              <a:t>        while (left &lt; right) { // O(n) per outer loop</a:t>
+            </a:r>
           </a:p>
           <a:p>
             <a:pPr algn="l">
@@ -14432,7 +14551,7 @@
               </a:defRPr>
             </a:pPr>
             <a:r>
-              <a:t>        var leftIndex = i + 1</a:t>
+              <a:t>            val pairSum = nums[left] + nums[right] // O(1)</a:t>
             </a:r>
           </a:p>
           <a:p>
@@ -14445,7 +14564,7 @@
               </a:defRPr>
             </a:pPr>
             <a:r>
-              <a:t>        var rightIndex = nums.size - 1</a:t>
+              <a:t>            when {</a:t>
             </a:r>
           </a:p>
           <a:p>
@@ -14457,6 +14576,9 @@
                 <a:latin typeface="Consolas"/>
               </a:defRPr>
             </a:pPr>
+            <a:r>
+              <a:t>                pairSum == targetSum -&gt; {</a:t>
+            </a:r>
           </a:p>
           <a:p>
             <a:pPr algn="l">
@@ -14468,7 +14590,7 @@
               </a:defRPr>
             </a:pPr>
             <a:r>
-              <a:t>        while (leftIndex &lt; rightIndex) {</a:t>
+              <a:t>                    triplets.add(listOf(nums[firstIndex], nums[left], nums[right])) // O(1)</a:t>
             </a:r>
           </a:p>
           <a:p>
@@ -14481,7 +14603,7 @@
               </a:defRPr>
             </a:pPr>
             <a:r>
-              <a:t>            val currentSum = firstNum + nums[leftIndex] + nums[rightIndex]</a:t>
+              <a:t>                    while (left &lt; right &amp;&amp; nums[left] == nums[left + 1]) left++ // O(n) scan</a:t>
             </a:r>
           </a:p>
           <a:p>
@@ -14494,7 +14616,7 @@
               </a:defRPr>
             </a:pPr>
             <a:r>
-              <a:t>            when {</a:t>
+              <a:t>                    while (left &lt; right &amp;&amp; nums[right] == nums[right - 1]) right-- // O(n) scan</a:t>
             </a:r>
           </a:p>
           <a:p>
@@ -14507,7 +14629,7 @@
               </a:defRPr>
             </a:pPr>
             <a:r>
-              <a:t>                currentSum == 0 -&gt; {</a:t>
+              <a:t>                    left++; right-- // O(1)</a:t>
             </a:r>
           </a:p>
           <a:p>
@@ -14520,7 +14642,7 @@
               </a:defRPr>
             </a:pPr>
             <a:r>
-              <a:t>                    result.add(listOf(firstNum, nums[leftIndex], nums[rightIndex]))</a:t>
+              <a:t>                }</a:t>
             </a:r>
           </a:p>
           <a:p>
@@ -14533,7 +14655,7 @@
               </a:defRPr>
             </a:pPr>
             <a:r>
-              <a:t>                    while (leftIndex &lt; rightIndex &amp;&amp; nums[leftIndex] == nums[leftIndex + 1]) leftIndex++</a:t>
+              <a:t>                pairSum &lt; targetSum -&gt; left++ // O(1)</a:t>
             </a:r>
           </a:p>
           <a:p>
@@ -14546,7 +14668,7 @@
               </a:defRPr>
             </a:pPr>
             <a:r>
-              <a:t>                    while (leftIndex &lt; rightIndex &amp;&amp; nums[rightIndex] == nums[rightIndex - 1]) rightIndex--</a:t>
+              <a:t>                else -&gt; right-- // O(1)</a:t>
             </a:r>
           </a:p>
           <a:p>
@@ -14559,7 +14681,7 @@
               </a:defRPr>
             </a:pPr>
             <a:r>
-              <a:t>                    leftIndex++</a:t>
+              <a:t>            }</a:t>
             </a:r>
           </a:p>
           <a:p>
@@ -14572,7 +14694,7 @@
               </a:defRPr>
             </a:pPr>
             <a:r>
-              <a:t>                    rightIndex--</a:t>
+              <a:t>        }</a:t>
             </a:r>
           </a:p>
           <a:p>
@@ -14585,7 +14707,7 @@
               </a:defRPr>
             </a:pPr>
             <a:r>
-              <a:t>                }</a:t>
+              <a:t>    }</a:t>
             </a:r>
           </a:p>
           <a:p>
@@ -14598,7 +14720,7 @@
               </a:defRPr>
             </a:pPr>
             <a:r>
-              <a:t>                currentSum &lt; 0 -&gt; leftIndex++</a:t>
+              <a:t>    return triplets // O(1)</a:t>
             </a:r>
           </a:p>
           <a:p>
@@ -14611,7 +14733,7 @@
               </a:defRPr>
             </a:pPr>
             <a:r>
-              <a:t>                else -&gt; rightIndex--</a:t>
+              <a:t>}</a:t>
             </a:r>
           </a:p>
           <a:p>
@@ -14624,59 +14746,7 @@
               </a:defRPr>
             </a:pPr>
             <a:r>
-              <a:t>            }</a:t>
-            </a:r>
-          </a:p>
-          <a:p>
-            <a:pPr algn="l">
-              <a:defRPr sz="1100">
-                <a:solidFill>
-                  <a:srgbClr val="4ECCA3"/>
-                </a:solidFill>
-                <a:latin typeface="Consolas"/>
-              </a:defRPr>
-            </a:pPr>
-            <a:r>
-              <a:t>        }</a:t>
-            </a:r>
-          </a:p>
-          <a:p>
-            <a:pPr algn="l">
-              <a:defRPr sz="1100">
-                <a:solidFill>
-                  <a:srgbClr val="4ECCA3"/>
-                </a:solidFill>
-                <a:latin typeface="Consolas"/>
-              </a:defRPr>
-            </a:pPr>
-            <a:r>
-              <a:t>    }</a:t>
-            </a:r>
-          </a:p>
-          <a:p>
-            <a:pPr algn="l">
-              <a:defRPr sz="1100">
-                <a:solidFill>
-                  <a:srgbClr val="4ECCA3"/>
-                </a:solidFill>
-                <a:latin typeface="Consolas"/>
-              </a:defRPr>
-            </a:pPr>
-            <a:r>
-              <a:t>    return result</a:t>
-            </a:r>
-          </a:p>
-          <a:p>
-            <a:pPr algn="l">
-              <a:defRPr sz="1100">
-                <a:solidFill>
-                  <a:srgbClr val="4ECCA3"/>
-                </a:solidFill>
-                <a:latin typeface="Consolas"/>
-              </a:defRPr>
-            </a:pPr>
-            <a:r>
-              <a:t>}</a:t>
+              <a:t>// Overall Time: O(n²) | Auxiliary Space: O(log n) | Output Space: O(k) | Overall Space: O(n + k)</a:t>
             </a:r>
           </a:p>
         </p:txBody>
@@ -14689,7 +14759,7 @@
         </p:nvSpPr>
         <p:spPr>
           <a:xfrm>
-            <a:off x="731520" y="4572000"/>
+            <a:off x="731520" y="4526280"/>
             <a:ext cx="10698480" cy="1463040"/>
           </a:xfrm>
           <a:prstGeom prst="rect">
@@ -15132,7 +15202,7 @@
         </p:nvSpPr>
         <p:spPr>
           <a:xfrm>
-            <a:off x="731520" y="3703320"/>
+            <a:off x="731520" y="3611880"/>
             <a:ext cx="10698480" cy="1463040"/>
           </a:xfrm>
           <a:prstGeom prst="rect">
@@ -15383,7 +15453,7 @@
               </a:defRPr>
             </a:pPr>
             <a:r>
-              <a:t>🚀 چالش پروداکشن · REAL-WORLD  |  مطالعه موردی در پروداکشن: چالش CardStack در سپینو</a:t>
+              <a:t>🌊 مسئله چهارم · TWO POINTERS GREEDY  |  مسئله چهارم: ظرف با بیشترین آب (LeetCode #11)</a:t>
             </a:r>
           </a:p>
           <a:p>
@@ -15395,7 +15465,7 @@
               </a:defRPr>
             </a:pPr>
             <a:r>
-              <a:t>الگوریتم‌ها فقط برای مصاحبه نیستند؛ انتخاب درست داده ضامن روانی رابط کاربری است:</a:t>
+              <a:t>یافتن دو خط عمودی با بیشترین حجم آب محصورشده | LeetCode 75</a:t>
             </a:r>
           </a:p>
         </p:txBody>
@@ -15409,7 +15479,73 @@
         <p:spPr>
           <a:xfrm>
             <a:off x="731520" y="1463040"/>
-            <a:ext cx="5234940" cy="2011680"/>
+            <a:ext cx="2503170" cy="2011680"/>
+          </a:xfrm>
+          <a:prstGeom prst="roundRect">
+            <a:avLst/>
+          </a:prstGeom>
+          <a:solidFill>
+            <a:srgbClr val="141428"/>
+          </a:solidFill>
+          <a:ln w="27940">
+            <a:solidFill>
+              <a:srgbClr val="4ECCA3"/>
+            </a:solidFill>
+          </a:ln>
+        </p:spPr>
+        <p:style>
+          <a:lnRef idx="1">
+            <a:schemeClr val="accent1"/>
+          </a:lnRef>
+          <a:fillRef idx="3">
+            <a:schemeClr val="accent1"/>
+          </a:fillRef>
+          <a:effectRef idx="2">
+            <a:schemeClr val="accent1"/>
+          </a:effectRef>
+          <a:fontRef idx="minor">
+            <a:schemeClr val="lt1"/>
+          </a:fontRef>
+        </p:style>
+        <p:txBody>
+          <a:bodyPr rtlCol="0" anchor="ctr" wrap="square"/>
+          <a:lstStyle/>
+          <a:p>
+            <a:pPr algn="ctr">
+              <a:defRPr sz="1400" b="1">
+                <a:solidFill>
+                  <a:srgbClr val="4ECCA3"/>
+                </a:solidFill>
+              </a:defRPr>
+            </a:pPr>
+            <a:r>
+              <a:t>۱. عامل محدودکننده ارتفاع</a:t>
+            </a:r>
+          </a:p>
+          <a:p>
+            <a:pPr>
+              <a:defRPr sz="1100">
+                <a:solidFill>
+                  <a:srgbClr val="DDE1F5"/>
+                </a:solidFill>
+              </a:defRPr>
+            </a:pPr>
+            <a:r>
+              <a:t>آب از دیواره کوتاه‌تر سرریز می‌کند؛ ارتفاع موثر منحصراً با min(hL, hR) تعیین می‌شود.</a:t>
+            </a:r>
+          </a:p>
+        </p:txBody>
+      </p:sp>
+      <p:sp>
+        <p:nvSpPr>
+          <p:cNvPr id="6" name="Rounded Rectangle 5"/>
+          <p:cNvSpPr/>
+          <p:nvPr/>
+        </p:nvSpPr>
+        <p:spPr>
+          <a:xfrm>
+            <a:off x="3463289" y="1463040"/>
+            <a:ext cx="2503170" cy="2011680"/>
           </a:xfrm>
           <a:prstGeom prst="roundRect">
             <a:avLst/>
@@ -15449,7 +15585,7 @@
               </a:defRPr>
             </a:pPr>
             <a:r>
-              <a:t>۱. داده‌های ورودی</a:t>
+              <a:t>۲. معضل کاهش پیوسته عرض</a:t>
             </a:r>
           </a:p>
           <a:p>
@@ -15461,21 +15597,21 @@
               </a:defRPr>
             </a:pPr>
             <a:r>
-              <a:t>دو لیست currentItems (در حال نمایش) و newCardsList (تازه از سرور).</a:t>
-            </a:r>
-          </a:p>
-        </p:txBody>
-      </p:sp>
-      <p:sp>
-        <p:nvSpPr>
-          <p:cNvPr id="6" name="Rounded Rectangle 5"/>
+              <a:t>با نزدیک شدن نشانگرها عرض (R - L) کم می‌شود؛ تنها راه جبران، یافتن دیوارهای بلندتر است.</a:t>
+            </a:r>
+          </a:p>
+        </p:txBody>
+      </p:sp>
+      <p:sp>
+        <p:nvSpPr>
+          <p:cNvPr id="7" name="Rounded Rectangle 6"/>
           <p:cNvSpPr/>
           <p:nvPr/>
         </p:nvSpPr>
         <p:spPr>
           <a:xfrm>
             <a:off x="6195059" y="1463040"/>
-            <a:ext cx="5234940" cy="2011680"/>
+            <a:ext cx="2503170" cy="2011680"/>
           </a:xfrm>
           <a:prstGeom prst="roundRect">
             <a:avLst/>
@@ -15485,7 +15621,7 @@
           </a:solidFill>
           <a:ln w="27940">
             <a:solidFill>
-              <a:srgbClr val="4ECCA3"/>
+              <a:srgbClr val="E96C6C"/>
             </a:solidFill>
           </a:ln>
         </p:spPr>
@@ -15510,12 +15646,12 @@
             <a:pPr algn="ctr">
               <a:defRPr sz="1400" b="1">
                 <a:solidFill>
-                  <a:srgbClr val="4ECCA3"/>
-                </a:solidFill>
-              </a:defRPr>
-            </a:pPr>
-            <a:r>
-              <a:t>۲. رفتار مورد انتظار</a:t>
+                  <a:srgbClr val="E96C6C"/>
+                </a:solidFill>
+              </a:defRPr>
+            </a:pPr>
+            <a:r>
+              <a:t>۳. مقیاس بزرگ ورودی (10⁵)</a:t>
             </a:r>
           </a:p>
           <a:p>
@@ -15527,54 +15663,7 @@
               </a:defRPr>
             </a:pPr>
             <a:r>
-              <a:t>حفظ کارت‌های مشترک بدون فلیکر، حذف قدیمی‌ها، و اضافه کردن جدیدها به انتها.</a:t>
-            </a:r>
-          </a:p>
-        </p:txBody>
-      </p:sp>
-      <p:sp>
-        <p:nvSpPr>
-          <p:cNvPr id="7" name="TextBox 6"/>
-          <p:cNvSpPr txBox="1"/>
-          <p:nvPr/>
-        </p:nvSpPr>
-        <p:spPr>
-          <a:xfrm>
-            <a:off x="731520" y="3703320"/>
-            <a:ext cx="10698480" cy="1463040"/>
-          </a:xfrm>
-          <a:prstGeom prst="rect">
-            <a:avLst/>
-          </a:prstGeom>
-          <a:noFill/>
-        </p:spPr>
-        <p:txBody>
-          <a:bodyPr wrap="square">
-            <a:spAutoFit/>
-          </a:bodyPr>
-          <a:lstStyle/>
-          <a:p>
-            <a:pPr>
-              <a:defRPr sz="1300">
-                <a:solidFill>
-                  <a:srgbClr val="DDE1F5"/>
-                </a:solidFill>
-              </a:defRPr>
-            </a:pPr>
-            <a:r>
-              <a:t>• چالش در کامپوز: پاک‌کردن و ساخت مجدد لیست باعث Recomposition سنگین و نابودی انیمیشن کارت‌ها (Jank) می‌شود.</a:t>
-            </a:r>
-          </a:p>
-          <a:p>
-            <a:pPr>
-              <a:defRPr sz="1300">
-                <a:solidFill>
-                  <a:srgbClr val="DDE1F5"/>
-                </a:solidFill>
-              </a:defRPr>
-            </a:pPr>
-            <a:r>
-              <a:t>• نیاز به تابع خالص: پیاده‌سازی syncCardStackState برای هماهنگ‌سازی بهینه پشته کارت‌ها.</a:t>
+              <a:t>طول آرایه تا ۱۰۰ هزار است؛ پس الگوریتم O(n²) با ۵ میلیارد عملیات قطعاً TLE می‌دهد.</a:t>
             </a:r>
           </a:p>
         </p:txBody>
@@ -15587,18 +15676,18 @@
         </p:nvSpPr>
         <p:spPr>
           <a:xfrm>
-            <a:off x="731520" y="5486400"/>
-            <a:ext cx="10698480" cy="822960"/>
+            <a:off x="8926830" y="1463040"/>
+            <a:ext cx="2503170" cy="2011680"/>
           </a:xfrm>
           <a:prstGeom prst="roundRect">
             <a:avLst/>
           </a:prstGeom>
           <a:solidFill>
-            <a:srgbClr val="1C1C38"/>
+            <a:srgbClr val="141428"/>
           </a:solidFill>
-          <a:ln w="12700">
+          <a:ln w="27940">
             <a:solidFill>
-              <a:srgbClr val="7C8FF5"/>
+              <a:srgbClr val="38BDF8"/>
             </a:solidFill>
           </a:ln>
         </p:spPr>
@@ -15621,14 +15710,158 @@
           <a:lstStyle/>
           <a:p>
             <a:pPr algn="ctr">
-              <a:defRPr sz="1200" i="1">
-                <a:solidFill>
-                  <a:srgbClr val="7C8FF5"/>
-                </a:solidFill>
-              </a:defRPr>
-            </a:pPr>
-            <a:r>
-              <a:t>«تفاوت مهندس ارشد با کدنویس معمولی در توانایی شناسایی پیچیدگی الگوریتمی کدهای به ظاهر ساده کاتلین است.»</a:t>
+              <a:defRPr sz="1400" b="1">
+                <a:solidFill>
+                  <a:srgbClr val="38BDF8"/>
+                </a:solidFill>
+              </a:defRPr>
+            </a:pPr>
+            <a:r>
+              <a:t>۴. قید حافظه O(1) کمکی</a:t>
+            </a:r>
+          </a:p>
+          <a:p>
+            <a:pPr>
+              <a:defRPr sz="1100">
+                <a:solidFill>
+                  <a:srgbClr val="DDE1F5"/>
+                </a:solidFill>
+              </a:defRPr>
+            </a:pPr>
+            <a:r>
+              <a:t>حل کامل مسئله تنها با دو نشانگر همگرا روی پشته، بدون حتی یک بایت حافظه اضافه.</a:t>
+            </a:r>
+          </a:p>
+        </p:txBody>
+      </p:sp>
+      <p:sp>
+        <p:nvSpPr>
+          <p:cNvPr id="9" name="Rounded Rectangle 8"/>
+          <p:cNvSpPr/>
+          <p:nvPr/>
+        </p:nvSpPr>
+        <p:spPr>
+          <a:xfrm>
+            <a:off x="731520" y="3611880"/>
+            <a:ext cx="5212080" cy="1645920"/>
+          </a:xfrm>
+          <a:prstGeom prst="roundRect">
+            <a:avLst/>
+          </a:prstGeom>
+          <a:solidFill>
+            <a:srgbClr val="231216"/>
+          </a:solidFill>
+          <a:ln>
+            <a:solidFill>
+              <a:srgbClr val="E96C6C"/>
+            </a:solidFill>
+          </a:ln>
+        </p:spPr>
+        <p:style>
+          <a:lnRef idx="1">
+            <a:schemeClr val="accent1"/>
+          </a:lnRef>
+          <a:fillRef idx="3">
+            <a:schemeClr val="accent1"/>
+          </a:fillRef>
+          <a:effectRef idx="2">
+            <a:schemeClr val="accent1"/>
+          </a:effectRef>
+          <a:fontRef idx="minor">
+            <a:schemeClr val="lt1"/>
+          </a:fontRef>
+        </p:style>
+        <p:txBody>
+          <a:bodyPr rtlCol="0" anchor="ctr" wrap="square"/>
+          <a:lstStyle/>
+          <a:p>
+            <a:pPr algn="ctr">
+              <a:defRPr sz="1300" b="1">
+                <a:solidFill>
+                  <a:srgbClr val="E96C6C"/>
+                </a:solidFill>
+              </a:defRPr>
+            </a:pPr>
+            <a:r>
+              <a:t>⚠️ تله رایج مصاحبه</a:t>
+            </a:r>
+          </a:p>
+          <a:p>
+            <a:pPr>
+              <a:defRPr sz="1100">
+                <a:solidFill>
+                  <a:srgbClr val="DDE1F5"/>
+                </a:solidFill>
+              </a:defRPr>
+            </a:pPr>
+            <a:r>
+              <a:t>سورت کردن آرایه باعث نابودی اندیس‌ها و عرض هندسی بین دیوارها می‌شود! نباید آرایه را مرتب کرد.</a:t>
+            </a:r>
+          </a:p>
+        </p:txBody>
+      </p:sp>
+      <p:sp>
+        <p:nvSpPr>
+          <p:cNvPr id="10" name="Rounded Rectangle 9"/>
+          <p:cNvSpPr/>
+          <p:nvPr/>
+        </p:nvSpPr>
+        <p:spPr>
+          <a:xfrm>
+            <a:off x="6217920" y="3611880"/>
+            <a:ext cx="5212080" cy="1645920"/>
+          </a:xfrm>
+          <a:prstGeom prst="roundRect">
+            <a:avLst/>
+          </a:prstGeom>
+          <a:solidFill>
+            <a:srgbClr val="10231E"/>
+          </a:solidFill>
+          <a:ln>
+            <a:solidFill>
+              <a:srgbClr val="4ECCA3"/>
+            </a:solidFill>
+          </a:ln>
+        </p:spPr>
+        <p:style>
+          <a:lnRef idx="1">
+            <a:schemeClr val="accent1"/>
+          </a:lnRef>
+          <a:fillRef idx="3">
+            <a:schemeClr val="accent1"/>
+          </a:fillRef>
+          <a:effectRef idx="2">
+            <a:schemeClr val="accent1"/>
+          </a:effectRef>
+          <a:fontRef idx="minor">
+            <a:schemeClr val="lt1"/>
+          </a:fontRef>
+        </p:style>
+        <p:txBody>
+          <a:bodyPr rtlCol="0" anchor="ctr" wrap="square"/>
+          <a:lstStyle/>
+          <a:p>
+            <a:pPr algn="ctr">
+              <a:defRPr sz="1300" b="1">
+                <a:solidFill>
+                  <a:srgbClr val="4ECCA3"/>
+                </a:solidFill>
+              </a:defRPr>
+            </a:pPr>
+            <a:r>
+              <a:t>✅ تفکر حریصانه (Greedy Choice)</a:t>
+            </a:r>
+          </a:p>
+          <a:p>
+            <a:pPr>
+              <a:defRPr sz="1100">
+                <a:solidFill>
+                  <a:srgbClr val="DDE1F5"/>
+                </a:solidFill>
+              </a:defRPr>
+            </a:pPr>
+            <a:r>
+              <a:t>در هر گام با اثبات ریاضی نشانگر ستون کوتاه‌تر را حرکت می‌دهیم تا شانس کشف ارتفاع بلندتر حفظ شود.</a:t>
             </a:r>
           </a:p>
         </p:txBody>
@@ -16150,7 +16383,7 @@
               </a:defRPr>
             </a:pPr>
             <a:r>
-              <a:t>کد غیربهینه · BRUTE FORCE O(N²)  |  راه‌حل اول (غیربهینه): فیلتر مستقیم روی List</a:t>
+              <a:t>روش غیربهینه · O(n²) TLE  |  راه‌حل ساده و غیربهینه: بررسی تمام جفت‌ها با Brute Force O(n²)</a:t>
             </a:r>
           </a:p>
           <a:p>
@@ -16162,7 +16395,7 @@
               </a:defRPr>
             </a:pPr>
             <a:r>
-              <a:t>استفاده فریبنده از ابزارهای اعلانی کاتلین بدون توجه به پیچیدگی زیر کاپوت:</a:t>
+              <a:t>چرا تست تمام جفت‌های دو دیواره در مقیاس ۱۰⁵ به شکست قطعی می‌انجامد؟ | LeetCode #11</a:t>
             </a:r>
           </a:p>
         </p:txBody>
@@ -16176,7 +16409,139 @@
         <p:spPr>
           <a:xfrm>
             <a:off x="731520" y="1463040"/>
-            <a:ext cx="3413759" cy="2011680"/>
+            <a:ext cx="2503170" cy="1325880"/>
+          </a:xfrm>
+          <a:prstGeom prst="roundRect">
+            <a:avLst/>
+          </a:prstGeom>
+          <a:solidFill>
+            <a:srgbClr val="141428"/>
+          </a:solidFill>
+          <a:ln w="19050">
+            <a:solidFill>
+              <a:srgbClr val="E96C6C"/>
+            </a:solidFill>
+          </a:ln>
+        </p:spPr>
+        <p:style>
+          <a:lnRef idx="1">
+            <a:schemeClr val="accent1"/>
+          </a:lnRef>
+          <a:fillRef idx="3">
+            <a:schemeClr val="accent1"/>
+          </a:fillRef>
+          <a:effectRef idx="2">
+            <a:schemeClr val="accent1"/>
+          </a:effectRef>
+          <a:fontRef idx="minor">
+            <a:schemeClr val="lt1"/>
+          </a:fontRef>
+        </p:style>
+        <p:txBody>
+          <a:bodyPr rtlCol="0" anchor="ctr" wrap="square"/>
+          <a:lstStyle/>
+          <a:p>
+            <a:pPr algn="ctr">
+              <a:defRPr sz="1250" b="1">
+                <a:solidFill>
+                  <a:srgbClr val="E96C6C"/>
+                </a:solidFill>
+              </a:defRPr>
+            </a:pPr>
+            <a:r>
+              <a:t>۱. انفجار محاسباتی شدید</a:t>
+            </a:r>
+          </a:p>
+          <a:p>
+            <a:pPr>
+              <a:defRPr sz="950">
+                <a:solidFill>
+                  <a:srgbClr val="DDE1F5"/>
+                </a:solidFill>
+              </a:defRPr>
+            </a:pPr>
+            <a:r>
+              <a:t>برای n=100,000 تعداد جفت‌ها n(n-1)/2 یعنی ۵ میلیارد عملیات است که ۵۰ ثانیه طول می‌کشد!</a:t>
+            </a:r>
+          </a:p>
+        </p:txBody>
+      </p:sp>
+      <p:sp>
+        <p:nvSpPr>
+          <p:cNvPr id="5" name="Rounded Rectangle 4"/>
+          <p:cNvSpPr/>
+          <p:nvPr/>
+        </p:nvSpPr>
+        <p:spPr>
+          <a:xfrm>
+            <a:off x="3463289" y="1463040"/>
+            <a:ext cx="2503170" cy="1325880"/>
+          </a:xfrm>
+          <a:prstGeom prst="roundRect">
+            <a:avLst/>
+          </a:prstGeom>
+          <a:solidFill>
+            <a:srgbClr val="141428"/>
+          </a:solidFill>
+          <a:ln w="19050">
+            <a:solidFill>
+              <a:srgbClr val="7C8FF5"/>
+            </a:solidFill>
+          </a:ln>
+        </p:spPr>
+        <p:style>
+          <a:lnRef idx="1">
+            <a:schemeClr val="accent1"/>
+          </a:lnRef>
+          <a:fillRef idx="3">
+            <a:schemeClr val="accent1"/>
+          </a:fillRef>
+          <a:effectRef idx="2">
+            <a:schemeClr val="accent1"/>
+          </a:effectRef>
+          <a:fontRef idx="minor">
+            <a:schemeClr val="lt1"/>
+          </a:fontRef>
+        </p:style>
+        <p:txBody>
+          <a:bodyPr rtlCol="0" anchor="ctr" wrap="square"/>
+          <a:lstStyle/>
+          <a:p>
+            <a:pPr algn="ctr">
+              <a:defRPr sz="1250" b="1">
+                <a:solidFill>
+                  <a:srgbClr val="7C8FF5"/>
+                </a:solidFill>
+              </a:defRPr>
+            </a:pPr>
+            <a:r>
+              <a:t>۲. خطای Time Limit Exceeded</a:t>
+            </a:r>
+          </a:p>
+          <a:p>
+            <a:pPr>
+              <a:defRPr sz="950">
+                <a:solidFill>
+                  <a:srgbClr val="DDE1F5"/>
+                </a:solidFill>
+              </a:defRPr>
+            </a:pPr>
+            <a:r>
+              <a:t>سقف زمانی لیت‌کد حدود ۱ ثانیه (۱۰⁸ عملیات) است؛ این روش در اولین تست‌کیس‌های حجیم رد می‌شود.</a:t>
+            </a:r>
+          </a:p>
+        </p:txBody>
+      </p:sp>
+      <p:sp>
+        <p:nvSpPr>
+          <p:cNvPr id="6" name="Rounded Rectangle 5"/>
+          <p:cNvSpPr/>
+          <p:nvPr/>
+        </p:nvSpPr>
+        <p:spPr>
+          <a:xfrm>
+            <a:off x="6195059" y="1463040"/>
+            <a:ext cx="2503170" cy="1325880"/>
           </a:xfrm>
           <a:prstGeom prst="roundRect">
             <a:avLst/>
@@ -16209,40 +16574,40 @@
           <a:lstStyle/>
           <a:p>
             <a:pPr algn="ctr">
-              <a:defRPr sz="1400" b="1">
+              <a:defRPr sz="1250" b="1">
                 <a:solidFill>
                   <a:srgbClr val="E9A84C"/>
                 </a:solidFill>
               </a:defRPr>
             </a:pPr>
             <a:r>
-              <a:t>ظاهر فریبنده کاتلین</a:t>
-            </a:r>
-          </a:p>
-          <a:p>
-            <a:pPr>
-              <a:defRPr sz="1100">
+              <a:t>۳. محاسبات هرز و بیهوده</a:t>
+            </a:r>
+          </a:p>
+          <a:p>
+            <a:pPr>
+              <a:defRPr sz="950">
                 <a:solidFill>
                   <a:srgbClr val="DDE1F5"/>
                 </a:solidFill>
               </a:defRPr>
             </a:pPr>
             <a:r>
-              <a:t>کد فقط ۲ خط و بسیار خواناست و تست‌های کوچک را به راحتی پاس می‌کند.</a:t>
-            </a:r>
-          </a:p>
-        </p:txBody>
-      </p:sp>
-      <p:sp>
-        <p:nvSpPr>
-          <p:cNvPr id="5" name="Rounded Rectangle 4"/>
+              <a:t>بروت‌فورس جفت‌هایی را تست می‌کند که از نظر هندسی غیرممکن است مساحت بزرگ‌تری بسازند.</a:t>
+            </a:r>
+          </a:p>
+        </p:txBody>
+      </p:sp>
+      <p:sp>
+        <p:nvSpPr>
+          <p:cNvPr id="7" name="Rounded Rectangle 6"/>
           <p:cNvSpPr/>
           <p:nvPr/>
         </p:nvSpPr>
         <p:spPr>
           <a:xfrm>
-            <a:off x="4373880" y="1463040"/>
-            <a:ext cx="3413759" cy="2011680"/>
+            <a:off x="8926830" y="1463040"/>
+            <a:ext cx="2503170" cy="1325880"/>
           </a:xfrm>
           <a:prstGeom prst="roundRect">
             <a:avLst/>
@@ -16252,7 +16617,7 @@
           </a:solidFill>
           <a:ln w="19050">
             <a:solidFill>
-              <a:srgbClr val="E96C6C"/>
+              <a:srgbClr val="4ECCA3"/>
             </a:solidFill>
           </a:ln>
         </p:spPr>
@@ -16275,106 +16640,40 @@
           <a:lstStyle/>
           <a:p>
             <a:pPr algn="ctr">
-              <a:defRPr sz="1400" b="1">
-                <a:solidFill>
-                  <a:srgbClr val="E96C6C"/>
-                </a:solidFill>
-              </a:defRPr>
-            </a:pPr>
-            <a:r>
-              <a:t>زیر کاپوت عملگر in</a:t>
-            </a:r>
-          </a:p>
-          <a:p>
-            <a:pPr>
-              <a:defRPr sz="1100">
+              <a:defRPr sz="1250" b="1">
+                <a:solidFill>
+                  <a:srgbClr val="4ECCA3"/>
+                </a:solidFill>
+              </a:defRPr>
+            </a:pPr>
+            <a:r>
+              <a:t>۴. راه نجات: دو نشانگر</a:t>
+            </a:r>
+          </a:p>
+          <a:p>
+            <a:pPr>
+              <a:defRPr sz="950">
                 <a:solidFill>
                   <a:srgbClr val="DDE1F5"/>
                 </a:solidFill>
               </a:defRPr>
             </a:pPr>
             <a:r>
-              <a:t>در List، عملگر in معادل contains() با پیمایش خطی O(M) است.</a:t>
-            </a:r>
-          </a:p>
-        </p:txBody>
-      </p:sp>
-      <p:sp>
-        <p:nvSpPr>
-          <p:cNvPr id="6" name="Rounded Rectangle 5"/>
+              <a:t>شروع از دورترین فاصله و همگرایی هدفمند در زمان خطی O(n) بدون محاسبات زائد.</a:t>
+            </a:r>
+          </a:p>
+        </p:txBody>
+      </p:sp>
+      <p:sp>
+        <p:nvSpPr>
+          <p:cNvPr id="8" name="Rounded Rectangle 7"/>
           <p:cNvSpPr/>
           <p:nvPr/>
         </p:nvSpPr>
         <p:spPr>
           <a:xfrm>
-            <a:off x="8016239" y="1463040"/>
-            <a:ext cx="3413759" cy="2011680"/>
-          </a:xfrm>
-          <a:prstGeom prst="roundRect">
-            <a:avLst/>
-          </a:prstGeom>
-          <a:solidFill>
-            <a:srgbClr val="141428"/>
-          </a:solidFill>
-          <a:ln w="19050">
-            <a:solidFill>
-              <a:srgbClr val="E96C6C"/>
-            </a:solidFill>
-          </a:ln>
-        </p:spPr>
-        <p:style>
-          <a:lnRef idx="1">
-            <a:schemeClr val="accent1"/>
-          </a:lnRef>
-          <a:fillRef idx="3">
-            <a:schemeClr val="accent1"/>
-          </a:fillRef>
-          <a:effectRef idx="2">
-            <a:schemeClr val="accent1"/>
-          </a:effectRef>
-          <a:fontRef idx="minor">
-            <a:schemeClr val="lt1"/>
-          </a:fontRef>
-        </p:style>
-        <p:txBody>
-          <a:bodyPr rtlCol="0" anchor="ctr" wrap="square"/>
-          <a:lstStyle/>
-          <a:p>
-            <a:pPr algn="ctr">
-              <a:defRPr sz="1400" b="1">
-                <a:solidFill>
-                  <a:srgbClr val="E96C6C"/>
-                </a:solidFill>
-              </a:defRPr>
-            </a:pPr>
-            <a:r>
-              <a:t>پیچیدگی نمایی</a:t>
-            </a:r>
-          </a:p>
-          <a:p>
-            <a:pPr>
-              <a:defRPr sz="1100">
-                <a:solidFill>
-                  <a:srgbClr val="DDE1F5"/>
-                </a:solidFill>
-              </a:defRPr>
-            </a:pPr>
-            <a:r>
-              <a:t>برای دو لیست با اندازه N و M، کل مقایسه‌ها O(N × M) یعنی O(N²) است!</a:t>
-            </a:r>
-          </a:p>
-        </p:txBody>
-      </p:sp>
-      <p:sp>
-        <p:nvSpPr>
-          <p:cNvPr id="7" name="Rounded Rectangle 6"/>
-          <p:cNvSpPr/>
-          <p:nvPr/>
-        </p:nvSpPr>
-        <p:spPr>
-          <a:xfrm>
-            <a:off x="731520" y="3703320"/>
-            <a:ext cx="10698480" cy="2212848"/>
+            <a:off x="731520" y="2926080"/>
+            <a:ext cx="10698480" cy="2286000"/>
           </a:xfrm>
           <a:prstGeom prst="roundRect">
             <a:avLst/>
@@ -16407,7 +16706,7 @@
           <a:lstStyle/>
           <a:p>
             <a:pPr algn="l">
-              <a:defRPr sz="1100">
+              <a:defRPr sz="1000">
                 <a:solidFill>
                   <a:srgbClr val="4ECCA3"/>
                 </a:solidFill>
@@ -16415,12 +16714,12 @@
               </a:defRPr>
             </a:pPr>
             <a:r>
-              <a:t>// ❌ رویکرد کُند: جستجوی مستقیم در List با O(N²)</a:t>
+              <a:t>fun maxAreaBruteForce(height: IntArray): Int {</a:t>
             </a:r>
           </a:p>
           <a:p>
             <a:pPr algn="l">
-              <a:defRPr sz="1100">
+              <a:defRPr sz="1000">
                 <a:solidFill>
                   <a:srgbClr val="4ECCA3"/>
                 </a:solidFill>
@@ -16428,12 +16727,12 @@
               </a:defRPr>
             </a:pPr>
             <a:r>
-              <a:t>internal fun &lt;T&gt; syncCardStackState(</a:t>
+              <a:t>    var maxWater = 0 // Time: O(1), Space: O(1)</a:t>
             </a:r>
           </a:p>
           <a:p>
             <a:pPr algn="l">
-              <a:defRPr sz="1100">
+              <a:defRPr sz="1000">
                 <a:solidFill>
                   <a:srgbClr val="4ECCA3"/>
                 </a:solidFill>
@@ -16441,12 +16740,12 @@
               </a:defRPr>
             </a:pPr>
             <a:r>
-              <a:t>    currentItems: List&lt;T&gt;,</a:t>
+              <a:t>    for (i in 0 until height.size) { // O(n) outer iterations</a:t>
             </a:r>
           </a:p>
           <a:p>
             <a:pPr algn="l">
-              <a:defRPr sz="1100">
+              <a:defRPr sz="1000">
                 <a:solidFill>
                   <a:srgbClr val="4ECCA3"/>
                 </a:solidFill>
@@ -16454,12 +16753,12 @@
               </a:defRPr>
             </a:pPr>
             <a:r>
-              <a:t>    newCardsList: List&lt;T&gt;,</a:t>
+              <a:t>        for (j in i + 1 until height.size) { // O(n) inner iterations</a:t>
             </a:r>
           </a:p>
           <a:p>
             <a:pPr algn="l">
-              <a:defRPr sz="1100">
+              <a:defRPr sz="1000">
                 <a:solidFill>
                   <a:srgbClr val="4ECCA3"/>
                 </a:solidFill>
@@ -16467,12 +16766,12 @@
               </a:defRPr>
             </a:pPr>
             <a:r>
-              <a:t>): List&lt;T&gt; {</a:t>
+              <a:t>            val currentArea = (j - i) * minOf(height[i], height[j]) // O(1)</a:t>
             </a:r>
           </a:p>
           <a:p>
             <a:pPr algn="l">
-              <a:defRPr sz="1100">
+              <a:defRPr sz="1000">
                 <a:solidFill>
                   <a:srgbClr val="4ECCA3"/>
                 </a:solidFill>
@@ -16480,12 +16779,12 @@
               </a:defRPr>
             </a:pPr>
             <a:r>
-              <a:t>    val remainingOldItems = currentItems.filter { it in newCardsList }</a:t>
+              <a:t>            maxWater = maxOf(maxWater, currentArea) // O(1)</a:t>
             </a:r>
           </a:p>
           <a:p>
             <a:pPr algn="l">
-              <a:defRPr sz="1100">
+              <a:defRPr sz="1000">
                 <a:solidFill>
                   <a:srgbClr val="4ECCA3"/>
                 </a:solidFill>
@@ -16493,12 +16792,12 @@
               </a:defRPr>
             </a:pPr>
             <a:r>
-              <a:t>    val newItems = newCardsList.filter { it !in currentItems }</a:t>
+              <a:t>        }</a:t>
             </a:r>
           </a:p>
           <a:p>
             <a:pPr algn="l">
-              <a:defRPr sz="1100">
+              <a:defRPr sz="1000">
                 <a:solidFill>
                   <a:srgbClr val="4ECCA3"/>
                 </a:solidFill>
@@ -16506,12 +16805,12 @@
               </a:defRPr>
             </a:pPr>
             <a:r>
-              <a:t>    return remainingOldItems + newItems</a:t>
+              <a:t>    }</a:t>
             </a:r>
           </a:p>
           <a:p>
             <a:pPr algn="l">
-              <a:defRPr sz="1100">
+              <a:defRPr sz="1000">
                 <a:solidFill>
                   <a:srgbClr val="4ECCA3"/>
                 </a:solidFill>
@@ -16519,7 +16818,33 @@
               </a:defRPr>
             </a:pPr>
             <a:r>
+              <a:t>    return maxWater // O(1)</a:t>
+            </a:r>
+          </a:p>
+          <a:p>
+            <a:pPr algn="l">
+              <a:defRPr sz="1000">
+                <a:solidFill>
+                  <a:srgbClr val="4ECCA3"/>
+                </a:solidFill>
+                <a:latin typeface="Consolas"/>
+              </a:defRPr>
+            </a:pPr>
+            <a:r>
               <a:t>}</a:t>
+            </a:r>
+          </a:p>
+          <a:p>
+            <a:pPr algn="l">
+              <a:defRPr sz="1000">
+                <a:solidFill>
+                  <a:srgbClr val="4ECCA3"/>
+                </a:solidFill>
+                <a:latin typeface="Consolas"/>
+              </a:defRPr>
+            </a:pPr>
+            <a:r>
+              <a:t>// Overall Time: O(n²) (TLE for n = 10⁵) | Auxiliary Space: O(1) | Overall Space: O(1)</a:t>
             </a:r>
           </a:p>
         </p:txBody>
@@ -16615,7 +16940,7 @@
               </a:defRPr>
             </a:pPr>
             <a:r>
-              <a:t>تحلیل گلوگاه · BOTTLENECK ANALYSIS  |  کالبدشکافی ایراد: هزینه پنهان و افت فریم در UI</a:t>
+              <a:t>اثبات الگوریتمی · GREEDY INTUITION  |  تحلیل آنالوگ روی کاغذ: راز تصمیم حریصانه (Greedy Choice)</a:t>
             </a:r>
           </a:p>
           <a:p>
@@ -16627,7 +16952,7 @@
               </a:defRPr>
             </a:pPr>
             <a:r>
-              <a:t>چرا این کد در محیط پروداکشن باعث لگ و مصرف غیرعادی باتری می‌شود؟</a:t>
+              <a:t>چرا جابجا کردن ستون بلندتر بیهوده است و فقط تغییر ستون کوتاه‌تر شانس افزایش مساحت دارد؟</a:t>
             </a:r>
           </a:p>
         </p:txBody>
@@ -16641,15 +16966,15 @@
         <p:spPr>
           <a:xfrm>
             <a:off x="731520" y="1463040"/>
-            <a:ext cx="5234940" cy="2011680"/>
+            <a:ext cx="5212080" cy="1645920"/>
           </a:xfrm>
           <a:prstGeom prst="roundRect">
             <a:avLst/>
           </a:prstGeom>
           <a:solidFill>
-            <a:srgbClr val="141428"/>
+            <a:srgbClr val="231216"/>
           </a:solidFill>
-          <a:ln w="19050">
+          <a:ln>
             <a:solidFill>
               <a:srgbClr val="E96C6C"/>
             </a:solidFill>
@@ -16674,14 +16999,14 @@
           <a:lstStyle/>
           <a:p>
             <a:pPr algn="ctr">
-              <a:defRPr sz="1400" b="1">
+              <a:defRPr sz="1300" b="1">
                 <a:solidFill>
                   <a:srgbClr val="E96C6C"/>
                 </a:solidFill>
               </a:defRPr>
             </a:pPr>
             <a:r>
-              <a:t>❌ پیمایش خطی مداوم (Linear Scan)</a:t>
+              <a:t>⚠️ حرکت ستون بلندتر ❌</a:t>
             </a:r>
           </a:p>
           <a:p>
@@ -16693,7 +17018,7 @@
               </a:defRPr>
             </a:pPr>
             <a:r>
-              <a:t>ساختار List ترتیبی است؛ ترکیب آن با filter یک حلقه تو در تو (Nested Loop) پنهان است.</a:t>
+              <a:t>عرض ۱ واحد کم می‌شود. ارتفاع جدید هم توسط دیوار کوتاه فعلی محدود است؛ پس مساحت حتماً کمتر یا مساوی قبلی است!</a:t>
             </a:r>
           </a:p>
         </p:txBody>
@@ -16706,18 +17031,18 @@
         </p:nvSpPr>
         <p:spPr>
           <a:xfrm>
-            <a:off x="6195059" y="1463040"/>
-            <a:ext cx="5234940" cy="2011680"/>
+            <a:off x="6217920" y="1463040"/>
+            <a:ext cx="5212080" cy="1645920"/>
           </a:xfrm>
           <a:prstGeom prst="roundRect">
             <a:avLst/>
           </a:prstGeom>
           <a:solidFill>
-            <a:srgbClr val="141428"/>
+            <a:srgbClr val="10231E"/>
           </a:solidFill>
-          <a:ln w="19050">
+          <a:ln>
             <a:solidFill>
-              <a:srgbClr val="E9A84C"/>
+              <a:srgbClr val="4ECCA3"/>
             </a:solidFill>
           </a:ln>
         </p:spPr>
@@ -16740,14 +17065,14 @@
           <a:lstStyle/>
           <a:p>
             <a:pPr algn="ctr">
-              <a:defRPr sz="1400" b="1">
-                <a:solidFill>
-                  <a:srgbClr val="E9A84C"/>
-                </a:solidFill>
-              </a:defRPr>
-            </a:pPr>
-            <a:r>
-              <a:t>⚠️ افت فریم و لگ در کامپوز (Jank)</a:t>
+              <a:defRPr sz="1300" b="1">
+                <a:solidFill>
+                  <a:srgbClr val="4ECCA3"/>
+                </a:solidFill>
+              </a:defRPr>
+            </a:pPr>
+            <a:r>
+              <a:t>✅ حرکت ستون کوتاه‌تر ✅</a:t>
             </a:r>
           </a:p>
           <a:p>
@@ -16759,7 +17084,7 @@
               </a:defRPr>
             </a:pPr>
             <a:r>
-              <a:t>در Compose محاسبه State روی Main Thread است؛ هزاران مقایسه باعث گذر از بودجه ۱۶ میلی‌ثانیه‌ای فریم می‌شود.</a:t>
+              <a:t>عرض کم می‌شود اما گلوگاه کوتاهی حذف می‌شود؛ تنها شانس یافتن دیواری بسیار بلندتر برای جبران عرض همین است!</a:t>
             </a:r>
           </a:p>
         </p:txBody>
@@ -16772,7 +17097,7 @@
         </p:nvSpPr>
         <p:spPr>
           <a:xfrm>
-            <a:off x="731520" y="3703320"/>
+            <a:off x="731520" y="3291840"/>
             <a:ext cx="10698480" cy="1463040"/>
           </a:xfrm>
           <a:prstGeom prst="rect">
@@ -16794,7 +17119,7 @@
               </a:defRPr>
             </a:pPr>
             <a:r>
-              <a:t>• پنهان از چشم لینترها: Detekt و کامپایلر ایراد سینتکسی نمی‌گیرند؛ اما Profiler فریز فریم‌ها را ثبت می‌کند.</a:t>
+              <a:t>• تریس روی آرایه نمونه: height = [1, 8, 6, 2, 5, 4, 8, 3, 7]</a:t>
             </a:r>
           </a:p>
           <a:p>
@@ -16806,7 +17131,31 @@
               </a:defRPr>
             </a:pPr>
             <a:r>
-              <a:t>• در مقیاس ۵۰ تا ۱۰۰ کارت: ۲۰,۰۰۰ عملیات مقایسه سنگین شیء رخ می‌دهد.</a:t>
+              <a:t>• گام ۱: L=0 (1), R=8 (7) ➔ عرض=۸، ارتفاع موثر=۱ ➔ مساحت = ۸. چون ۱ &lt; ۷ است، ستون چپ حرکت می‌کند (L++).</a:t>
+            </a:r>
+          </a:p>
+          <a:p>
+            <a:pPr>
+              <a:defRPr sz="1300">
+                <a:solidFill>
+                  <a:srgbClr val="DDE1F5"/>
+                </a:solidFill>
+              </a:defRPr>
+            </a:pPr>
+            <a:r>
+              <a:t>• گام ۲: L=1 (8), R=8 (7) ➔ عرض=۷، ارتفاع موثر=۷ ➔ مساحت = ۴۹ (بیشینه مطلق!). چون ۷ &lt; ۸ است، R--.</a:t>
+            </a:r>
+          </a:p>
+          <a:p>
+            <a:pPr>
+              <a:defRPr sz="1300">
+                <a:solidFill>
+                  <a:srgbClr val="DDE1F5"/>
+                </a:solidFill>
+              </a:defRPr>
+            </a:pPr>
+            <a:r>
+              <a:t>• گام‌های ۳ تا ۸: کاهش عرض باعث مساحت‌های ۱۸، ۴۰، ۱۶، ۱۵، ۴ و ۶ می‌شود و رکورد ۴۹ دست‌نخورده می‌ماند.</a:t>
             </a:r>
           </a:p>
         </p:txBody>
@@ -16860,7 +17209,7 @@
               </a:defRPr>
             </a:pPr>
             <a:r>
-              <a:t>«در ۶۰ فریم بر ثانیه، هر فریم فقط ۱۶ میلی‌ثانیه زمان دارد؛ حلقه‌های O(N²) اولین قاتل روانی UI هستند.»</a:t>
+              <a:t>«در الگوریتم‌های دو نشانگر، اثبات ریاضی شرط حرکت اشاره‌گرها مهم‌ترین بخش ارزیابی است.»</a:t>
             </a:r>
           </a:p>
         </p:txBody>
@@ -16956,7 +17305,7 @@
               </a:defRPr>
             </a:pPr>
             <a:r>
-              <a:t>کدنویسی تمیز · OPTIMAL O(N)  |  راه‌حل بهینه: جهش به O(N) با HashSet و تحلیل چرایی</a:t>
+              <a:t>کدنویسی تمیز · CLEAN KOTLIN  |  پیاده‌سازی تمیز در کاتلین: الگوریتم O(n) با دو نشانگر</a:t>
             </a:r>
           </a:p>
           <a:p>
@@ -16968,7 +17317,7 @@
               </a:defRPr>
             </a:pPr>
             <a:r>
-              <a:t>به‌کارگیری جدول هش برای جستجوی آنی O(1) و کاهش زمان کل به خطی O(N + M):</a:t>
+              <a:t>پیاده‌سازی بدون نقص با زمان خطی O(n) و مصرف حافظه ثابت O(1) | LeetCode #11</a:t>
             </a:r>
           </a:p>
         </p:txBody>
@@ -16982,139 +17331,7 @@
         <p:spPr>
           <a:xfrm>
             <a:off x="731520" y="1463040"/>
-            <a:ext cx="5234940" cy="2011680"/>
-          </a:xfrm>
-          <a:prstGeom prst="roundRect">
-            <a:avLst/>
-          </a:prstGeom>
-          <a:solidFill>
-            <a:srgbClr val="141428"/>
-          </a:solidFill>
-          <a:ln w="19050">
-            <a:solidFill>
-              <a:srgbClr val="4ECCA3"/>
-            </a:solidFill>
-          </a:ln>
-        </p:spPr>
-        <p:style>
-          <a:lnRef idx="1">
-            <a:schemeClr val="accent1"/>
-          </a:lnRef>
-          <a:fillRef idx="3">
-            <a:schemeClr val="accent1"/>
-          </a:fillRef>
-          <a:effectRef idx="2">
-            <a:schemeClr val="accent1"/>
-          </a:effectRef>
-          <a:fontRef idx="minor">
-            <a:schemeClr val="lt1"/>
-          </a:fontRef>
-        </p:style>
-        <p:txBody>
-          <a:bodyPr rtlCol="0" anchor="ctr" wrap="square"/>
-          <a:lstStyle/>
-          <a:p>
-            <a:pPr algn="ctr">
-              <a:defRPr sz="1400" b="1">
-                <a:solidFill>
-                  <a:srgbClr val="4ECCA3"/>
-                </a:solidFill>
-              </a:defRPr>
-            </a:pPr>
-            <a:r>
-              <a:t>⚡ جستجوی آنی O(1)</a:t>
-            </a:r>
-          </a:p>
-          <a:p>
-            <a:pPr>
-              <a:defRPr sz="1100">
-                <a:solidFill>
-                  <a:srgbClr val="DDE1F5"/>
-                </a:solidFill>
-              </a:defRPr>
-            </a:pPr>
-            <a:r>
-              <a:t>با toSet() جدول هش ساخته می‌شود و جستجو با تابع هش در زمان ثابت انجام می‌گیرد.</a:t>
-            </a:r>
-          </a:p>
-        </p:txBody>
-      </p:sp>
-      <p:sp>
-        <p:nvSpPr>
-          <p:cNvPr id="5" name="Rounded Rectangle 4"/>
-          <p:cNvSpPr/>
-          <p:nvPr/>
-        </p:nvSpPr>
-        <p:spPr>
-          <a:xfrm>
-            <a:off x="6195059" y="1463040"/>
-            <a:ext cx="5234940" cy="2011680"/>
-          </a:xfrm>
-          <a:prstGeom prst="roundRect">
-            <a:avLst/>
-          </a:prstGeom>
-          <a:solidFill>
-            <a:srgbClr val="141428"/>
-          </a:solidFill>
-          <a:ln w="19050">
-            <a:solidFill>
-              <a:srgbClr val="4ECCA3"/>
-            </a:solidFill>
-          </a:ln>
-        </p:spPr>
-        <p:style>
-          <a:lnRef idx="1">
-            <a:schemeClr val="accent1"/>
-          </a:lnRef>
-          <a:fillRef idx="3">
-            <a:schemeClr val="accent1"/>
-          </a:fillRef>
-          <a:effectRef idx="2">
-            <a:schemeClr val="accent1"/>
-          </a:effectRef>
-          <a:fontRef idx="minor">
-            <a:schemeClr val="lt1"/>
-          </a:fontRef>
-        </p:style>
-        <p:txBody>
-          <a:bodyPr rtlCol="0" anchor="ctr" wrap="square"/>
-          <a:lstStyle/>
-          <a:p>
-            <a:pPr algn="ctr">
-              <a:defRPr sz="1400" b="1">
-                <a:solidFill>
-                  <a:srgbClr val="4ECCA3"/>
-                </a:solidFill>
-              </a:defRPr>
-            </a:pPr>
-            <a:r>
-              <a:t>🚀 کاهش به خطی O(N + M)</a:t>
-            </a:r>
-          </a:p>
-          <a:p>
-            <a:pPr>
-              <a:defRPr sz="1100">
-                <a:solidFill>
-                  <a:srgbClr val="DDE1F5"/>
-                </a:solidFill>
-              </a:defRPr>
-            </a:pPr>
-            <a:r>
-              <a:t>کل هزینه به O(N + M) تبدیل شده و حتی برای ۱۰,۰۰۰ کارت در کسری از میلی‌ثانیه اجرا می‌شود.</a:t>
-            </a:r>
-          </a:p>
-        </p:txBody>
-      </p:sp>
-      <p:sp>
-        <p:nvSpPr>
-          <p:cNvPr id="6" name="Rounded Rectangle 5"/>
-          <p:cNvSpPr/>
-          <p:nvPr/>
-        </p:nvSpPr>
-        <p:spPr>
-          <a:xfrm>
-            <a:off x="731520" y="3703320"/>
-            <a:ext cx="10698480" cy="2633472"/>
+            <a:ext cx="10698480" cy="2843784"/>
           </a:xfrm>
           <a:prstGeom prst="roundRect">
             <a:avLst/>
@@ -17155,7 +17372,7 @@
               </a:defRPr>
             </a:pPr>
             <a:r>
-              <a:t>// ✅ رویکرد بهینه: تبدیل به Set و جستجوی آنی O(1)</a:t>
+              <a:t>fun maxArea(height: IntArray): Int {</a:t>
             </a:r>
           </a:p>
           <a:p>
@@ -17168,7 +17385,7 @@
               </a:defRPr>
             </a:pPr>
             <a:r>
-              <a:t>internal fun &lt;T&gt; syncCardStackState(</a:t>
+              <a:t>    var maxWater = 0 // Time: O(1), Space: O(1)</a:t>
             </a:r>
           </a:p>
           <a:p>
@@ -17181,7 +17398,7 @@
               </a:defRPr>
             </a:pPr>
             <a:r>
-              <a:t>    currentItems: List&lt;T&gt;,</a:t>
+              <a:t>    var left = 0; var right = height.lastIndex // Time: O(1), Space: O(1)</a:t>
             </a:r>
           </a:p>
           <a:p>
@@ -17194,7 +17411,7 @@
               </a:defRPr>
             </a:pPr>
             <a:r>
-              <a:t>    newCardsList: List&lt;T&gt;,</a:t>
+              <a:t>    while (left &lt; right) { // O(n) iterations — 1 step convergence</a:t>
             </a:r>
           </a:p>
           <a:p>
@@ -17207,7 +17424,7 @@
               </a:defRPr>
             </a:pPr>
             <a:r>
-              <a:t>): List&lt;T&gt; {</a:t>
+              <a:t>        val width = right - left // O(1)</a:t>
             </a:r>
           </a:p>
           <a:p>
@@ -17220,7 +17437,7 @@
               </a:defRPr>
             </a:pPr>
             <a:r>
-              <a:t>    val newCardsSet = newCardsList.toSet()</a:t>
+              <a:t>        val currentArea = width * minOf(height[left], height[right]) // O(1)</a:t>
             </a:r>
           </a:p>
           <a:p>
@@ -17233,7 +17450,7 @@
               </a:defRPr>
             </a:pPr>
             <a:r>
-              <a:t>    val currentItemsSet = currentItems.toSet()</a:t>
+              <a:t>        if (currentArea &gt; maxWater) maxWater = currentArea // O(1)</a:t>
             </a:r>
           </a:p>
           <a:p>
@@ -17246,7 +17463,7 @@
               </a:defRPr>
             </a:pPr>
             <a:r>
-              <a:t>    val remainingOldItems = currentItems.filter { it in newCardsSet }</a:t>
+              <a:t>        if (height[left] &lt; height[right]) left++ else right-- // O(1) greedy step</a:t>
             </a:r>
           </a:p>
           <a:p>
@@ -17259,7 +17476,7 @@
               </a:defRPr>
             </a:pPr>
             <a:r>
-              <a:t>    val newItems = newCardsList.filter { it !in currentItemsSet }</a:t>
+              <a:t>    }</a:t>
             </a:r>
           </a:p>
           <a:p>
@@ -17272,7 +17489,7 @@
               </a:defRPr>
             </a:pPr>
             <a:r>
-              <a:t>    return remainingOldItems + newItems</a:t>
+              <a:t>    return maxWater // O(1)</a:t>
             </a:r>
           </a:p>
           <a:p>
@@ -17288,58 +17505,76 @@
               <a:t>}</a:t>
             </a:r>
           </a:p>
-        </p:txBody>
-      </p:sp>
-      <p:sp>
-        <p:nvSpPr>
-          <p:cNvPr id="7" name="Rounded Rectangle 6"/>
-          <p:cNvSpPr/>
-          <p:nvPr/>
-        </p:nvSpPr>
-        <p:spPr>
-          <a:xfrm>
-            <a:off x="731520" y="5486400"/>
-            <a:ext cx="10698480" cy="822960"/>
-          </a:xfrm>
-          <a:prstGeom prst="roundRect">
-            <a:avLst/>
-          </a:prstGeom>
-          <a:solidFill>
-            <a:srgbClr val="1C1C38"/>
-          </a:solidFill>
-          <a:ln w="12700">
-            <a:solidFill>
-              <a:srgbClr val="7C8FF5"/>
-            </a:solidFill>
-          </a:ln>
-        </p:spPr>
-        <p:style>
-          <a:lnRef idx="1">
-            <a:schemeClr val="accent1"/>
-          </a:lnRef>
-          <a:fillRef idx="3">
-            <a:schemeClr val="accent1"/>
-          </a:fillRef>
-          <a:effectRef idx="2">
-            <a:schemeClr val="accent1"/>
-          </a:effectRef>
-          <a:fontRef idx="minor">
-            <a:schemeClr val="lt1"/>
-          </a:fontRef>
-        </p:style>
-        <p:txBody>
-          <a:bodyPr rtlCol="0" anchor="ctr" wrap="square"/>
-          <a:lstStyle/>
-          <a:p>
-            <a:pPr algn="ctr">
-              <a:defRPr sz="1200" i="1">
-                <a:solidFill>
-                  <a:srgbClr val="7C8FF5"/>
-                </a:solidFill>
-              </a:defRPr>
-            </a:pPr>
-            <a:r>
-              <a:t>«قاعده طلایی: همیشه پیش از فیلتر یا مقایسه اشتراک دو لیست در کاتلین، لیست مرجع را به Set تبدیل کنید.»</a:t>
+          <a:p>
+            <a:pPr algn="l">
+              <a:defRPr sz="1100">
+                <a:solidFill>
+                  <a:srgbClr val="4ECCA3"/>
+                </a:solidFill>
+                <a:latin typeface="Consolas"/>
+              </a:defRPr>
+            </a:pPr>
+            <a:r>
+              <a:t>// Overall Time: O(n) — single pass | Auxiliary Space: O(1) | Overall Space: O(1)</a:t>
+            </a:r>
+          </a:p>
+        </p:txBody>
+      </p:sp>
+      <p:sp>
+        <p:nvSpPr>
+          <p:cNvPr id="5" name="TextBox 4"/>
+          <p:cNvSpPr txBox="1"/>
+          <p:nvPr/>
+        </p:nvSpPr>
+        <p:spPr>
+          <a:xfrm>
+            <a:off x="731520" y="4443984"/>
+            <a:ext cx="10698480" cy="1463040"/>
+          </a:xfrm>
+          <a:prstGeom prst="rect">
+            <a:avLst/>
+          </a:prstGeom>
+          <a:noFill/>
+        </p:spPr>
+        <p:txBody>
+          <a:bodyPr wrap="square">
+            <a:spAutoFit/>
+          </a:bodyPr>
+          <a:lstStyle/>
+          <a:p>
+            <a:pPr>
+              <a:defRPr sz="1300">
+                <a:solidFill>
+                  <a:srgbClr val="DDE1F5"/>
+                </a:solidFill>
+              </a:defRPr>
+            </a:pPr>
+            <a:r>
+              <a:t>• پیچیدگی زمانی O(n): در هر دور دقیقاً یک نشانگر جابجا می‌شود؛ حلقه حداکثر n - 1 بار می‌چرخد.</a:t>
+            </a:r>
+          </a:p>
+          <a:p>
+            <a:pPr>
+              <a:defRPr sz="1300">
+                <a:solidFill>
+                  <a:srgbClr val="DDE1F5"/>
+                </a:solidFill>
+              </a:defRPr>
+            </a:pPr>
+            <a:r>
+              <a:t>• پیچیدگی فضایی O(1): تنها ۴ متغیر عددی روی پشته Stack، بدون هیچ شیء اضافی در حافظه Heap.</a:t>
+            </a:r>
+          </a:p>
+          <a:p>
+            <a:pPr>
+              <a:defRPr sz="1300">
+                <a:solidFill>
+                  <a:srgbClr val="DDE1F5"/>
+                </a:solidFill>
+              </a:defRPr>
+            </a:pPr>
+            <a:r>
+              <a:t>• مدیریت تساوی: در صورت hLeft == hRight، حرکت هر نشانگری معادل است و خللی به صحت الگوریتم نمی‌زند.</a:t>
             </a:r>
           </a:p>
         </p:txBody>
@@ -17435,7 +17670,7 @@
               </a:defRPr>
             </a:pPr>
             <a:r>
-              <a:t>برنامه اقدام · ACTION PLAN  |  جمع‌بندی و برنامه ۳۰ روزه آینده</a:t>
+              <a:t>شبیه‌ساز بصری · WATER LEVEL VISUALIZER  |  شبیه‌ساز تعاملی و بصری: بیشینه‌سازی حجم آب (دو نشانگر)</a:t>
             </a:r>
           </a:p>
           <a:p>
@@ -17447,7 +17682,7 @@
               </a:defRPr>
             </a:pPr>
             <a:r>
-              <a:t>نقشه راه ۴ هفته‌ای برای رسیدن به آمادگی در جلسات ارزیابی:</a:t>
+              <a:t>نمایش گام‌به‌گام ستون‌ها و تغییر حجم آب روی آرایه [1, 8, 6, 2, 5, 4, 8, 3, 7]  |  LeetCode #11</a:t>
             </a:r>
           </a:p>
         </p:txBody>
@@ -17501,7 +17736,7 @@
               </a:defRPr>
             </a:pPr>
             <a:r>
-              <a:t>هفته اول: مبانی آرایه و هش</a:t>
+              <a:t>گام ۰: L=0, R=8</a:t>
             </a:r>
           </a:p>
           <a:p>
@@ -17513,7 +17748,7 @@
               </a:defRPr>
             </a:pPr>
             <a:r>
-              <a:t>حل ۵ مسئله Easy اول Blind 75 مانند جمع دو تایی و Contains Duplicate.</a:t>
+              <a:t>عرض ۸، ارتفاع موثر ۱ ➔ مساحت ۸. ستون چپ کوتاه‌تر است ➔ L++.</a:t>
             </a:r>
           </a:p>
         </p:txBody>
@@ -17527,6 +17762,72 @@
         <p:spPr>
           <a:xfrm>
             <a:off x="3463289" y="1463040"/>
+            <a:ext cx="2503170" cy="2011680"/>
+          </a:xfrm>
+          <a:prstGeom prst="roundRect">
+            <a:avLst/>
+          </a:prstGeom>
+          <a:solidFill>
+            <a:srgbClr val="141428"/>
+          </a:solidFill>
+          <a:ln w="19050">
+            <a:solidFill>
+              <a:srgbClr val="38BDF8"/>
+            </a:solidFill>
+          </a:ln>
+        </p:spPr>
+        <p:style>
+          <a:lnRef idx="1">
+            <a:schemeClr val="accent1"/>
+          </a:lnRef>
+          <a:fillRef idx="3">
+            <a:schemeClr val="accent1"/>
+          </a:fillRef>
+          <a:effectRef idx="2">
+            <a:schemeClr val="accent1"/>
+          </a:effectRef>
+          <a:fontRef idx="minor">
+            <a:schemeClr val="lt1"/>
+          </a:fontRef>
+        </p:style>
+        <p:txBody>
+          <a:bodyPr rtlCol="0" anchor="ctr" wrap="square"/>
+          <a:lstStyle/>
+          <a:p>
+            <a:pPr algn="ctr">
+              <a:defRPr sz="1400" b="1">
+                <a:solidFill>
+                  <a:srgbClr val="38BDF8"/>
+                </a:solidFill>
+              </a:defRPr>
+            </a:pPr>
+            <a:r>
+              <a:t>گام ۱: L=1, R=8</a:t>
+            </a:r>
+          </a:p>
+          <a:p>
+            <a:pPr>
+              <a:defRPr sz="1100">
+                <a:solidFill>
+                  <a:srgbClr val="DDE1F5"/>
+                </a:solidFill>
+              </a:defRPr>
+            </a:pPr>
+            <a:r>
+              <a:t>عرض ۷، ارتفاع موثر ۷ ➔ مساحت ۴۹ 🎉 (صید بیشینه مطلق!). ستون راست کوتاه‌تر است ➔ R--.</a:t>
+            </a:r>
+          </a:p>
+        </p:txBody>
+      </p:sp>
+      <p:sp>
+        <p:nvSpPr>
+          <p:cNvPr id="6" name="Rounded Rectangle 5"/>
+          <p:cNvSpPr/>
+          <p:nvPr/>
+        </p:nvSpPr>
+        <p:spPr>
+          <a:xfrm>
+            <a:off x="6195059" y="1463040"/>
             <a:ext cx="2503170" cy="2011680"/>
           </a:xfrm>
           <a:prstGeom prst="roundRect">
@@ -17567,7 +17868,7 @@
               </a:defRPr>
             </a:pPr>
             <a:r>
-              <a:t>هفته دوم: نشانگرها و پنجره</a:t>
+              <a:t>گام‌های ۲ تا ۴: L=1</a:t>
             </a:r>
           </a:p>
           <a:p>
@@ -17579,20 +17880,20 @@
               </a:defRPr>
             </a:pPr>
             <a:r>
-              <a:t>الگوهای Two Pointers و Sliding Window با مرور منظم مسائل هفته اول.</a:t>
-            </a:r>
-          </a:p>
-        </p:txBody>
-      </p:sp>
-      <p:sp>
-        <p:nvSpPr>
-          <p:cNvPr id="6" name="Rounded Rectangle 5"/>
+              <a:t>بررسی ستون‌های ۳، ۸ و ۴ ➔ مساحت‌های ۱۸، ۴۰ و ۱۶ (کمتر از ۴۹) ➔ ادامه R--.</a:t>
+            </a:r>
+          </a:p>
+        </p:txBody>
+      </p:sp>
+      <p:sp>
+        <p:nvSpPr>
+          <p:cNvPr id="7" name="Rounded Rectangle 6"/>
           <p:cNvSpPr/>
           <p:nvPr/>
         </p:nvSpPr>
         <p:spPr>
           <a:xfrm>
-            <a:off x="6195059" y="1463040"/>
+            <a:off x="8926830" y="1463040"/>
             <a:ext cx="2503170" cy="2011680"/>
           </a:xfrm>
           <a:prstGeom prst="roundRect">
@@ -17633,7 +17934,7 @@
               </a:defRPr>
             </a:pPr>
             <a:r>
-              <a:t>هفته سوم: ساختارها و پشته</a:t>
+              <a:t>گام‌های ۵ تا ۸: همگرایی</a:t>
             </a:r>
           </a:p>
           <a:p>
@@ -17645,80 +17946,73 @@
               </a:defRPr>
             </a:pPr>
             <a:r>
-              <a:t>درخت‌ها، پشته (Stack) و پیمایش‌های DFS و BFS پایه با رسم روی کاغذ.</a:t>
-            </a:r>
-          </a:p>
-        </p:txBody>
-      </p:sp>
-      <p:sp>
-        <p:nvSpPr>
-          <p:cNvPr id="7" name="Rounded Rectangle 6"/>
-          <p:cNvSpPr/>
-          <p:nvPr/>
-        </p:nvSpPr>
-        <p:spPr>
-          <a:xfrm>
-            <a:off x="8926830" y="1463040"/>
-            <a:ext cx="2503170" cy="2011680"/>
-          </a:xfrm>
-          <a:prstGeom prst="roundRect">
-            <a:avLst/>
-          </a:prstGeom>
-          <a:solidFill>
-            <a:srgbClr val="141428"/>
-          </a:solidFill>
-          <a:ln w="19050">
-            <a:solidFill>
-              <a:srgbClr val="4ECCA3"/>
-            </a:solidFill>
-          </a:ln>
-        </p:spPr>
-        <p:style>
-          <a:lnRef idx="1">
-            <a:schemeClr val="accent1"/>
-          </a:lnRef>
-          <a:fillRef idx="3">
-            <a:schemeClr val="accent1"/>
-          </a:fillRef>
-          <a:effectRef idx="2">
-            <a:schemeClr val="accent1"/>
-          </a:effectRef>
-          <a:fontRef idx="minor">
-            <a:schemeClr val="lt1"/>
-          </a:fontRef>
-        </p:style>
-        <p:txBody>
-          <a:bodyPr rtlCol="0" anchor="ctr" wrap="square"/>
-          <a:lstStyle/>
-          <a:p>
-            <a:pPr algn="ctr">
-              <a:defRPr sz="1400" b="1">
-                <a:solidFill>
-                  <a:srgbClr val="4ECCA3"/>
-                </a:solidFill>
-              </a:defRPr>
-            </a:pPr>
-            <a:r>
-              <a:t>هفته چهارم: تست‌های Medium</a:t>
-            </a:r>
-          </a:p>
-          <a:p>
-            <a:pPr>
-              <a:defRPr sz="1100">
+              <a:t>بررسی ۵، ۲ و ۶ و رسیدن به L=R ➔ پایان جستجو با رکورد نهایی ۴۹.</a:t>
+            </a:r>
+          </a:p>
+        </p:txBody>
+      </p:sp>
+      <p:sp>
+        <p:nvSpPr>
+          <p:cNvPr id="8" name="TextBox 7"/>
+          <p:cNvSpPr txBox="1"/>
+          <p:nvPr/>
+        </p:nvSpPr>
+        <p:spPr>
+          <a:xfrm>
+            <a:off x="731520" y="3611880"/>
+            <a:ext cx="10698480" cy="1463040"/>
+          </a:xfrm>
+          <a:prstGeom prst="rect">
+            <a:avLst/>
+          </a:prstGeom>
+          <a:noFill/>
+        </p:spPr>
+        <p:txBody>
+          <a:bodyPr wrap="square">
+            <a:spAutoFit/>
+          </a:bodyPr>
+          <a:lstStyle/>
+          <a:p>
+            <a:pPr>
+              <a:defRPr sz="1300">
                 <a:solidFill>
                   <a:srgbClr val="DDE1F5"/>
                 </a:solidFill>
               </a:defRPr>
             </a:pPr>
             <a:r>
-              <a:t>ورود به مسائل سطح Medium و تمرین با تایمر ۳۰ دقیقه‌ای ارزیابی.</a:t>
-            </a:r>
-          </a:p>
-        </p:txBody>
-      </p:sp>
-      <p:sp>
-        <p:nvSpPr>
-          <p:cNvPr id="8" name="Rounded Rectangle 7"/>
+              <a:t>• نمودار میله‌ای زنده: در نسخه وب ارائه، ارتفاع ستون‌ها و آب بین آن‌ها به صورت تعاملی و رنگی شبیه‌سازی می‌شود.</a:t>
+            </a:r>
+          </a:p>
+          <a:p>
+            <a:pPr>
+              <a:defRPr sz="1300">
+                <a:solidFill>
+                  <a:srgbClr val="DDE1F5"/>
+                </a:solidFill>
+              </a:defRPr>
+            </a:pPr>
+            <a:r>
+              <a:t>• حفظ رکورد: با اینکه در گام ۳ دو ستون بلند ۸ و ۸ بررسی شدند، کاهش عرض مانع از شکستن رکورد ۴۹ شد.</a:t>
+            </a:r>
+          </a:p>
+          <a:p>
+            <a:pPr>
+              <a:defRPr sz="1300">
+                <a:solidFill>
+                  <a:srgbClr val="DDE1F5"/>
+                </a:solidFill>
+              </a:defRPr>
+            </a:pPr>
+            <a:r>
+              <a:t>• صحت کامل الگوریتم: هیچ ظرف احتمالی با مساحت بیشتر از ۴۹ در آرایه جا نماند.</a:t>
+            </a:r>
+          </a:p>
+        </p:txBody>
+      </p:sp>
+      <p:sp>
+        <p:nvSpPr>
+          <p:cNvPr id="9" name="Rounded Rectangle 8"/>
           <p:cNvSpPr/>
           <p:nvPr/>
         </p:nvSpPr>
@@ -17765,7 +18059,7 @@
               </a:defRPr>
             </a:pPr>
             <a:r>
-              <a:t>«پیوستگی روزانه ۴۵ دقیقه تمرین عمیق، معجزه‌ای خلق می‌کند که تمرین‌های ۱۰ ساعته‌ی بی‌هدف هرگز نخواهد کرد.»</a:t>
+              <a:t>«تنها با ۸ گام در زمان خطی O(n)، بهینه‌ترین حالت بین ۳۶ جفت ممکن صید شد!»</a:t>
             </a:r>
           </a:p>
         </p:txBody>
@@ -17833,6 +18127,2159 @@
       </p:sp>
       <p:sp>
         <p:nvSpPr>
+          <p:cNvPr id="3" name="Rectangle 2"/>
+          <p:cNvSpPr/>
+          <p:nvPr/>
+        </p:nvSpPr>
+        <p:spPr>
+          <a:xfrm>
+            <a:off x="0" y="0"/>
+            <a:ext cx="12191695" cy="73152"/>
+          </a:xfrm>
+          <a:prstGeom prst="rect">
+            <a:avLst/>
+          </a:prstGeom>
+          <a:solidFill>
+            <a:srgbClr val="38BDF8"/>
+          </a:solidFill>
+          <a:ln>
+            <a:noFill/>
+          </a:ln>
+        </p:spPr>
+        <p:style>
+          <a:lnRef idx="1">
+            <a:schemeClr val="accent1"/>
+          </a:lnRef>
+          <a:fillRef idx="3">
+            <a:schemeClr val="accent1"/>
+          </a:fillRef>
+          <a:effectRef idx="2">
+            <a:schemeClr val="accent1"/>
+          </a:effectRef>
+          <a:fontRef idx="minor">
+            <a:schemeClr val="lt1"/>
+          </a:fontRef>
+        </p:style>
+        <p:txBody>
+          <a:bodyPr rtlCol="0" anchor="ctr"/>
+          <a:lstStyle/>
+          <a:p>
+            <a:pPr algn="ctr"/>
+          </a:p>
+        </p:txBody>
+      </p:sp>
+      <p:sp>
+        <p:nvSpPr>
+          <p:cNvPr id="4" name="TextBox 3"/>
+          <p:cNvSpPr txBox="1"/>
+          <p:nvPr/>
+        </p:nvSpPr>
+        <p:spPr>
+          <a:xfrm>
+            <a:off x="731520" y="320040"/>
+            <a:ext cx="10698480" cy="1005840"/>
+          </a:xfrm>
+          <a:prstGeom prst="rect">
+            <a:avLst/>
+          </a:prstGeom>
+          <a:noFill/>
+        </p:spPr>
+        <p:txBody>
+          <a:bodyPr wrap="square">
+            <a:spAutoFit/>
+          </a:bodyPr>
+          <a:lstStyle/>
+          <a:p>
+            <a:pPr>
+              <a:defRPr sz="2600" b="1">
+                <a:solidFill>
+                  <a:srgbClr val="38BDF8"/>
+                </a:solidFill>
+              </a:defRPr>
+            </a:pPr>
+            <a:r>
+              <a:t>🚀 چالش پروداکشن · REAL-WORLD  |  مطالعه موردی در پروداکشن: چالش CardStack در سپینو</a:t>
+            </a:r>
+          </a:p>
+          <a:p>
+            <a:pPr>
+              <a:defRPr sz="1400">
+                <a:solidFill>
+                  <a:srgbClr val="969EB4"/>
+                </a:solidFill>
+              </a:defRPr>
+            </a:pPr>
+            <a:r>
+              <a:t>شرح کامل صورت مسئله در اپلیکیشن سپینو و نمایش کل کد ابتدایی پیاده‌سازی شده:</a:t>
+            </a:r>
+          </a:p>
+        </p:txBody>
+      </p:sp>
+      <p:sp>
+        <p:nvSpPr>
+          <p:cNvPr id="5" name="Rounded Rectangle 4"/>
+          <p:cNvSpPr/>
+          <p:nvPr/>
+        </p:nvSpPr>
+        <p:spPr>
+          <a:xfrm>
+            <a:off x="731520" y="1463040"/>
+            <a:ext cx="5234940" cy="1325880"/>
+          </a:xfrm>
+          <a:prstGeom prst="roundRect">
+            <a:avLst/>
+          </a:prstGeom>
+          <a:solidFill>
+            <a:srgbClr val="141428"/>
+          </a:solidFill>
+          <a:ln w="27940">
+            <a:solidFill>
+              <a:srgbClr val="7C8FF5"/>
+            </a:solidFill>
+          </a:ln>
+        </p:spPr>
+        <p:style>
+          <a:lnRef idx="1">
+            <a:schemeClr val="accent1"/>
+          </a:lnRef>
+          <a:fillRef idx="3">
+            <a:schemeClr val="accent1"/>
+          </a:fillRef>
+          <a:effectRef idx="2">
+            <a:schemeClr val="accent1"/>
+          </a:effectRef>
+          <a:fontRef idx="minor">
+            <a:schemeClr val="lt1"/>
+          </a:fontRef>
+        </p:style>
+        <p:txBody>
+          <a:bodyPr rtlCol="0" anchor="ctr" wrap="square"/>
+          <a:lstStyle/>
+          <a:p>
+            <a:pPr algn="ctr">
+              <a:defRPr sz="1250" b="1">
+                <a:solidFill>
+                  <a:srgbClr val="7C8FF5"/>
+                </a:solidFill>
+              </a:defRPr>
+            </a:pPr>
+            <a:r>
+              <a:t>۱. صورت مسئله و داده‌های ورودی</a:t>
+            </a:r>
+          </a:p>
+          <a:p>
+            <a:pPr>
+              <a:defRPr sz="950">
+                <a:solidFill>
+                  <a:srgbClr val="DDE1F5"/>
+                </a:solidFill>
+              </a:defRPr>
+            </a:pPr>
+            <a:r>
+              <a:t>در CardStack سپینو (KMP &amp; Compose): دو لیست currentItems (کارت‌های زنده با وضعیت انیمیشن و فوکوس) و newCardsList (دیتای تازه از سرور).</a:t>
+            </a:r>
+          </a:p>
+        </p:txBody>
+      </p:sp>
+      <p:sp>
+        <p:nvSpPr>
+          <p:cNvPr id="6" name="Rounded Rectangle 5"/>
+          <p:cNvSpPr/>
+          <p:nvPr/>
+        </p:nvSpPr>
+        <p:spPr>
+          <a:xfrm>
+            <a:off x="6195059" y="1463040"/>
+            <a:ext cx="5234940" cy="1325880"/>
+          </a:xfrm>
+          <a:prstGeom prst="roundRect">
+            <a:avLst/>
+          </a:prstGeom>
+          <a:solidFill>
+            <a:srgbClr val="141428"/>
+          </a:solidFill>
+          <a:ln w="27940">
+            <a:solidFill>
+              <a:srgbClr val="4ECCA3"/>
+            </a:solidFill>
+          </a:ln>
+        </p:spPr>
+        <p:style>
+          <a:lnRef idx="1">
+            <a:schemeClr val="accent1"/>
+          </a:lnRef>
+          <a:fillRef idx="3">
+            <a:schemeClr val="accent1"/>
+          </a:fillRef>
+          <a:effectRef idx="2">
+            <a:schemeClr val="accent1"/>
+          </a:effectRef>
+          <a:fontRef idx="minor">
+            <a:schemeClr val="lt1"/>
+          </a:fontRef>
+        </p:style>
+        <p:txBody>
+          <a:bodyPr rtlCol="0" anchor="ctr" wrap="square"/>
+          <a:lstStyle/>
+          <a:p>
+            <a:pPr algn="ctr">
+              <a:defRPr sz="1250" b="1">
+                <a:solidFill>
+                  <a:srgbClr val="4ECCA3"/>
+                </a:solidFill>
+              </a:defRPr>
+            </a:pPr>
+            <a:r>
+              <a:t>۲. رفتار مورد انتظار معماری</a:t>
+            </a:r>
+          </a:p>
+          <a:p>
+            <a:pPr>
+              <a:defRPr sz="950">
+                <a:solidFill>
+                  <a:srgbClr val="DDE1F5"/>
+                </a:solidFill>
+              </a:defRPr>
+            </a:pPr>
+            <a:r>
+              <a:t>حفظ کارت‌های مشترک بدون فلیکر یا ریست انیمیشن، حذف کارت‌های منقضی‌شده، و الحاق جدیدها به انتهای پشته. پاک‌کردن لیست در Compose فاجعه است.</a:t>
+            </a:r>
+          </a:p>
+        </p:txBody>
+      </p:sp>
+      <p:sp>
+        <p:nvSpPr>
+          <p:cNvPr id="7" name="Rounded Rectangle 6"/>
+          <p:cNvSpPr/>
+          <p:nvPr/>
+        </p:nvSpPr>
+        <p:spPr>
+          <a:xfrm>
+            <a:off x="731520" y="2926080"/>
+            <a:ext cx="10698480" cy="1920240"/>
+          </a:xfrm>
+          <a:prstGeom prst="roundRect">
+            <a:avLst/>
+          </a:prstGeom>
+          <a:solidFill>
+            <a:srgbClr val="08080F"/>
+          </a:solidFill>
+          <a:ln w="12700">
+            <a:solidFill>
+              <a:srgbClr val="7C8FF5"/>
+            </a:solidFill>
+          </a:ln>
+        </p:spPr>
+        <p:style>
+          <a:lnRef idx="1">
+            <a:schemeClr val="accent1"/>
+          </a:lnRef>
+          <a:fillRef idx="3">
+            <a:schemeClr val="accent1"/>
+          </a:fillRef>
+          <a:effectRef idx="2">
+            <a:schemeClr val="accent1"/>
+          </a:effectRef>
+          <a:fontRef idx="minor">
+            <a:schemeClr val="lt1"/>
+          </a:fontRef>
+        </p:style>
+        <p:txBody>
+          <a:bodyPr rtlCol="0" anchor="ctr" wrap="none"/>
+          <a:lstStyle/>
+          <a:p>
+            <a:pPr algn="l">
+              <a:defRPr sz="1000">
+                <a:solidFill>
+                  <a:srgbClr val="4ECCA3"/>
+                </a:solidFill>
+                <a:latin typeface="Consolas"/>
+              </a:defRPr>
+            </a:pPr>
+            <a:r>
+              <a:t>internal fun &lt;T&gt; syncCardStackState(</a:t>
+            </a:r>
+          </a:p>
+          <a:p>
+            <a:pPr algn="l">
+              <a:defRPr sz="1000">
+                <a:solidFill>
+                  <a:srgbClr val="4ECCA3"/>
+                </a:solidFill>
+                <a:latin typeface="Consolas"/>
+              </a:defRPr>
+            </a:pPr>
+            <a:r>
+              <a:t>    currentItems: List&lt;T&gt;,</a:t>
+            </a:r>
+          </a:p>
+          <a:p>
+            <a:pPr algn="l">
+              <a:defRPr sz="1000">
+                <a:solidFill>
+                  <a:srgbClr val="4ECCA3"/>
+                </a:solidFill>
+                <a:latin typeface="Consolas"/>
+              </a:defRPr>
+            </a:pPr>
+            <a:r>
+              <a:t>    newCardsList: List&lt;T&gt;,</a:t>
+            </a:r>
+          </a:p>
+          <a:p>
+            <a:pPr algn="l">
+              <a:defRPr sz="1000">
+                <a:solidFill>
+                  <a:srgbClr val="4ECCA3"/>
+                </a:solidFill>
+                <a:latin typeface="Consolas"/>
+              </a:defRPr>
+            </a:pPr>
+            <a:r>
+              <a:t>): List&lt;T&gt; {</a:t>
+            </a:r>
+          </a:p>
+          <a:p>
+            <a:pPr algn="l">
+              <a:defRPr sz="1000">
+                <a:solidFill>
+                  <a:srgbClr val="4ECCA3"/>
+                </a:solidFill>
+                <a:latin typeface="Consolas"/>
+              </a:defRPr>
+            </a:pPr>
+            <a:r>
+              <a:t>    val remainingOldItems = currentItems.filter { it in newCardsList } // Time: O(N × M), Space: O(N)</a:t>
+            </a:r>
+          </a:p>
+          <a:p>
+            <a:pPr algn="l">
+              <a:defRPr sz="1000">
+                <a:solidFill>
+                  <a:srgbClr val="4ECCA3"/>
+                </a:solidFill>
+                <a:latin typeface="Consolas"/>
+              </a:defRPr>
+            </a:pPr>
+            <a:r>
+              <a:t>    val newItems = newCardsList.filter { it !in currentItems } // Time: O(M × N), Space: O(M)</a:t>
+            </a:r>
+          </a:p>
+          <a:p>
+            <a:pPr algn="l">
+              <a:defRPr sz="1000">
+                <a:solidFill>
+                  <a:srgbClr val="4ECCA3"/>
+                </a:solidFill>
+                <a:latin typeface="Consolas"/>
+              </a:defRPr>
+            </a:pPr>
+            <a:r>
+              <a:t>    return remainingOldItems + newItems // Time: O(N + M), Space: O(N + M)</a:t>
+            </a:r>
+          </a:p>
+          <a:p>
+            <a:pPr algn="l">
+              <a:defRPr sz="1000">
+                <a:solidFill>
+                  <a:srgbClr val="4ECCA3"/>
+                </a:solidFill>
+                <a:latin typeface="Consolas"/>
+              </a:defRPr>
+            </a:pPr>
+            <a:r>
+              <a:t>}</a:t>
+            </a:r>
+          </a:p>
+          <a:p>
+            <a:pPr algn="l">
+              <a:defRPr sz="1000">
+                <a:solidFill>
+                  <a:srgbClr val="4ECCA3"/>
+                </a:solidFill>
+                <a:latin typeface="Consolas"/>
+              </a:defRPr>
+            </a:pPr>
+            <a:r>
+              <a:t>// Overall Time: O(N × M) ≈ O(N²) — linear List.contains() scans | Overall Space: O(N + M)</a:t>
+            </a:r>
+          </a:p>
+        </p:txBody>
+      </p:sp>
+    </p:spTree>
+  </p:cSld>
+  <p:clrMapOvr>
+    <a:masterClrMapping/>
+  </p:clrMapOvr>
+</p:sld>
+</file>
+
+<file path=ppt/slides/slide35.xml><?xml version="1.0" encoding="utf-8"?>
+<p:sld xmlns:a="http://schemas.openxmlformats.org/drawingml/2006/main" xmlns:p="http://schemas.openxmlformats.org/presentationml/2006/main" xmlns:r="http://schemas.openxmlformats.org/officeDocument/2006/relationships">
+  <p:cSld>
+    <p:spTree>
+      <p:nvGrpSpPr>
+        <p:cNvPr id="1" name=""/>
+        <p:cNvGrpSpPr/>
+        <p:nvPr/>
+      </p:nvGrpSpPr>
+      <p:grpSpPr/>
+      <p:sp>
+        <p:nvSpPr>
+          <p:cNvPr id="2" name="Rectangle 1"/>
+          <p:cNvSpPr/>
+          <p:nvPr/>
+        </p:nvSpPr>
+        <p:spPr>
+          <a:xfrm>
+            <a:off x="0" y="0"/>
+            <a:ext cx="12191695" cy="6858000"/>
+          </a:xfrm>
+          <a:prstGeom prst="rect">
+            <a:avLst/>
+          </a:prstGeom>
+          <a:solidFill>
+            <a:srgbClr val="0D0D1A"/>
+          </a:solidFill>
+          <a:ln>
+            <a:noFill/>
+          </a:ln>
+        </p:spPr>
+        <p:style>
+          <a:lnRef idx="1">
+            <a:schemeClr val="accent1"/>
+          </a:lnRef>
+          <a:fillRef idx="3">
+            <a:schemeClr val="accent1"/>
+          </a:fillRef>
+          <a:effectRef idx="2">
+            <a:schemeClr val="accent1"/>
+          </a:effectRef>
+          <a:fontRef idx="minor">
+            <a:schemeClr val="lt1"/>
+          </a:fontRef>
+        </p:style>
+        <p:txBody>
+          <a:bodyPr rtlCol="0" anchor="ctr"/>
+          <a:lstStyle/>
+          <a:p>
+            <a:pPr algn="ctr"/>
+          </a:p>
+        </p:txBody>
+      </p:sp>
+      <p:sp>
+        <p:nvSpPr>
+          <p:cNvPr id="3" name="TextBox 2"/>
+          <p:cNvSpPr txBox="1"/>
+          <p:nvPr/>
+        </p:nvSpPr>
+        <p:spPr>
+          <a:xfrm>
+            <a:off x="731520" y="365760"/>
+            <a:ext cx="10698480" cy="914400"/>
+          </a:xfrm>
+          <a:prstGeom prst="rect">
+            <a:avLst/>
+          </a:prstGeom>
+          <a:noFill/>
+        </p:spPr>
+        <p:txBody>
+          <a:bodyPr wrap="square">
+            <a:spAutoFit/>
+          </a:bodyPr>
+          <a:lstStyle/>
+          <a:p>
+            <a:pPr>
+              <a:defRPr sz="2400" b="1">
+                <a:solidFill>
+                  <a:srgbClr val="4ECCA3"/>
+                </a:solidFill>
+              </a:defRPr>
+            </a:pPr>
+            <a:r>
+              <a:t>هزینه پنهان · HIDDEN O(N²)  |  کالبدشکافی کد اولیه: چطور دو خط کاتلین به حلقه O(N²) تبدیل شد؟</a:t>
+            </a:r>
+          </a:p>
+          <a:p>
+            <a:pPr>
+              <a:defRPr sz="1400">
+                <a:solidFill>
+                  <a:srgbClr val="969EB4"/>
+                </a:solidFill>
+              </a:defRPr>
+            </a:pPr>
+            <a:r>
+              <a:t>وقتی کامپایلر این دو خط اعلانی را اجرا می‌کند، زیر کاپوت چه فاجعه‌ای رخ می‌دهد؟</a:t>
+            </a:r>
+          </a:p>
+        </p:txBody>
+      </p:sp>
+      <p:sp>
+        <p:nvSpPr>
+          <p:cNvPr id="4" name="Rounded Rectangle 3"/>
+          <p:cNvSpPr/>
+          <p:nvPr/>
+        </p:nvSpPr>
+        <p:spPr>
+          <a:xfrm>
+            <a:off x="731520" y="1463040"/>
+            <a:ext cx="3413759" cy="1325880"/>
+          </a:xfrm>
+          <a:prstGeom prst="roundRect">
+            <a:avLst/>
+          </a:prstGeom>
+          <a:solidFill>
+            <a:srgbClr val="141428"/>
+          </a:solidFill>
+          <a:ln w="19050">
+            <a:solidFill>
+              <a:srgbClr val="E9A84C"/>
+            </a:solidFill>
+          </a:ln>
+        </p:spPr>
+        <p:style>
+          <a:lnRef idx="1">
+            <a:schemeClr val="accent1"/>
+          </a:lnRef>
+          <a:fillRef idx="3">
+            <a:schemeClr val="accent1"/>
+          </a:fillRef>
+          <a:effectRef idx="2">
+            <a:schemeClr val="accent1"/>
+          </a:effectRef>
+          <a:fontRef idx="minor">
+            <a:schemeClr val="lt1"/>
+          </a:fontRef>
+        </p:style>
+        <p:txBody>
+          <a:bodyPr rtlCol="0" anchor="ctr" wrap="square"/>
+          <a:lstStyle/>
+          <a:p>
+            <a:pPr algn="ctr">
+              <a:defRPr sz="1250" b="1">
+                <a:solidFill>
+                  <a:srgbClr val="E9A84C"/>
+                </a:solidFill>
+              </a:defRPr>
+            </a:pPr>
+            <a:r>
+              <a:t>ظاهر فریبنده کاتلین</a:t>
+            </a:r>
+          </a:p>
+          <a:p>
+            <a:pPr>
+              <a:defRPr sz="950">
+                <a:solidFill>
+                  <a:srgbClr val="DDE1F5"/>
+                </a:solidFill>
+              </a:defRPr>
+            </a:pPr>
+            <a:r>
+              <a:t>کد فقط ۲ خط است، هیچ خطای کامپایلری ندارد و تست‌های اولیه با ۲-۳ کارت سریعاً پاس شدند.</a:t>
+            </a:r>
+          </a:p>
+        </p:txBody>
+      </p:sp>
+      <p:sp>
+        <p:nvSpPr>
+          <p:cNvPr id="5" name="Rounded Rectangle 4"/>
+          <p:cNvSpPr/>
+          <p:nvPr/>
+        </p:nvSpPr>
+        <p:spPr>
+          <a:xfrm>
+            <a:off x="4373880" y="1463040"/>
+            <a:ext cx="3413759" cy="1325880"/>
+          </a:xfrm>
+          <a:prstGeom prst="roundRect">
+            <a:avLst/>
+          </a:prstGeom>
+          <a:solidFill>
+            <a:srgbClr val="141428"/>
+          </a:solidFill>
+          <a:ln w="19050">
+            <a:solidFill>
+              <a:srgbClr val="E96C6C"/>
+            </a:solidFill>
+          </a:ln>
+        </p:spPr>
+        <p:style>
+          <a:lnRef idx="1">
+            <a:schemeClr val="accent1"/>
+          </a:lnRef>
+          <a:fillRef idx="3">
+            <a:schemeClr val="accent1"/>
+          </a:fillRef>
+          <a:effectRef idx="2">
+            <a:schemeClr val="accent1"/>
+          </a:effectRef>
+          <a:fontRef idx="minor">
+            <a:schemeClr val="lt1"/>
+          </a:fontRef>
+        </p:style>
+        <p:txBody>
+          <a:bodyPr rtlCol="0" anchor="ctr" wrap="square"/>
+          <a:lstStyle/>
+          <a:p>
+            <a:pPr algn="ctr">
+              <a:defRPr sz="1250" b="1">
+                <a:solidFill>
+                  <a:srgbClr val="E96C6C"/>
+                </a:solidFill>
+              </a:defRPr>
+            </a:pPr>
+            <a:r>
+              <a:t>زیر کاپوت عملگر in</a:t>
+            </a:r>
+          </a:p>
+          <a:p>
+            <a:pPr>
+              <a:defRPr sz="950">
+                <a:solidFill>
+                  <a:srgbClr val="DDE1F5"/>
+                </a:solidFill>
+              </a:defRPr>
+            </a:pPr>
+            <a:r>
+              <a:t>در List عملگر in معادل contains() است که کل لیست را خطی با O(M) جستجو می‌کند.</a:t>
+            </a:r>
+          </a:p>
+        </p:txBody>
+      </p:sp>
+      <p:sp>
+        <p:nvSpPr>
+          <p:cNvPr id="6" name="Rounded Rectangle 5"/>
+          <p:cNvSpPr/>
+          <p:nvPr/>
+        </p:nvSpPr>
+        <p:spPr>
+          <a:xfrm>
+            <a:off x="8016239" y="1463040"/>
+            <a:ext cx="3413759" cy="1325880"/>
+          </a:xfrm>
+          <a:prstGeom prst="roundRect">
+            <a:avLst/>
+          </a:prstGeom>
+          <a:solidFill>
+            <a:srgbClr val="141428"/>
+          </a:solidFill>
+          <a:ln w="19050">
+            <a:solidFill>
+              <a:srgbClr val="E96C6C"/>
+            </a:solidFill>
+          </a:ln>
+        </p:spPr>
+        <p:style>
+          <a:lnRef idx="1">
+            <a:schemeClr val="accent1"/>
+          </a:lnRef>
+          <a:fillRef idx="3">
+            <a:schemeClr val="accent1"/>
+          </a:fillRef>
+          <a:effectRef idx="2">
+            <a:schemeClr val="accent1"/>
+          </a:effectRef>
+          <a:fontRef idx="minor">
+            <a:schemeClr val="lt1"/>
+          </a:fontRef>
+        </p:style>
+        <p:txBody>
+          <a:bodyPr rtlCol="0" anchor="ctr" wrap="square"/>
+          <a:lstStyle/>
+          <a:p>
+            <a:pPr algn="ctr">
+              <a:defRPr sz="1250" b="1">
+                <a:solidFill>
+                  <a:srgbClr val="E96C6C"/>
+                </a:solidFill>
+              </a:defRPr>
+            </a:pPr>
+            <a:r>
+              <a:t>پیچیدگی نمایی O(N²)</a:t>
+            </a:r>
+          </a:p>
+          <a:p>
+            <a:pPr>
+              <a:defRPr sz="950">
+                <a:solidFill>
+                  <a:srgbClr val="DDE1F5"/>
+                </a:solidFill>
+              </a:defRPr>
+            </a:pPr>
+            <a:r>
+              <a:t>برای دو لیست با اندازه N و M، تعداد مقایسه‌ها برابر 2×N×M است (با ۱۰۰ کارت = ۲۰,۰۰۰ مقایسه!).</a:t>
+            </a:r>
+          </a:p>
+        </p:txBody>
+      </p:sp>
+      <p:sp>
+        <p:nvSpPr>
+          <p:cNvPr id="7" name="Rounded Rectangle 6"/>
+          <p:cNvSpPr/>
+          <p:nvPr/>
+        </p:nvSpPr>
+        <p:spPr>
+          <a:xfrm>
+            <a:off x="731520" y="2926080"/>
+            <a:ext cx="10698480" cy="1920240"/>
+          </a:xfrm>
+          <a:prstGeom prst="roundRect">
+            <a:avLst/>
+          </a:prstGeom>
+          <a:solidFill>
+            <a:srgbClr val="08080F"/>
+          </a:solidFill>
+          <a:ln w="12700">
+            <a:solidFill>
+              <a:srgbClr val="7C8FF5"/>
+            </a:solidFill>
+          </a:ln>
+        </p:spPr>
+        <p:style>
+          <a:lnRef idx="1">
+            <a:schemeClr val="accent1"/>
+          </a:lnRef>
+          <a:fillRef idx="3">
+            <a:schemeClr val="accent1"/>
+          </a:fillRef>
+          <a:effectRef idx="2">
+            <a:schemeClr val="accent1"/>
+          </a:effectRef>
+          <a:fontRef idx="minor">
+            <a:schemeClr val="lt1"/>
+          </a:fontRef>
+        </p:style>
+        <p:txBody>
+          <a:bodyPr rtlCol="0" anchor="ctr" wrap="none"/>
+          <a:lstStyle/>
+          <a:p>
+            <a:pPr algn="l">
+              <a:defRPr sz="1000">
+                <a:solidFill>
+                  <a:srgbClr val="4ECCA3"/>
+                </a:solidFill>
+                <a:latin typeface="Consolas"/>
+              </a:defRPr>
+            </a:pPr>
+            <a:r>
+              <a:t>internal fun &lt;T&gt; syncCardStackState(</a:t>
+            </a:r>
+          </a:p>
+          <a:p>
+            <a:pPr algn="l">
+              <a:defRPr sz="1000">
+                <a:solidFill>
+                  <a:srgbClr val="4ECCA3"/>
+                </a:solidFill>
+                <a:latin typeface="Consolas"/>
+              </a:defRPr>
+            </a:pPr>
+            <a:r>
+              <a:t>    currentItems: List&lt;T&gt;,</a:t>
+            </a:r>
+          </a:p>
+          <a:p>
+            <a:pPr algn="l">
+              <a:defRPr sz="1000">
+                <a:solidFill>
+                  <a:srgbClr val="4ECCA3"/>
+                </a:solidFill>
+                <a:latin typeface="Consolas"/>
+              </a:defRPr>
+            </a:pPr>
+            <a:r>
+              <a:t>    newCardsList: List&lt;T&gt;,</a:t>
+            </a:r>
+          </a:p>
+          <a:p>
+            <a:pPr algn="l">
+              <a:defRPr sz="1000">
+                <a:solidFill>
+                  <a:srgbClr val="4ECCA3"/>
+                </a:solidFill>
+                <a:latin typeface="Consolas"/>
+              </a:defRPr>
+            </a:pPr>
+            <a:r>
+              <a:t>): List&lt;T&gt; {</a:t>
+            </a:r>
+          </a:p>
+          <a:p>
+            <a:pPr algn="l">
+              <a:defRPr sz="1000">
+                <a:solidFill>
+                  <a:srgbClr val="4ECCA3"/>
+                </a:solidFill>
+                <a:latin typeface="Consolas"/>
+              </a:defRPr>
+            </a:pPr>
+            <a:r>
+              <a:t>    val remainingOldItems = currentItems.filter { it in newCardsList } // Time: O(N × M), Space: O(N)</a:t>
+            </a:r>
+          </a:p>
+          <a:p>
+            <a:pPr algn="l">
+              <a:defRPr sz="1000">
+                <a:solidFill>
+                  <a:srgbClr val="4ECCA3"/>
+                </a:solidFill>
+                <a:latin typeface="Consolas"/>
+              </a:defRPr>
+            </a:pPr>
+            <a:r>
+              <a:t>    val newItems = newCardsList.filter { it !in currentItems } // Time: O(M × N), Space: O(M)</a:t>
+            </a:r>
+          </a:p>
+          <a:p>
+            <a:pPr algn="l">
+              <a:defRPr sz="1000">
+                <a:solidFill>
+                  <a:srgbClr val="4ECCA3"/>
+                </a:solidFill>
+                <a:latin typeface="Consolas"/>
+              </a:defRPr>
+            </a:pPr>
+            <a:r>
+              <a:t>    return remainingOldItems + newItems // Time: O(N + M), Space: O(N + M)</a:t>
+            </a:r>
+          </a:p>
+          <a:p>
+            <a:pPr algn="l">
+              <a:defRPr sz="1000">
+                <a:solidFill>
+                  <a:srgbClr val="4ECCA3"/>
+                </a:solidFill>
+                <a:latin typeface="Consolas"/>
+              </a:defRPr>
+            </a:pPr>
+            <a:r>
+              <a:t>}</a:t>
+            </a:r>
+          </a:p>
+          <a:p>
+            <a:pPr algn="l">
+              <a:defRPr sz="1000">
+                <a:solidFill>
+                  <a:srgbClr val="4ECCA3"/>
+                </a:solidFill>
+                <a:latin typeface="Consolas"/>
+              </a:defRPr>
+            </a:pPr>
+            <a:r>
+              <a:t>// Overall Time: O(N × M) ≈ O(N²) — linear List.contains() scans | Overall Space: O(N + M)</a:t>
+            </a:r>
+          </a:p>
+        </p:txBody>
+      </p:sp>
+    </p:spTree>
+  </p:cSld>
+  <p:clrMapOvr>
+    <a:masterClrMapping/>
+  </p:clrMapOvr>
+</p:sld>
+</file>
+
+<file path=ppt/slides/slide36.xml><?xml version="1.0" encoding="utf-8"?>
+<p:sld xmlns:a="http://schemas.openxmlformats.org/drawingml/2006/main" xmlns:p="http://schemas.openxmlformats.org/presentationml/2006/main" xmlns:r="http://schemas.openxmlformats.org/officeDocument/2006/relationships">
+  <p:cSld>
+    <p:spTree>
+      <p:nvGrpSpPr>
+        <p:cNvPr id="1" name=""/>
+        <p:cNvGrpSpPr/>
+        <p:nvPr/>
+      </p:nvGrpSpPr>
+      <p:grpSpPr/>
+      <p:sp>
+        <p:nvSpPr>
+          <p:cNvPr id="2" name="Rectangle 1"/>
+          <p:cNvSpPr/>
+          <p:nvPr/>
+        </p:nvSpPr>
+        <p:spPr>
+          <a:xfrm>
+            <a:off x="0" y="0"/>
+            <a:ext cx="12191695" cy="6858000"/>
+          </a:xfrm>
+          <a:prstGeom prst="rect">
+            <a:avLst/>
+          </a:prstGeom>
+          <a:solidFill>
+            <a:srgbClr val="0D0D1A"/>
+          </a:solidFill>
+          <a:ln>
+            <a:noFill/>
+          </a:ln>
+        </p:spPr>
+        <p:style>
+          <a:lnRef idx="1">
+            <a:schemeClr val="accent1"/>
+          </a:lnRef>
+          <a:fillRef idx="3">
+            <a:schemeClr val="accent1"/>
+          </a:fillRef>
+          <a:effectRef idx="2">
+            <a:schemeClr val="accent1"/>
+          </a:effectRef>
+          <a:fontRef idx="minor">
+            <a:schemeClr val="lt1"/>
+          </a:fontRef>
+        </p:style>
+        <p:txBody>
+          <a:bodyPr rtlCol="0" anchor="ctr"/>
+          <a:lstStyle/>
+          <a:p>
+            <a:pPr algn="ctr"/>
+          </a:p>
+        </p:txBody>
+      </p:sp>
+      <p:sp>
+        <p:nvSpPr>
+          <p:cNvPr id="3" name="TextBox 2"/>
+          <p:cNvSpPr txBox="1"/>
+          <p:nvPr/>
+        </p:nvSpPr>
+        <p:spPr>
+          <a:xfrm>
+            <a:off x="731520" y="365760"/>
+            <a:ext cx="10698480" cy="914400"/>
+          </a:xfrm>
+          <a:prstGeom prst="rect">
+            <a:avLst/>
+          </a:prstGeom>
+          <a:noFill/>
+        </p:spPr>
+        <p:txBody>
+          <a:bodyPr wrap="square">
+            <a:spAutoFit/>
+          </a:bodyPr>
+          <a:lstStyle/>
+          <a:p>
+            <a:pPr>
+              <a:defRPr sz="2400" b="1">
+                <a:solidFill>
+                  <a:srgbClr val="4ECCA3"/>
+                </a:solidFill>
+              </a:defRPr>
+            </a:pPr>
+            <a:r>
+              <a:t>تحلیل گلوگاه · BOTTLENECK ANALYSIS  |  کالبدشکافی ایراد: هزینه پنهان و افت فریم در UI</a:t>
+            </a:r>
+          </a:p>
+          <a:p>
+            <a:pPr>
+              <a:defRPr sz="1400">
+                <a:solidFill>
+                  <a:srgbClr val="969EB4"/>
+                </a:solidFill>
+              </a:defRPr>
+            </a:pPr>
+            <a:r>
+              <a:t>چرا این کد در محیط پروداکشن باعث لگ و مصرف غیرعادی باتری می‌شود؟</a:t>
+            </a:r>
+          </a:p>
+        </p:txBody>
+      </p:sp>
+      <p:sp>
+        <p:nvSpPr>
+          <p:cNvPr id="4" name="Rounded Rectangle 3"/>
+          <p:cNvSpPr/>
+          <p:nvPr/>
+        </p:nvSpPr>
+        <p:spPr>
+          <a:xfrm>
+            <a:off x="731520" y="1463040"/>
+            <a:ext cx="5234940" cy="2011680"/>
+          </a:xfrm>
+          <a:prstGeom prst="roundRect">
+            <a:avLst/>
+          </a:prstGeom>
+          <a:solidFill>
+            <a:srgbClr val="141428"/>
+          </a:solidFill>
+          <a:ln w="19050">
+            <a:solidFill>
+              <a:srgbClr val="E96C6C"/>
+            </a:solidFill>
+          </a:ln>
+        </p:spPr>
+        <p:style>
+          <a:lnRef idx="1">
+            <a:schemeClr val="accent1"/>
+          </a:lnRef>
+          <a:fillRef idx="3">
+            <a:schemeClr val="accent1"/>
+          </a:fillRef>
+          <a:effectRef idx="2">
+            <a:schemeClr val="accent1"/>
+          </a:effectRef>
+          <a:fontRef idx="minor">
+            <a:schemeClr val="lt1"/>
+          </a:fontRef>
+        </p:style>
+        <p:txBody>
+          <a:bodyPr rtlCol="0" anchor="ctr" wrap="square"/>
+          <a:lstStyle/>
+          <a:p>
+            <a:pPr algn="ctr">
+              <a:defRPr sz="1400" b="1">
+                <a:solidFill>
+                  <a:srgbClr val="E96C6C"/>
+                </a:solidFill>
+              </a:defRPr>
+            </a:pPr>
+            <a:r>
+              <a:t>❌ پیمایش خطی مداوم (Linear Scan)</a:t>
+            </a:r>
+          </a:p>
+          <a:p>
+            <a:pPr>
+              <a:defRPr sz="1100">
+                <a:solidFill>
+                  <a:srgbClr val="DDE1F5"/>
+                </a:solidFill>
+              </a:defRPr>
+            </a:pPr>
+            <a:r>
+              <a:t>ساختار List ترتیبی است؛ ترکیب آن با filter یک حلقه تو در تو (Nested Loop) پنهان است.</a:t>
+            </a:r>
+          </a:p>
+        </p:txBody>
+      </p:sp>
+      <p:sp>
+        <p:nvSpPr>
+          <p:cNvPr id="5" name="Rounded Rectangle 4"/>
+          <p:cNvSpPr/>
+          <p:nvPr/>
+        </p:nvSpPr>
+        <p:spPr>
+          <a:xfrm>
+            <a:off x="6195059" y="1463040"/>
+            <a:ext cx="5234940" cy="2011680"/>
+          </a:xfrm>
+          <a:prstGeom prst="roundRect">
+            <a:avLst/>
+          </a:prstGeom>
+          <a:solidFill>
+            <a:srgbClr val="141428"/>
+          </a:solidFill>
+          <a:ln w="19050">
+            <a:solidFill>
+              <a:srgbClr val="E9A84C"/>
+            </a:solidFill>
+          </a:ln>
+        </p:spPr>
+        <p:style>
+          <a:lnRef idx="1">
+            <a:schemeClr val="accent1"/>
+          </a:lnRef>
+          <a:fillRef idx="3">
+            <a:schemeClr val="accent1"/>
+          </a:fillRef>
+          <a:effectRef idx="2">
+            <a:schemeClr val="accent1"/>
+          </a:effectRef>
+          <a:fontRef idx="minor">
+            <a:schemeClr val="lt1"/>
+          </a:fontRef>
+        </p:style>
+        <p:txBody>
+          <a:bodyPr rtlCol="0" anchor="ctr" wrap="square"/>
+          <a:lstStyle/>
+          <a:p>
+            <a:pPr algn="ctr">
+              <a:defRPr sz="1400" b="1">
+                <a:solidFill>
+                  <a:srgbClr val="E9A84C"/>
+                </a:solidFill>
+              </a:defRPr>
+            </a:pPr>
+            <a:r>
+              <a:t>⚠️ افت فریم و لگ در کامپوز (Jank)</a:t>
+            </a:r>
+          </a:p>
+          <a:p>
+            <a:pPr>
+              <a:defRPr sz="1100">
+                <a:solidFill>
+                  <a:srgbClr val="DDE1F5"/>
+                </a:solidFill>
+              </a:defRPr>
+            </a:pPr>
+            <a:r>
+              <a:t>در Compose محاسبه State روی Main Thread است؛ هزاران مقایسه باعث گذر از بودجه ۱۶ میلی‌ثانیه‌ای فریم می‌شود.</a:t>
+            </a:r>
+          </a:p>
+        </p:txBody>
+      </p:sp>
+      <p:sp>
+        <p:nvSpPr>
+          <p:cNvPr id="6" name="TextBox 5"/>
+          <p:cNvSpPr txBox="1"/>
+          <p:nvPr/>
+        </p:nvSpPr>
+        <p:spPr>
+          <a:xfrm>
+            <a:off x="731520" y="3611880"/>
+            <a:ext cx="10698480" cy="1463040"/>
+          </a:xfrm>
+          <a:prstGeom prst="rect">
+            <a:avLst/>
+          </a:prstGeom>
+          <a:noFill/>
+        </p:spPr>
+        <p:txBody>
+          <a:bodyPr wrap="square">
+            <a:spAutoFit/>
+          </a:bodyPr>
+          <a:lstStyle/>
+          <a:p>
+            <a:pPr>
+              <a:defRPr sz="1300">
+                <a:solidFill>
+                  <a:srgbClr val="DDE1F5"/>
+                </a:solidFill>
+              </a:defRPr>
+            </a:pPr>
+            <a:r>
+              <a:t>• پنهان از چشم لینترها: Detekt و کامپایلر ایراد سینتکسی نمی‌گیرند؛ اما Profiler فریز فریم‌ها را ثبت می‌کند.</a:t>
+            </a:r>
+          </a:p>
+          <a:p>
+            <a:pPr>
+              <a:defRPr sz="1300">
+                <a:solidFill>
+                  <a:srgbClr val="DDE1F5"/>
+                </a:solidFill>
+              </a:defRPr>
+            </a:pPr>
+            <a:r>
+              <a:t>• در مقیاس ۵۰ تا ۱۰۰ کارت: ۲۰,۰۰۰ عملیات مقایسه سنگین شیء رخ می‌دهد.</a:t>
+            </a:r>
+          </a:p>
+        </p:txBody>
+      </p:sp>
+      <p:sp>
+        <p:nvSpPr>
+          <p:cNvPr id="7" name="Rounded Rectangle 6"/>
+          <p:cNvSpPr/>
+          <p:nvPr/>
+        </p:nvSpPr>
+        <p:spPr>
+          <a:xfrm>
+            <a:off x="731520" y="5486400"/>
+            <a:ext cx="10698480" cy="822960"/>
+          </a:xfrm>
+          <a:prstGeom prst="roundRect">
+            <a:avLst/>
+          </a:prstGeom>
+          <a:solidFill>
+            <a:srgbClr val="1C1C38"/>
+          </a:solidFill>
+          <a:ln w="12700">
+            <a:solidFill>
+              <a:srgbClr val="7C8FF5"/>
+            </a:solidFill>
+          </a:ln>
+        </p:spPr>
+        <p:style>
+          <a:lnRef idx="1">
+            <a:schemeClr val="accent1"/>
+          </a:lnRef>
+          <a:fillRef idx="3">
+            <a:schemeClr val="accent1"/>
+          </a:fillRef>
+          <a:effectRef idx="2">
+            <a:schemeClr val="accent1"/>
+          </a:effectRef>
+          <a:fontRef idx="minor">
+            <a:schemeClr val="lt1"/>
+          </a:fontRef>
+        </p:style>
+        <p:txBody>
+          <a:bodyPr rtlCol="0" anchor="ctr" wrap="square"/>
+          <a:lstStyle/>
+          <a:p>
+            <a:pPr algn="ctr">
+              <a:defRPr sz="1200" i="1">
+                <a:solidFill>
+                  <a:srgbClr val="7C8FF5"/>
+                </a:solidFill>
+              </a:defRPr>
+            </a:pPr>
+            <a:r>
+              <a:t>«در ۶۰ فریم بر ثانیه، هر فریم فقط ۱۶ میلی‌ثانیه زمان دارد؛ حلقه‌های O(N²) اولین قاتل روانی UI هستند.»</a:t>
+            </a:r>
+          </a:p>
+        </p:txBody>
+      </p:sp>
+    </p:spTree>
+  </p:cSld>
+  <p:clrMapOvr>
+    <a:masterClrMapping/>
+  </p:clrMapOvr>
+</p:sld>
+</file>
+
+<file path=ppt/slides/slide37.xml><?xml version="1.0" encoding="utf-8"?>
+<p:sld xmlns:a="http://schemas.openxmlformats.org/drawingml/2006/main" xmlns:p="http://schemas.openxmlformats.org/presentationml/2006/main" xmlns:r="http://schemas.openxmlformats.org/officeDocument/2006/relationships">
+  <p:cSld>
+    <p:spTree>
+      <p:nvGrpSpPr>
+        <p:cNvPr id="1" name=""/>
+        <p:cNvGrpSpPr/>
+        <p:nvPr/>
+      </p:nvGrpSpPr>
+      <p:grpSpPr/>
+      <p:sp>
+        <p:nvSpPr>
+          <p:cNvPr id="2" name="Rectangle 1"/>
+          <p:cNvSpPr/>
+          <p:nvPr/>
+        </p:nvSpPr>
+        <p:spPr>
+          <a:xfrm>
+            <a:off x="0" y="0"/>
+            <a:ext cx="12191695" cy="6858000"/>
+          </a:xfrm>
+          <a:prstGeom prst="rect">
+            <a:avLst/>
+          </a:prstGeom>
+          <a:solidFill>
+            <a:srgbClr val="0D0D1A"/>
+          </a:solidFill>
+          <a:ln>
+            <a:noFill/>
+          </a:ln>
+        </p:spPr>
+        <p:style>
+          <a:lnRef idx="1">
+            <a:schemeClr val="accent1"/>
+          </a:lnRef>
+          <a:fillRef idx="3">
+            <a:schemeClr val="accent1"/>
+          </a:fillRef>
+          <a:effectRef idx="2">
+            <a:schemeClr val="accent1"/>
+          </a:effectRef>
+          <a:fontRef idx="minor">
+            <a:schemeClr val="lt1"/>
+          </a:fontRef>
+        </p:style>
+        <p:txBody>
+          <a:bodyPr rtlCol="0" anchor="ctr"/>
+          <a:lstStyle/>
+          <a:p>
+            <a:pPr algn="ctr"/>
+          </a:p>
+        </p:txBody>
+      </p:sp>
+      <p:sp>
+        <p:nvSpPr>
+          <p:cNvPr id="3" name="TextBox 2"/>
+          <p:cNvSpPr txBox="1"/>
+          <p:nvPr/>
+        </p:nvSpPr>
+        <p:spPr>
+          <a:xfrm>
+            <a:off x="731520" y="365760"/>
+            <a:ext cx="10698480" cy="914400"/>
+          </a:xfrm>
+          <a:prstGeom prst="rect">
+            <a:avLst/>
+          </a:prstGeom>
+          <a:noFill/>
+        </p:spPr>
+        <p:txBody>
+          <a:bodyPr wrap="square">
+            <a:spAutoFit/>
+          </a:bodyPr>
+          <a:lstStyle/>
+          <a:p>
+            <a:pPr>
+              <a:defRPr sz="2400" b="1">
+                <a:solidFill>
+                  <a:srgbClr val="4ECCA3"/>
+                </a:solidFill>
+              </a:defRPr>
+            </a:pPr>
+            <a:r>
+              <a:t>کدنویسی تمیز · OPTIMAL O(N)  |  راه‌حل بهینه: جهش به O(N) با HashSet و تحلیل چرایی</a:t>
+            </a:r>
+          </a:p>
+          <a:p>
+            <a:pPr>
+              <a:defRPr sz="1400">
+                <a:solidFill>
+                  <a:srgbClr val="969EB4"/>
+                </a:solidFill>
+              </a:defRPr>
+            </a:pPr>
+            <a:r>
+              <a:t>به‌کارگیری جدول هش برای جستجوی آنی O(1) و کاهش زمان کل به خطی O(N + M):</a:t>
+            </a:r>
+          </a:p>
+        </p:txBody>
+      </p:sp>
+      <p:sp>
+        <p:nvSpPr>
+          <p:cNvPr id="4" name="Rounded Rectangle 3"/>
+          <p:cNvSpPr/>
+          <p:nvPr/>
+        </p:nvSpPr>
+        <p:spPr>
+          <a:xfrm>
+            <a:off x="731520" y="1463040"/>
+            <a:ext cx="5234940" cy="1325880"/>
+          </a:xfrm>
+          <a:prstGeom prst="roundRect">
+            <a:avLst/>
+          </a:prstGeom>
+          <a:solidFill>
+            <a:srgbClr val="141428"/>
+          </a:solidFill>
+          <a:ln w="19050">
+            <a:solidFill>
+              <a:srgbClr val="4ECCA3"/>
+            </a:solidFill>
+          </a:ln>
+        </p:spPr>
+        <p:style>
+          <a:lnRef idx="1">
+            <a:schemeClr val="accent1"/>
+          </a:lnRef>
+          <a:fillRef idx="3">
+            <a:schemeClr val="accent1"/>
+          </a:fillRef>
+          <a:effectRef idx="2">
+            <a:schemeClr val="accent1"/>
+          </a:effectRef>
+          <a:fontRef idx="minor">
+            <a:schemeClr val="lt1"/>
+          </a:fontRef>
+        </p:style>
+        <p:txBody>
+          <a:bodyPr rtlCol="0" anchor="ctr" wrap="square"/>
+          <a:lstStyle/>
+          <a:p>
+            <a:pPr algn="ctr">
+              <a:defRPr sz="1250" b="1">
+                <a:solidFill>
+                  <a:srgbClr val="4ECCA3"/>
+                </a:solidFill>
+              </a:defRPr>
+            </a:pPr>
+            <a:r>
+              <a:t>⚡ جستجوی آنی O(1)</a:t>
+            </a:r>
+          </a:p>
+          <a:p>
+            <a:pPr>
+              <a:defRPr sz="950">
+                <a:solidFill>
+                  <a:srgbClr val="DDE1F5"/>
+                </a:solidFill>
+              </a:defRPr>
+            </a:pPr>
+            <a:r>
+              <a:t>با toSet() جدول هش ساخته می‌شود و جستجو با تابع هش در زمان ثابت انجام می‌گیرد.</a:t>
+            </a:r>
+          </a:p>
+        </p:txBody>
+      </p:sp>
+      <p:sp>
+        <p:nvSpPr>
+          <p:cNvPr id="5" name="Rounded Rectangle 4"/>
+          <p:cNvSpPr/>
+          <p:nvPr/>
+        </p:nvSpPr>
+        <p:spPr>
+          <a:xfrm>
+            <a:off x="6195059" y="1463040"/>
+            <a:ext cx="5234940" cy="1325880"/>
+          </a:xfrm>
+          <a:prstGeom prst="roundRect">
+            <a:avLst/>
+          </a:prstGeom>
+          <a:solidFill>
+            <a:srgbClr val="141428"/>
+          </a:solidFill>
+          <a:ln w="19050">
+            <a:solidFill>
+              <a:srgbClr val="4ECCA3"/>
+            </a:solidFill>
+          </a:ln>
+        </p:spPr>
+        <p:style>
+          <a:lnRef idx="1">
+            <a:schemeClr val="accent1"/>
+          </a:lnRef>
+          <a:fillRef idx="3">
+            <a:schemeClr val="accent1"/>
+          </a:fillRef>
+          <a:effectRef idx="2">
+            <a:schemeClr val="accent1"/>
+          </a:effectRef>
+          <a:fontRef idx="minor">
+            <a:schemeClr val="lt1"/>
+          </a:fontRef>
+        </p:style>
+        <p:txBody>
+          <a:bodyPr rtlCol="0" anchor="ctr" wrap="square"/>
+          <a:lstStyle/>
+          <a:p>
+            <a:pPr algn="ctr">
+              <a:defRPr sz="1250" b="1">
+                <a:solidFill>
+                  <a:srgbClr val="4ECCA3"/>
+                </a:solidFill>
+              </a:defRPr>
+            </a:pPr>
+            <a:r>
+              <a:t>🚀 کاهش به خطی O(N + M)</a:t>
+            </a:r>
+          </a:p>
+          <a:p>
+            <a:pPr>
+              <a:defRPr sz="950">
+                <a:solidFill>
+                  <a:srgbClr val="DDE1F5"/>
+                </a:solidFill>
+              </a:defRPr>
+            </a:pPr>
+            <a:r>
+              <a:t>کل هزینه به O(N + M) تبدیل شده و حتی برای ۱۰,۰۰۰ کارت در کسری از میلی‌ثانیه اجرا می‌شود.</a:t>
+            </a:r>
+          </a:p>
+        </p:txBody>
+      </p:sp>
+      <p:sp>
+        <p:nvSpPr>
+          <p:cNvPr id="6" name="Rounded Rectangle 5"/>
+          <p:cNvSpPr/>
+          <p:nvPr/>
+        </p:nvSpPr>
+        <p:spPr>
+          <a:xfrm>
+            <a:off x="731520" y="2926080"/>
+            <a:ext cx="10698480" cy="2286000"/>
+          </a:xfrm>
+          <a:prstGeom prst="roundRect">
+            <a:avLst/>
+          </a:prstGeom>
+          <a:solidFill>
+            <a:srgbClr val="08080F"/>
+          </a:solidFill>
+          <a:ln w="12700">
+            <a:solidFill>
+              <a:srgbClr val="7C8FF5"/>
+            </a:solidFill>
+          </a:ln>
+        </p:spPr>
+        <p:style>
+          <a:lnRef idx="1">
+            <a:schemeClr val="accent1"/>
+          </a:lnRef>
+          <a:fillRef idx="3">
+            <a:schemeClr val="accent1"/>
+          </a:fillRef>
+          <a:effectRef idx="2">
+            <a:schemeClr val="accent1"/>
+          </a:effectRef>
+          <a:fontRef idx="minor">
+            <a:schemeClr val="lt1"/>
+          </a:fontRef>
+        </p:style>
+        <p:txBody>
+          <a:bodyPr rtlCol="0" anchor="ctr" wrap="none"/>
+          <a:lstStyle/>
+          <a:p>
+            <a:pPr algn="l">
+              <a:defRPr sz="1000">
+                <a:solidFill>
+                  <a:srgbClr val="4ECCA3"/>
+                </a:solidFill>
+                <a:latin typeface="Consolas"/>
+              </a:defRPr>
+            </a:pPr>
+            <a:r>
+              <a:t>internal fun &lt;T&gt; syncCardStackState(</a:t>
+            </a:r>
+          </a:p>
+          <a:p>
+            <a:pPr algn="l">
+              <a:defRPr sz="1000">
+                <a:solidFill>
+                  <a:srgbClr val="4ECCA3"/>
+                </a:solidFill>
+                <a:latin typeface="Consolas"/>
+              </a:defRPr>
+            </a:pPr>
+            <a:r>
+              <a:t>    currentItems: List&lt;T&gt;,</a:t>
+            </a:r>
+          </a:p>
+          <a:p>
+            <a:pPr algn="l">
+              <a:defRPr sz="1000">
+                <a:solidFill>
+                  <a:srgbClr val="4ECCA3"/>
+                </a:solidFill>
+                <a:latin typeface="Consolas"/>
+              </a:defRPr>
+            </a:pPr>
+            <a:r>
+              <a:t>    newCardsList: List&lt;T&gt;,</a:t>
+            </a:r>
+          </a:p>
+          <a:p>
+            <a:pPr algn="l">
+              <a:defRPr sz="1000">
+                <a:solidFill>
+                  <a:srgbClr val="4ECCA3"/>
+                </a:solidFill>
+                <a:latin typeface="Consolas"/>
+              </a:defRPr>
+            </a:pPr>
+            <a:r>
+              <a:t>): List&lt;T&gt; {</a:t>
+            </a:r>
+          </a:p>
+          <a:p>
+            <a:pPr algn="l">
+              <a:defRPr sz="1000">
+                <a:solidFill>
+                  <a:srgbClr val="4ECCA3"/>
+                </a:solidFill>
+                <a:latin typeface="Consolas"/>
+              </a:defRPr>
+            </a:pPr>
+            <a:r>
+              <a:t>    val newCardsSet = newCardsList.toSet() // Time: O(M), Space: O(M)</a:t>
+            </a:r>
+          </a:p>
+          <a:p>
+            <a:pPr algn="l">
+              <a:defRPr sz="1000">
+                <a:solidFill>
+                  <a:srgbClr val="4ECCA3"/>
+                </a:solidFill>
+                <a:latin typeface="Consolas"/>
+              </a:defRPr>
+            </a:pPr>
+            <a:r>
+              <a:t>    val currentItemsSet = currentItems.toSet() // Time: O(N), Space: O(N)</a:t>
+            </a:r>
+          </a:p>
+          <a:p>
+            <a:pPr algn="l">
+              <a:defRPr sz="1000">
+                <a:solidFill>
+                  <a:srgbClr val="4ECCA3"/>
+                </a:solidFill>
+                <a:latin typeface="Consolas"/>
+              </a:defRPr>
+            </a:pPr>
+            <a:r>
+              <a:t>    val remainingOldItems = currentItems.filter { it in newCardsSet } // Time: O(N), Space: O(N)</a:t>
+            </a:r>
+          </a:p>
+          <a:p>
+            <a:pPr algn="l">
+              <a:defRPr sz="1000">
+                <a:solidFill>
+                  <a:srgbClr val="4ECCA3"/>
+                </a:solidFill>
+                <a:latin typeface="Consolas"/>
+              </a:defRPr>
+            </a:pPr>
+            <a:r>
+              <a:t>    val newItems = newCardsList.filter { it !in currentItemsSet } // Time: O(M), Space: O(M)</a:t>
+            </a:r>
+          </a:p>
+          <a:p>
+            <a:pPr algn="l">
+              <a:defRPr sz="1000">
+                <a:solidFill>
+                  <a:srgbClr val="4ECCA3"/>
+                </a:solidFill>
+                <a:latin typeface="Consolas"/>
+              </a:defRPr>
+            </a:pPr>
+            <a:r>
+              <a:t>    return remainingOldItems + newItems // Time: O(N + M), Space: O(N + M)</a:t>
+            </a:r>
+          </a:p>
+          <a:p>
+            <a:pPr algn="l">
+              <a:defRPr sz="1000">
+                <a:solidFill>
+                  <a:srgbClr val="4ECCA3"/>
+                </a:solidFill>
+                <a:latin typeface="Consolas"/>
+              </a:defRPr>
+            </a:pPr>
+            <a:r>
+              <a:t>}</a:t>
+            </a:r>
+          </a:p>
+          <a:p>
+            <a:pPr algn="l">
+              <a:defRPr sz="1000">
+                <a:solidFill>
+                  <a:srgbClr val="4ECCA3"/>
+                </a:solidFill>
+                <a:latin typeface="Consolas"/>
+              </a:defRPr>
+            </a:pPr>
+            <a:r>
+              <a:t>// Overall Time: O(N + M) — linear time (60 FPS) | Auxiliary Space: O(N + M)</a:t>
+            </a:r>
+          </a:p>
+        </p:txBody>
+      </p:sp>
+      <p:sp>
+        <p:nvSpPr>
+          <p:cNvPr id="7" name="Rounded Rectangle 6"/>
+          <p:cNvSpPr/>
+          <p:nvPr/>
+        </p:nvSpPr>
+        <p:spPr>
+          <a:xfrm>
+            <a:off x="731520" y="5486400"/>
+            <a:ext cx="10698480" cy="822960"/>
+          </a:xfrm>
+          <a:prstGeom prst="roundRect">
+            <a:avLst/>
+          </a:prstGeom>
+          <a:solidFill>
+            <a:srgbClr val="1C1C38"/>
+          </a:solidFill>
+          <a:ln w="12700">
+            <a:solidFill>
+              <a:srgbClr val="7C8FF5"/>
+            </a:solidFill>
+          </a:ln>
+        </p:spPr>
+        <p:style>
+          <a:lnRef idx="1">
+            <a:schemeClr val="accent1"/>
+          </a:lnRef>
+          <a:fillRef idx="3">
+            <a:schemeClr val="accent1"/>
+          </a:fillRef>
+          <a:effectRef idx="2">
+            <a:schemeClr val="accent1"/>
+          </a:effectRef>
+          <a:fontRef idx="minor">
+            <a:schemeClr val="lt1"/>
+          </a:fontRef>
+        </p:style>
+        <p:txBody>
+          <a:bodyPr rtlCol="0" anchor="ctr" wrap="square"/>
+          <a:lstStyle/>
+          <a:p>
+            <a:pPr algn="ctr">
+              <a:defRPr sz="1200" i="1">
+                <a:solidFill>
+                  <a:srgbClr val="7C8FF5"/>
+                </a:solidFill>
+              </a:defRPr>
+            </a:pPr>
+            <a:r>
+              <a:t>«قاعده طلایی: همیشه پیش از فیلتر یا مقایسه اشتراک دو لیست در کاتلین، لیست مرجع را به Set تبدیل کنید.»</a:t>
+            </a:r>
+          </a:p>
+        </p:txBody>
+      </p:sp>
+    </p:spTree>
+  </p:cSld>
+  <p:clrMapOvr>
+    <a:masterClrMapping/>
+  </p:clrMapOvr>
+</p:sld>
+</file>
+
+<file path=ppt/slides/slide38.xml><?xml version="1.0" encoding="utf-8"?>
+<p:sld xmlns:a="http://schemas.openxmlformats.org/drawingml/2006/main" xmlns:p="http://schemas.openxmlformats.org/presentationml/2006/main" xmlns:r="http://schemas.openxmlformats.org/officeDocument/2006/relationships">
+  <p:cSld>
+    <p:spTree>
+      <p:nvGrpSpPr>
+        <p:cNvPr id="1" name=""/>
+        <p:cNvGrpSpPr/>
+        <p:nvPr/>
+      </p:nvGrpSpPr>
+      <p:grpSpPr/>
+      <p:sp>
+        <p:nvSpPr>
+          <p:cNvPr id="2" name="Rectangle 1"/>
+          <p:cNvSpPr/>
+          <p:nvPr/>
+        </p:nvSpPr>
+        <p:spPr>
+          <a:xfrm>
+            <a:off x="0" y="0"/>
+            <a:ext cx="12191695" cy="6858000"/>
+          </a:xfrm>
+          <a:prstGeom prst="rect">
+            <a:avLst/>
+          </a:prstGeom>
+          <a:solidFill>
+            <a:srgbClr val="0D0D1A"/>
+          </a:solidFill>
+          <a:ln>
+            <a:noFill/>
+          </a:ln>
+        </p:spPr>
+        <p:style>
+          <a:lnRef idx="1">
+            <a:schemeClr val="accent1"/>
+          </a:lnRef>
+          <a:fillRef idx="3">
+            <a:schemeClr val="accent1"/>
+          </a:fillRef>
+          <a:effectRef idx="2">
+            <a:schemeClr val="accent1"/>
+          </a:effectRef>
+          <a:fontRef idx="minor">
+            <a:schemeClr val="lt1"/>
+          </a:fontRef>
+        </p:style>
+        <p:txBody>
+          <a:bodyPr rtlCol="0" anchor="ctr"/>
+          <a:lstStyle/>
+          <a:p>
+            <a:pPr algn="ctr"/>
+          </a:p>
+        </p:txBody>
+      </p:sp>
+      <p:sp>
+        <p:nvSpPr>
+          <p:cNvPr id="3" name="TextBox 2"/>
+          <p:cNvSpPr txBox="1"/>
+          <p:nvPr/>
+        </p:nvSpPr>
+        <p:spPr>
+          <a:xfrm>
+            <a:off x="731520" y="365760"/>
+            <a:ext cx="10698480" cy="914400"/>
+          </a:xfrm>
+          <a:prstGeom prst="rect">
+            <a:avLst/>
+          </a:prstGeom>
+          <a:noFill/>
+        </p:spPr>
+        <p:txBody>
+          <a:bodyPr wrap="square">
+            <a:spAutoFit/>
+          </a:bodyPr>
+          <a:lstStyle/>
+          <a:p>
+            <a:pPr>
+              <a:defRPr sz="2400" b="1">
+                <a:solidFill>
+                  <a:srgbClr val="4ECCA3"/>
+                </a:solidFill>
+              </a:defRPr>
+            </a:pPr>
+            <a:r>
+              <a:t>برنامه اقدام · ACTION PLAN  |  جمع‌بندی و برنامه ۳۰ روزه آینده</a:t>
+            </a:r>
+          </a:p>
+          <a:p>
+            <a:pPr>
+              <a:defRPr sz="1400">
+                <a:solidFill>
+                  <a:srgbClr val="969EB4"/>
+                </a:solidFill>
+              </a:defRPr>
+            </a:pPr>
+            <a:r>
+              <a:t>نقشه راه ۴ هفته‌ای برای رسیدن به آمادگی در جلسات ارزیابی:</a:t>
+            </a:r>
+          </a:p>
+        </p:txBody>
+      </p:sp>
+      <p:sp>
+        <p:nvSpPr>
+          <p:cNvPr id="4" name="Rounded Rectangle 3"/>
+          <p:cNvSpPr/>
+          <p:nvPr/>
+        </p:nvSpPr>
+        <p:spPr>
+          <a:xfrm>
+            <a:off x="731520" y="1463040"/>
+            <a:ext cx="2503170" cy="2011680"/>
+          </a:xfrm>
+          <a:prstGeom prst="roundRect">
+            <a:avLst/>
+          </a:prstGeom>
+          <a:solidFill>
+            <a:srgbClr val="141428"/>
+          </a:solidFill>
+          <a:ln w="19050">
+            <a:solidFill>
+              <a:srgbClr val="4ECCA3"/>
+            </a:solidFill>
+          </a:ln>
+        </p:spPr>
+        <p:style>
+          <a:lnRef idx="1">
+            <a:schemeClr val="accent1"/>
+          </a:lnRef>
+          <a:fillRef idx="3">
+            <a:schemeClr val="accent1"/>
+          </a:fillRef>
+          <a:effectRef idx="2">
+            <a:schemeClr val="accent1"/>
+          </a:effectRef>
+          <a:fontRef idx="minor">
+            <a:schemeClr val="lt1"/>
+          </a:fontRef>
+        </p:style>
+        <p:txBody>
+          <a:bodyPr rtlCol="0" anchor="ctr" wrap="square"/>
+          <a:lstStyle/>
+          <a:p>
+            <a:pPr algn="ctr">
+              <a:defRPr sz="1400" b="1">
+                <a:solidFill>
+                  <a:srgbClr val="4ECCA3"/>
+                </a:solidFill>
+              </a:defRPr>
+            </a:pPr>
+            <a:r>
+              <a:t>هفته اول: مبانی آرایه و هش</a:t>
+            </a:r>
+          </a:p>
+          <a:p>
+            <a:pPr>
+              <a:defRPr sz="1100">
+                <a:solidFill>
+                  <a:srgbClr val="DDE1F5"/>
+                </a:solidFill>
+              </a:defRPr>
+            </a:pPr>
+            <a:r>
+              <a:t>حل ۵ مسئله Easy اول Blind 75 مانند جمع دو تایی و Contains Duplicate.</a:t>
+            </a:r>
+          </a:p>
+        </p:txBody>
+      </p:sp>
+      <p:sp>
+        <p:nvSpPr>
+          <p:cNvPr id="5" name="Rounded Rectangle 4"/>
+          <p:cNvSpPr/>
+          <p:nvPr/>
+        </p:nvSpPr>
+        <p:spPr>
+          <a:xfrm>
+            <a:off x="3463289" y="1463040"/>
+            <a:ext cx="2503170" cy="2011680"/>
+          </a:xfrm>
+          <a:prstGeom prst="roundRect">
+            <a:avLst/>
+          </a:prstGeom>
+          <a:solidFill>
+            <a:srgbClr val="141428"/>
+          </a:solidFill>
+          <a:ln w="19050">
+            <a:solidFill>
+              <a:srgbClr val="7C8FF5"/>
+            </a:solidFill>
+          </a:ln>
+        </p:spPr>
+        <p:style>
+          <a:lnRef idx="1">
+            <a:schemeClr val="accent1"/>
+          </a:lnRef>
+          <a:fillRef idx="3">
+            <a:schemeClr val="accent1"/>
+          </a:fillRef>
+          <a:effectRef idx="2">
+            <a:schemeClr val="accent1"/>
+          </a:effectRef>
+          <a:fontRef idx="minor">
+            <a:schemeClr val="lt1"/>
+          </a:fontRef>
+        </p:style>
+        <p:txBody>
+          <a:bodyPr rtlCol="0" anchor="ctr" wrap="square"/>
+          <a:lstStyle/>
+          <a:p>
+            <a:pPr algn="ctr">
+              <a:defRPr sz="1400" b="1">
+                <a:solidFill>
+                  <a:srgbClr val="7C8FF5"/>
+                </a:solidFill>
+              </a:defRPr>
+            </a:pPr>
+            <a:r>
+              <a:t>هفته دوم: نشانگرها و پنجره</a:t>
+            </a:r>
+          </a:p>
+          <a:p>
+            <a:pPr>
+              <a:defRPr sz="1100">
+                <a:solidFill>
+                  <a:srgbClr val="DDE1F5"/>
+                </a:solidFill>
+              </a:defRPr>
+            </a:pPr>
+            <a:r>
+              <a:t>الگوهای Two Pointers و Sliding Window با مرور منظم مسائل هفته اول.</a:t>
+            </a:r>
+          </a:p>
+        </p:txBody>
+      </p:sp>
+      <p:sp>
+        <p:nvSpPr>
+          <p:cNvPr id="6" name="Rounded Rectangle 5"/>
+          <p:cNvSpPr/>
+          <p:nvPr/>
+        </p:nvSpPr>
+        <p:spPr>
+          <a:xfrm>
+            <a:off x="6195059" y="1463040"/>
+            <a:ext cx="2503170" cy="2011680"/>
+          </a:xfrm>
+          <a:prstGeom prst="roundRect">
+            <a:avLst/>
+          </a:prstGeom>
+          <a:solidFill>
+            <a:srgbClr val="141428"/>
+          </a:solidFill>
+          <a:ln w="19050">
+            <a:solidFill>
+              <a:srgbClr val="E9A84C"/>
+            </a:solidFill>
+          </a:ln>
+        </p:spPr>
+        <p:style>
+          <a:lnRef idx="1">
+            <a:schemeClr val="accent1"/>
+          </a:lnRef>
+          <a:fillRef idx="3">
+            <a:schemeClr val="accent1"/>
+          </a:fillRef>
+          <a:effectRef idx="2">
+            <a:schemeClr val="accent1"/>
+          </a:effectRef>
+          <a:fontRef idx="minor">
+            <a:schemeClr val="lt1"/>
+          </a:fontRef>
+        </p:style>
+        <p:txBody>
+          <a:bodyPr rtlCol="0" anchor="ctr" wrap="square"/>
+          <a:lstStyle/>
+          <a:p>
+            <a:pPr algn="ctr">
+              <a:defRPr sz="1400" b="1">
+                <a:solidFill>
+                  <a:srgbClr val="E9A84C"/>
+                </a:solidFill>
+              </a:defRPr>
+            </a:pPr>
+            <a:r>
+              <a:t>هفته سوم: ساختارها و پشته</a:t>
+            </a:r>
+          </a:p>
+          <a:p>
+            <a:pPr>
+              <a:defRPr sz="1100">
+                <a:solidFill>
+                  <a:srgbClr val="DDE1F5"/>
+                </a:solidFill>
+              </a:defRPr>
+            </a:pPr>
+            <a:r>
+              <a:t>درخت‌ها، پشته (Stack) و پیمایش‌های DFS و BFS پایه با رسم روی کاغذ.</a:t>
+            </a:r>
+          </a:p>
+        </p:txBody>
+      </p:sp>
+      <p:sp>
+        <p:nvSpPr>
+          <p:cNvPr id="7" name="Rounded Rectangle 6"/>
+          <p:cNvSpPr/>
+          <p:nvPr/>
+        </p:nvSpPr>
+        <p:spPr>
+          <a:xfrm>
+            <a:off x="8926830" y="1463040"/>
+            <a:ext cx="2503170" cy="2011680"/>
+          </a:xfrm>
+          <a:prstGeom prst="roundRect">
+            <a:avLst/>
+          </a:prstGeom>
+          <a:solidFill>
+            <a:srgbClr val="141428"/>
+          </a:solidFill>
+          <a:ln w="19050">
+            <a:solidFill>
+              <a:srgbClr val="4ECCA3"/>
+            </a:solidFill>
+          </a:ln>
+        </p:spPr>
+        <p:style>
+          <a:lnRef idx="1">
+            <a:schemeClr val="accent1"/>
+          </a:lnRef>
+          <a:fillRef idx="3">
+            <a:schemeClr val="accent1"/>
+          </a:fillRef>
+          <a:effectRef idx="2">
+            <a:schemeClr val="accent1"/>
+          </a:effectRef>
+          <a:fontRef idx="minor">
+            <a:schemeClr val="lt1"/>
+          </a:fontRef>
+        </p:style>
+        <p:txBody>
+          <a:bodyPr rtlCol="0" anchor="ctr" wrap="square"/>
+          <a:lstStyle/>
+          <a:p>
+            <a:pPr algn="ctr">
+              <a:defRPr sz="1400" b="1">
+                <a:solidFill>
+                  <a:srgbClr val="4ECCA3"/>
+                </a:solidFill>
+              </a:defRPr>
+            </a:pPr>
+            <a:r>
+              <a:t>هفته چهارم: تست‌های Medium</a:t>
+            </a:r>
+          </a:p>
+          <a:p>
+            <a:pPr>
+              <a:defRPr sz="1100">
+                <a:solidFill>
+                  <a:srgbClr val="DDE1F5"/>
+                </a:solidFill>
+              </a:defRPr>
+            </a:pPr>
+            <a:r>
+              <a:t>ورود به مسائل سطح Medium و تمرین با تایمر ۳۰ دقیقه‌ای ارزیابی.</a:t>
+            </a:r>
+          </a:p>
+        </p:txBody>
+      </p:sp>
+      <p:sp>
+        <p:nvSpPr>
+          <p:cNvPr id="8" name="Rounded Rectangle 7"/>
+          <p:cNvSpPr/>
+          <p:nvPr/>
+        </p:nvSpPr>
+        <p:spPr>
+          <a:xfrm>
+            <a:off x="731520" y="5486400"/>
+            <a:ext cx="10698480" cy="822960"/>
+          </a:xfrm>
+          <a:prstGeom prst="roundRect">
+            <a:avLst/>
+          </a:prstGeom>
+          <a:solidFill>
+            <a:srgbClr val="1C1C38"/>
+          </a:solidFill>
+          <a:ln w="12700">
+            <a:solidFill>
+              <a:srgbClr val="7C8FF5"/>
+            </a:solidFill>
+          </a:ln>
+        </p:spPr>
+        <p:style>
+          <a:lnRef idx="1">
+            <a:schemeClr val="accent1"/>
+          </a:lnRef>
+          <a:fillRef idx="3">
+            <a:schemeClr val="accent1"/>
+          </a:fillRef>
+          <a:effectRef idx="2">
+            <a:schemeClr val="accent1"/>
+          </a:effectRef>
+          <a:fontRef idx="minor">
+            <a:schemeClr val="lt1"/>
+          </a:fontRef>
+        </p:style>
+        <p:txBody>
+          <a:bodyPr rtlCol="0" anchor="ctr" wrap="square"/>
+          <a:lstStyle/>
+          <a:p>
+            <a:pPr algn="ctr">
+              <a:defRPr sz="1200" i="1">
+                <a:solidFill>
+                  <a:srgbClr val="7C8FF5"/>
+                </a:solidFill>
+              </a:defRPr>
+            </a:pPr>
+            <a:r>
+              <a:t>«پیوستگی روزانه ۴۵ دقیقه تمرین عمیق، معجزه‌ای خلق می‌کند که تمرین‌های ۱۰ ساعته‌ی بی‌هدف هرگز نخواهد کرد.»</a:t>
+            </a:r>
+          </a:p>
+        </p:txBody>
+      </p:sp>
+    </p:spTree>
+  </p:cSld>
+  <p:clrMapOvr>
+    <a:masterClrMapping/>
+  </p:clrMapOvr>
+</p:sld>
+</file>
+
+<file path=ppt/slides/slide39.xml><?xml version="1.0" encoding="utf-8"?>
+<p:sld xmlns:a="http://schemas.openxmlformats.org/drawingml/2006/main" xmlns:p="http://schemas.openxmlformats.org/presentationml/2006/main" xmlns:r="http://schemas.openxmlformats.org/officeDocument/2006/relationships">
+  <p:cSld>
+    <p:spTree>
+      <p:nvGrpSpPr>
+        <p:cNvPr id="1" name=""/>
+        <p:cNvGrpSpPr/>
+        <p:nvPr/>
+      </p:nvGrpSpPr>
+      <p:grpSpPr/>
+      <p:sp>
+        <p:nvSpPr>
+          <p:cNvPr id="2" name="Rectangle 1"/>
+          <p:cNvSpPr/>
+          <p:nvPr/>
+        </p:nvSpPr>
+        <p:spPr>
+          <a:xfrm>
+            <a:off x="0" y="0"/>
+            <a:ext cx="12191695" cy="6858000"/>
+          </a:xfrm>
+          <a:prstGeom prst="rect">
+            <a:avLst/>
+          </a:prstGeom>
+          <a:solidFill>
+            <a:srgbClr val="0D0D1A"/>
+          </a:solidFill>
+          <a:ln>
+            <a:noFill/>
+          </a:ln>
+        </p:spPr>
+        <p:style>
+          <a:lnRef idx="1">
+            <a:schemeClr val="accent1"/>
+          </a:lnRef>
+          <a:fillRef idx="3">
+            <a:schemeClr val="accent1"/>
+          </a:fillRef>
+          <a:effectRef idx="2">
+            <a:schemeClr val="accent1"/>
+          </a:effectRef>
+          <a:fontRef idx="minor">
+            <a:schemeClr val="lt1"/>
+          </a:fontRef>
+        </p:style>
+        <p:txBody>
+          <a:bodyPr rtlCol="0" anchor="ctr"/>
+          <a:lstStyle/>
+          <a:p>
+            <a:pPr algn="ctr"/>
+          </a:p>
+        </p:txBody>
+      </p:sp>
+      <p:sp>
+        <p:nvSpPr>
           <p:cNvPr id="3" name="TextBox 2"/>
           <p:cNvSpPr txBox="1"/>
           <p:nvPr/>
@@ -18815,7 +21262,7 @@
         </p:nvSpPr>
         <p:spPr>
           <a:xfrm>
-            <a:off x="731520" y="3703320"/>
+            <a:off x="731520" y="3611880"/>
             <a:ext cx="10698480" cy="1463040"/>
           </a:xfrm>
           <a:prstGeom prst="rect">
@@ -19726,7 +22173,7 @@
         </p:nvSpPr>
         <p:spPr>
           <a:xfrm>
-            <a:off x="731520" y="3703320"/>
+            <a:off x="731520" y="3611880"/>
             <a:ext cx="10698480" cy="1463040"/>
           </a:xfrm>
           <a:prstGeom prst="rect">
@@ -20067,7 +22514,7 @@
         </p:nvSpPr>
         <p:spPr>
           <a:xfrm>
-            <a:off x="731520" y="3703320"/>
+            <a:off x="731520" y="3611880"/>
             <a:ext cx="5212080" cy="1645920"/>
           </a:xfrm>
           <a:prstGeom prst="roundRect">
@@ -20133,7 +22580,7 @@
         </p:nvSpPr>
         <p:spPr>
           <a:xfrm>
-            <a:off x="6217920" y="3703320"/>
+            <a:off x="6217920" y="3611880"/>
             <a:ext cx="5212080" cy="1645920"/>
           </a:xfrm>
           <a:prstGeom prst="roundRect">
